--- a/output/wordlabs-report-3day.pptx
+++ b/output/wordlabs-report-3day.pptx
@@ -6071,7 +6071,7 @@
                 <a:ea typeface="Calibri" pitchFamily="34" charset="-122"/>
                 <a:cs typeface="Calibri" pitchFamily="34" charset="-120"/>
               </a:rPr>
-              <a:t> carefully noted that the accident had been </a:t>
+              <a:t> explained that the accident had gone </a:t>
             </a:r>
             <a:pPr algn="l" indent="0" marL="0">
               <a:buNone/>
@@ -6088,7 +6088,7 @@
                 <a:ea typeface="Calibri" pitchFamily="34" charset="-122"/>
                 <a:cs typeface="Calibri" pitchFamily="34" charset="-120"/>
               </a:rPr>
-              <a:t>misreported</a:t>
+              <a:t>unreported</a:t>
             </a:r>
             <a:pPr algn="l" indent="0" marL="0">
               <a:buNone/>
@@ -6102,7 +6102,7 @@
                 <a:ea typeface="Calibri" pitchFamily="34" charset="-122"/>
                 <a:cs typeface="Calibri" pitchFamily="34" charset="-120"/>
               </a:rPr>
-              <a:t> in yesterday's newspaper.</a:t>
+              <a:t> for several hours.</a:t>
             </a:r>
             <a:endParaRPr lang="en-US" sz="1800" dirty="0"/>
           </a:p>
@@ -6385,7 +6385,7 @@
                 <a:ea typeface="Trebuchet MS" pitchFamily="34" charset="-122"/>
                 <a:cs typeface="Trebuchet MS" pitchFamily="34" charset="-120"/>
               </a:rPr>
-              <a:t>misreported</a:t>
+              <a:t>unreported</a:t>
             </a:r>
             <a:endParaRPr lang="en-US" sz="1400" dirty="0"/>
           </a:p>
@@ -7762,7 +7762,7 @@
         </p:nvSpPr>
         <p:spPr>
           <a:xfrm>
-            <a:off x="2938272" y="2258568"/>
+            <a:off x="2221992" y="2258568"/>
             <a:ext cx="1828800" cy="292608"/>
           </a:xfrm>
           <a:prstGeom prst="rect">
@@ -7771,11 +7771,11 @@
             </a:avLst>
           </a:prstGeom>
           <a:solidFill>
-            <a:srgbClr val="CCFBF1"/>
+            <a:srgbClr val="DDD6FE"/>
           </a:solidFill>
           <a:ln w="19050">
             <a:solidFill>
-              <a:srgbClr val="0D9488"/>
+              <a:srgbClr val="7C3AED"/>
             </a:solidFill>
             <a:prstDash val="solid"/>
           </a:ln>
@@ -7796,7 +7796,7 @@
         </p:nvSpPr>
         <p:spPr>
           <a:xfrm>
-            <a:off x="2938272" y="2258568"/>
+            <a:off x="2221992" y="2258568"/>
             <a:ext cx="1828800" cy="292608"/>
           </a:xfrm>
           <a:prstGeom prst="rect">
@@ -7815,13 +7815,13 @@
             <a:r>
               <a:rPr lang="en-US" sz="1300" b="1" dirty="0">
                 <a:solidFill>
-                  <a:srgbClr val="0F766E"/>
+                  <a:srgbClr val="4C1D95"/>
                 </a:solidFill>
                 <a:latin typeface="Trebuchet MS" pitchFamily="34" charset="0"/>
                 <a:ea typeface="Trebuchet MS" pitchFamily="34" charset="-122"/>
                 <a:cs typeface="Trebuchet MS" pitchFamily="34" charset="-120"/>
               </a:rPr>
-              <a:t>report</a:t>
+              <a:t>re</a:t>
             </a:r>
             <a:endParaRPr lang="en-US" sz="1300" dirty="0"/>
           </a:p>
@@ -7835,7 +7835,7 @@
         </p:nvSpPr>
         <p:spPr>
           <a:xfrm>
-            <a:off x="2938272" y="2569464"/>
+            <a:off x="2221992" y="2569464"/>
             <a:ext cx="1828800" cy="201168"/>
           </a:xfrm>
           <a:prstGeom prst="rect">
@@ -7860,7 +7860,7 @@
                 <a:ea typeface="Calibri" pitchFamily="34" charset="-122"/>
                 <a:cs typeface="Calibri" pitchFamily="34" charset="-120"/>
               </a:rPr>
-              <a:t>to carry back, to tell</a:t>
+              <a:t>again, back</a:t>
             </a:r>
             <a:endParaRPr lang="en-US" sz="850" dirty="0"/>
           </a:p>
@@ -7874,7 +7874,7 @@
         </p:nvSpPr>
         <p:spPr>
           <a:xfrm>
-            <a:off x="5803392" y="2258568"/>
+            <a:off x="4370832" y="2258568"/>
             <a:ext cx="1828800" cy="292608"/>
           </a:xfrm>
           <a:prstGeom prst="rect">
@@ -7908,7 +7908,7 @@
         </p:nvSpPr>
         <p:spPr>
           <a:xfrm>
-            <a:off x="5803392" y="2258568"/>
+            <a:off x="4370832" y="2258568"/>
             <a:ext cx="1828800" cy="292608"/>
           </a:xfrm>
           <a:prstGeom prst="rect">
@@ -7933,7 +7933,7 @@
                 <a:ea typeface="Trebuchet MS" pitchFamily="34" charset="-122"/>
                 <a:cs typeface="Trebuchet MS" pitchFamily="34" charset="-120"/>
               </a:rPr>
-              <a:t>er</a:t>
+              <a:t>port</a:t>
             </a:r>
             <a:endParaRPr lang="en-US" sz="1300" dirty="0"/>
           </a:p>
@@ -7947,7 +7947,7 @@
         </p:nvSpPr>
         <p:spPr>
           <a:xfrm>
-            <a:off x="5803392" y="2569464"/>
+            <a:off x="4370832" y="2569464"/>
             <a:ext cx="1828800" cy="201168"/>
           </a:xfrm>
           <a:prstGeom prst="rect">
@@ -7972,7 +7972,7 @@
                 <a:ea typeface="Calibri" pitchFamily="34" charset="-122"/>
                 <a:cs typeface="Calibri" pitchFamily="34" charset="-120"/>
               </a:rPr>
-              <a:t>a person who does something</a:t>
+              <a:t>carry, bring</a:t>
             </a:r>
             <a:endParaRPr lang="en-US" sz="850" dirty="0"/>
           </a:p>
@@ -7981,6 +7981,118 @@
       <p:sp>
         <p:nvSpPr>
           <p:cNvPr id="22" name="Shape 20"/>
+          <p:cNvSpPr/>
+          <p:nvPr/>
+        </p:nvSpPr>
+        <p:spPr>
+          <a:xfrm>
+            <a:off x="6519672" y="2258568"/>
+            <a:ext cx="1828800" cy="292608"/>
+          </a:xfrm>
+          <a:prstGeom prst="rect">
+            <a:avLst>
+              <a:gd name="adj" fmla="val 25000"/>
+            </a:avLst>
+          </a:prstGeom>
+          <a:solidFill>
+            <a:srgbClr val="FCE7F3"/>
+          </a:solidFill>
+          <a:ln w="19050">
+            <a:solidFill>
+              <a:srgbClr val="DB2777"/>
+            </a:solidFill>
+            <a:prstDash val="solid"/>
+          </a:ln>
+          <a:effectLst>
+            <a:outerShdw sx="100000" sy="100000" kx="0" ky="0" algn="bl" rotWithShape="0" blurRad="101600" dist="38100" dir="8100000">
+              <a:srgbClr val="000000">
+                <a:alpha val="12000"/>
+              </a:srgbClr>
+            </a:outerShdw>
+          </a:effectLst>
+        </p:spPr>
+      </p:sp>
+      <p:sp>
+        <p:nvSpPr>
+          <p:cNvPr id="23" name="Text 21"/>
+          <p:cNvSpPr/>
+          <p:nvPr/>
+        </p:nvSpPr>
+        <p:spPr>
+          <a:xfrm>
+            <a:off x="6519672" y="2258568"/>
+            <a:ext cx="1828800" cy="292608"/>
+          </a:xfrm>
+          <a:prstGeom prst="rect">
+            <a:avLst/>
+          </a:prstGeom>
+          <a:noFill/>
+          <a:ln/>
+        </p:spPr>
+        <p:txBody>
+          <a:bodyPr wrap="square" lIns="0" tIns="0" rIns="0" bIns="0" rtlCol="0" anchor="ctr"/>
+          <a:lstStyle/>
+          <a:p>
+            <a:pPr algn="ctr" indent="0" marL="0">
+              <a:buNone/>
+            </a:pPr>
+            <a:r>
+              <a:rPr lang="en-US" sz="1300" b="1" dirty="0">
+                <a:solidFill>
+                  <a:srgbClr val="9D174D"/>
+                </a:solidFill>
+                <a:latin typeface="Trebuchet MS" pitchFamily="34" charset="0"/>
+                <a:ea typeface="Trebuchet MS" pitchFamily="34" charset="-122"/>
+                <a:cs typeface="Trebuchet MS" pitchFamily="34" charset="-120"/>
+              </a:rPr>
+              <a:t>er</a:t>
+            </a:r>
+            <a:endParaRPr lang="en-US" sz="1300" dirty="0"/>
+          </a:p>
+        </p:txBody>
+      </p:sp>
+      <p:sp>
+        <p:nvSpPr>
+          <p:cNvPr id="24" name="Text 22"/>
+          <p:cNvSpPr/>
+          <p:nvPr/>
+        </p:nvSpPr>
+        <p:spPr>
+          <a:xfrm>
+            <a:off x="6519672" y="2569464"/>
+            <a:ext cx="1828800" cy="201168"/>
+          </a:xfrm>
+          <a:prstGeom prst="rect">
+            <a:avLst/>
+          </a:prstGeom>
+          <a:noFill/>
+          <a:ln/>
+        </p:spPr>
+        <p:txBody>
+          <a:bodyPr wrap="square" lIns="0" tIns="0" rIns="0" bIns="0" rtlCol="0" anchor="t"/>
+          <a:lstStyle/>
+          <a:p>
+            <a:pPr algn="ctr" indent="0" marL="0">
+              <a:buNone/>
+            </a:pPr>
+            <a:r>
+              <a:rPr lang="en-US" sz="850" dirty="0">
+                <a:solidFill>
+                  <a:srgbClr val="475569"/>
+                </a:solidFill>
+                <a:latin typeface="Calibri" pitchFamily="34" charset="0"/>
+                <a:ea typeface="Calibri" pitchFamily="34" charset="-122"/>
+                <a:cs typeface="Calibri" pitchFamily="34" charset="-120"/>
+              </a:rPr>
+              <a:t>person who does something</a:t>
+            </a:r>
+            <a:endParaRPr lang="en-US" sz="850" dirty="0"/>
+          </a:p>
+        </p:txBody>
+      </p:sp>
+      <p:sp>
+        <p:nvSpPr>
+          <p:cNvPr id="25" name="Shape 23"/>
           <p:cNvSpPr/>
           <p:nvPr/>
         </p:nvSpPr>
@@ -8007,7 +8119,7 @@
       </p:sp>
       <p:sp>
         <p:nvSpPr>
-          <p:cNvPr id="23" name="Text 21"/>
+          <p:cNvPr id="26" name="Text 24"/>
           <p:cNvSpPr/>
           <p:nvPr/>
         </p:nvSpPr>
@@ -8046,7 +8158,7 @@
       </p:sp>
       <p:sp>
         <p:nvSpPr>
-          <p:cNvPr id="24" name="Shape 22"/>
+          <p:cNvPr id="27" name="Shape 25"/>
           <p:cNvSpPr/>
           <p:nvPr/>
         </p:nvSpPr>
@@ -8073,7 +8185,7 @@
       </p:sp>
       <p:sp>
         <p:nvSpPr>
-          <p:cNvPr id="25" name="Text 23"/>
+          <p:cNvPr id="28" name="Text 26"/>
           <p:cNvSpPr/>
           <p:nvPr/>
         </p:nvSpPr>
@@ -8112,7 +8224,7 @@
       </p:sp>
       <p:sp>
         <p:nvSpPr>
-          <p:cNvPr id="26" name="Shape 24"/>
+          <p:cNvPr id="29" name="Shape 27"/>
           <p:cNvSpPr/>
           <p:nvPr/>
         </p:nvSpPr>
@@ -8139,7 +8251,7 @@
       </p:sp>
       <p:sp>
         <p:nvSpPr>
-          <p:cNvPr id="27" name="Text 25"/>
+          <p:cNvPr id="30" name="Text 28"/>
           <p:cNvSpPr/>
           <p:nvPr/>
         </p:nvSpPr>
@@ -8178,7 +8290,7 @@
       </p:sp>
       <p:sp>
         <p:nvSpPr>
-          <p:cNvPr id="28" name="Shape 26"/>
+          <p:cNvPr id="31" name="Shape 29"/>
           <p:cNvSpPr/>
           <p:nvPr/>
         </p:nvSpPr>
@@ -8205,7 +8317,7 @@
       </p:sp>
       <p:sp>
         <p:nvSpPr>
-          <p:cNvPr id="29" name="Text 27"/>
+          <p:cNvPr id="32" name="Text 30"/>
           <p:cNvSpPr/>
           <p:nvPr/>
         </p:nvSpPr>
@@ -8747,7 +8859,7 @@
         </p:nvSpPr>
         <p:spPr>
           <a:xfrm>
-            <a:off x="2938272" y="2258568"/>
+            <a:off x="2221992" y="2258568"/>
             <a:ext cx="1828800" cy="292608"/>
           </a:xfrm>
           <a:prstGeom prst="rect">
@@ -8756,11 +8868,11 @@
             </a:avLst>
           </a:prstGeom>
           <a:solidFill>
-            <a:srgbClr val="CCFBF1"/>
+            <a:srgbClr val="DDD6FE"/>
           </a:solidFill>
           <a:ln w="19050">
             <a:solidFill>
-              <a:srgbClr val="0D9488"/>
+              <a:srgbClr val="7C3AED"/>
             </a:solidFill>
             <a:prstDash val="solid"/>
           </a:ln>
@@ -8781,7 +8893,7 @@
         </p:nvSpPr>
         <p:spPr>
           <a:xfrm>
-            <a:off x="2938272" y="2258568"/>
+            <a:off x="2221992" y="2258568"/>
             <a:ext cx="1828800" cy="292608"/>
           </a:xfrm>
           <a:prstGeom prst="rect">
@@ -8800,13 +8912,13 @@
             <a:r>
               <a:rPr lang="en-US" sz="1300" b="1" dirty="0">
                 <a:solidFill>
-                  <a:srgbClr val="0F766E"/>
+                  <a:srgbClr val="4C1D95"/>
                 </a:solidFill>
                 <a:latin typeface="Trebuchet MS" pitchFamily="34" charset="0"/>
                 <a:ea typeface="Trebuchet MS" pitchFamily="34" charset="-122"/>
                 <a:cs typeface="Trebuchet MS" pitchFamily="34" charset="-120"/>
               </a:rPr>
-              <a:t>report</a:t>
+              <a:t>re</a:t>
             </a:r>
             <a:endParaRPr lang="en-US" sz="1300" dirty="0"/>
           </a:p>
@@ -8820,7 +8932,7 @@
         </p:nvSpPr>
         <p:spPr>
           <a:xfrm>
-            <a:off x="2938272" y="2569464"/>
+            <a:off x="2221992" y="2569464"/>
             <a:ext cx="1828800" cy="201168"/>
           </a:xfrm>
           <a:prstGeom prst="rect">
@@ -8845,7 +8957,7 @@
                 <a:ea typeface="Calibri" pitchFamily="34" charset="-122"/>
                 <a:cs typeface="Calibri" pitchFamily="34" charset="-120"/>
               </a:rPr>
-              <a:t>to carry back, to tell</a:t>
+              <a:t>again, back</a:t>
             </a:r>
             <a:endParaRPr lang="en-US" sz="850" dirty="0"/>
           </a:p>
@@ -8859,7 +8971,7 @@
         </p:nvSpPr>
         <p:spPr>
           <a:xfrm>
-            <a:off x="5803392" y="2258568"/>
+            <a:off x="4370832" y="2258568"/>
             <a:ext cx="1828800" cy="292608"/>
           </a:xfrm>
           <a:prstGeom prst="rect">
@@ -8893,7 +9005,7 @@
         </p:nvSpPr>
         <p:spPr>
           <a:xfrm>
-            <a:off x="5803392" y="2258568"/>
+            <a:off x="4370832" y="2258568"/>
             <a:ext cx="1828800" cy="292608"/>
           </a:xfrm>
           <a:prstGeom prst="rect">
@@ -8918,7 +9030,7 @@
                 <a:ea typeface="Trebuchet MS" pitchFamily="34" charset="-122"/>
                 <a:cs typeface="Trebuchet MS" pitchFamily="34" charset="-120"/>
               </a:rPr>
-              <a:t>er</a:t>
+              <a:t>port</a:t>
             </a:r>
             <a:endParaRPr lang="en-US" sz="1300" dirty="0"/>
           </a:p>
@@ -8932,7 +9044,7 @@
         </p:nvSpPr>
         <p:spPr>
           <a:xfrm>
-            <a:off x="5803392" y="2569464"/>
+            <a:off x="4370832" y="2569464"/>
             <a:ext cx="1828800" cy="201168"/>
           </a:xfrm>
           <a:prstGeom prst="rect">
@@ -8957,7 +9069,7 @@
                 <a:ea typeface="Calibri" pitchFamily="34" charset="-122"/>
                 <a:cs typeface="Calibri" pitchFamily="34" charset="-120"/>
               </a:rPr>
-              <a:t>a person who does something</a:t>
+              <a:t>carry, bring</a:t>
             </a:r>
             <a:endParaRPr lang="en-US" sz="850" dirty="0"/>
           </a:p>
@@ -8966,6 +9078,118 @@
       <p:sp>
         <p:nvSpPr>
           <p:cNvPr id="22" name="Shape 20"/>
+          <p:cNvSpPr/>
+          <p:nvPr/>
+        </p:nvSpPr>
+        <p:spPr>
+          <a:xfrm>
+            <a:off x="6519672" y="2258568"/>
+            <a:ext cx="1828800" cy="292608"/>
+          </a:xfrm>
+          <a:prstGeom prst="rect">
+            <a:avLst>
+              <a:gd name="adj" fmla="val 25000"/>
+            </a:avLst>
+          </a:prstGeom>
+          <a:solidFill>
+            <a:srgbClr val="FCE7F3"/>
+          </a:solidFill>
+          <a:ln w="19050">
+            <a:solidFill>
+              <a:srgbClr val="DB2777"/>
+            </a:solidFill>
+            <a:prstDash val="solid"/>
+          </a:ln>
+          <a:effectLst>
+            <a:outerShdw sx="100000" sy="100000" kx="0" ky="0" algn="bl" rotWithShape="0" blurRad="101600" dist="38100" dir="8100000">
+              <a:srgbClr val="000000">
+                <a:alpha val="12000"/>
+              </a:srgbClr>
+            </a:outerShdw>
+          </a:effectLst>
+        </p:spPr>
+      </p:sp>
+      <p:sp>
+        <p:nvSpPr>
+          <p:cNvPr id="23" name="Text 21"/>
+          <p:cNvSpPr/>
+          <p:nvPr/>
+        </p:nvSpPr>
+        <p:spPr>
+          <a:xfrm>
+            <a:off x="6519672" y="2258568"/>
+            <a:ext cx="1828800" cy="292608"/>
+          </a:xfrm>
+          <a:prstGeom prst="rect">
+            <a:avLst/>
+          </a:prstGeom>
+          <a:noFill/>
+          <a:ln/>
+        </p:spPr>
+        <p:txBody>
+          <a:bodyPr wrap="square" lIns="0" tIns="0" rIns="0" bIns="0" rtlCol="0" anchor="ctr"/>
+          <a:lstStyle/>
+          <a:p>
+            <a:pPr algn="ctr" indent="0" marL="0">
+              <a:buNone/>
+            </a:pPr>
+            <a:r>
+              <a:rPr lang="en-US" sz="1300" b="1" dirty="0">
+                <a:solidFill>
+                  <a:srgbClr val="9D174D"/>
+                </a:solidFill>
+                <a:latin typeface="Trebuchet MS" pitchFamily="34" charset="0"/>
+                <a:ea typeface="Trebuchet MS" pitchFamily="34" charset="-122"/>
+                <a:cs typeface="Trebuchet MS" pitchFamily="34" charset="-120"/>
+              </a:rPr>
+              <a:t>er</a:t>
+            </a:r>
+            <a:endParaRPr lang="en-US" sz="1300" dirty="0"/>
+          </a:p>
+        </p:txBody>
+      </p:sp>
+      <p:sp>
+        <p:nvSpPr>
+          <p:cNvPr id="24" name="Text 22"/>
+          <p:cNvSpPr/>
+          <p:nvPr/>
+        </p:nvSpPr>
+        <p:spPr>
+          <a:xfrm>
+            <a:off x="6519672" y="2569464"/>
+            <a:ext cx="1828800" cy="201168"/>
+          </a:xfrm>
+          <a:prstGeom prst="rect">
+            <a:avLst/>
+          </a:prstGeom>
+          <a:noFill/>
+          <a:ln/>
+        </p:spPr>
+        <p:txBody>
+          <a:bodyPr wrap="square" lIns="0" tIns="0" rIns="0" bIns="0" rtlCol="0" anchor="t"/>
+          <a:lstStyle/>
+          <a:p>
+            <a:pPr algn="ctr" indent="0" marL="0">
+              <a:buNone/>
+            </a:pPr>
+            <a:r>
+              <a:rPr lang="en-US" sz="850" dirty="0">
+                <a:solidFill>
+                  <a:srgbClr val="475569"/>
+                </a:solidFill>
+                <a:latin typeface="Calibri" pitchFamily="34" charset="0"/>
+                <a:ea typeface="Calibri" pitchFamily="34" charset="-122"/>
+                <a:cs typeface="Calibri" pitchFamily="34" charset="-120"/>
+              </a:rPr>
+              <a:t>person who does something</a:t>
+            </a:r>
+            <a:endParaRPr lang="en-US" sz="850" dirty="0"/>
+          </a:p>
+        </p:txBody>
+      </p:sp>
+      <p:sp>
+        <p:nvSpPr>
+          <p:cNvPr id="25" name="Shape 23"/>
           <p:cNvSpPr/>
           <p:nvPr/>
         </p:nvSpPr>
@@ -8992,7 +9216,7 @@
       </p:sp>
       <p:sp>
         <p:nvSpPr>
-          <p:cNvPr id="23" name="Text 21"/>
+          <p:cNvPr id="26" name="Text 24"/>
           <p:cNvSpPr/>
           <p:nvPr/>
         </p:nvSpPr>
@@ -9031,7 +9255,7 @@
       </p:sp>
       <p:sp>
         <p:nvSpPr>
-          <p:cNvPr id="24" name="Shape 22"/>
+          <p:cNvPr id="27" name="Shape 25"/>
           <p:cNvSpPr/>
           <p:nvPr/>
         </p:nvSpPr>
@@ -9058,7 +9282,7 @@
       </p:sp>
       <p:sp>
         <p:nvSpPr>
-          <p:cNvPr id="25" name="Shape 23"/>
+          <p:cNvPr id="28" name="Shape 26"/>
           <p:cNvSpPr/>
           <p:nvPr/>
         </p:nvSpPr>
@@ -9085,7 +9309,7 @@
       </p:sp>
       <p:sp>
         <p:nvSpPr>
-          <p:cNvPr id="26" name="Text 24"/>
+          <p:cNvPr id="29" name="Text 27"/>
           <p:cNvSpPr/>
           <p:nvPr/>
         </p:nvSpPr>
@@ -9124,7 +9348,7 @@
       </p:sp>
       <p:sp>
         <p:nvSpPr>
-          <p:cNvPr id="27" name="Text 25"/>
+          <p:cNvPr id="30" name="Text 28"/>
           <p:cNvSpPr/>
           <p:nvPr/>
         </p:nvSpPr>
@@ -9163,7 +9387,7 @@
       </p:sp>
       <p:sp>
         <p:nvSpPr>
-          <p:cNvPr id="28" name="Shape 26"/>
+          <p:cNvPr id="31" name="Shape 29"/>
           <p:cNvSpPr/>
           <p:nvPr/>
         </p:nvSpPr>
@@ -9190,7 +9414,7 @@
       </p:sp>
       <p:sp>
         <p:nvSpPr>
-          <p:cNvPr id="29" name="Text 27"/>
+          <p:cNvPr id="32" name="Text 30"/>
           <p:cNvSpPr/>
           <p:nvPr/>
         </p:nvSpPr>
@@ -9221,7 +9445,7 @@
                 <a:ea typeface="Trebuchet MS" pitchFamily="34" charset="-122"/>
                 <a:cs typeface="Trebuchet MS" pitchFamily="34" charset="-120"/>
               </a:rPr>
-              <a:t>por</a:t>
+              <a:t>port</a:t>
             </a:r>
             <a:endParaRPr lang="en-US" sz="1400" dirty="0"/>
           </a:p>
@@ -9229,7 +9453,7 @@
       </p:sp>
       <p:sp>
         <p:nvSpPr>
-          <p:cNvPr id="30" name="Text 28"/>
+          <p:cNvPr id="33" name="Text 31"/>
           <p:cNvSpPr/>
           <p:nvPr/>
         </p:nvSpPr>
@@ -9268,7 +9492,7 @@
       </p:sp>
       <p:sp>
         <p:nvSpPr>
-          <p:cNvPr id="31" name="Shape 29"/>
+          <p:cNvPr id="34" name="Shape 32"/>
           <p:cNvSpPr/>
           <p:nvPr/>
         </p:nvSpPr>
@@ -9295,7 +9519,7 @@
       </p:sp>
       <p:sp>
         <p:nvSpPr>
-          <p:cNvPr id="32" name="Text 30"/>
+          <p:cNvPr id="35" name="Text 33"/>
           <p:cNvSpPr/>
           <p:nvPr/>
         </p:nvSpPr>
@@ -9326,7 +9550,7 @@
                 <a:ea typeface="Trebuchet MS" pitchFamily="34" charset="-122"/>
                 <a:cs typeface="Trebuchet MS" pitchFamily="34" charset="-120"/>
               </a:rPr>
-              <a:t>ter</a:t>
+              <a:t>er</a:t>
             </a:r>
             <a:endParaRPr lang="en-US" sz="1400" dirty="0"/>
           </a:p>
@@ -9334,7 +9558,7 @@
       </p:sp>
       <p:sp>
         <p:nvSpPr>
-          <p:cNvPr id="33" name="Shape 31"/>
+          <p:cNvPr id="36" name="Shape 34"/>
           <p:cNvSpPr/>
           <p:nvPr/>
         </p:nvSpPr>
@@ -9361,7 +9585,7 @@
       </p:sp>
       <p:sp>
         <p:nvSpPr>
-          <p:cNvPr id="34" name="Text 32"/>
+          <p:cNvPr id="37" name="Text 35"/>
           <p:cNvSpPr/>
           <p:nvPr/>
         </p:nvSpPr>
@@ -9400,7 +9624,7 @@
       </p:sp>
       <p:sp>
         <p:nvSpPr>
-          <p:cNvPr id="35" name="Shape 33"/>
+          <p:cNvPr id="38" name="Shape 36"/>
           <p:cNvSpPr/>
           <p:nvPr/>
         </p:nvSpPr>
@@ -9427,7 +9651,7 @@
       </p:sp>
       <p:sp>
         <p:nvSpPr>
-          <p:cNvPr id="36" name="Text 34"/>
+          <p:cNvPr id="39" name="Text 37"/>
           <p:cNvSpPr/>
           <p:nvPr/>
         </p:nvSpPr>
@@ -9969,7 +10193,7 @@
         </p:nvSpPr>
         <p:spPr>
           <a:xfrm>
-            <a:off x="2938272" y="2258568"/>
+            <a:off x="2221992" y="2258568"/>
             <a:ext cx="1828800" cy="292608"/>
           </a:xfrm>
           <a:prstGeom prst="rect">
@@ -9978,11 +10202,11 @@
             </a:avLst>
           </a:prstGeom>
           <a:solidFill>
-            <a:srgbClr val="CCFBF1"/>
+            <a:srgbClr val="DDD6FE"/>
           </a:solidFill>
           <a:ln w="19050">
             <a:solidFill>
-              <a:srgbClr val="0D9488"/>
+              <a:srgbClr val="7C3AED"/>
             </a:solidFill>
             <a:prstDash val="solid"/>
           </a:ln>
@@ -10003,7 +10227,7 @@
         </p:nvSpPr>
         <p:spPr>
           <a:xfrm>
-            <a:off x="2938272" y="2258568"/>
+            <a:off x="2221992" y="2258568"/>
             <a:ext cx="1828800" cy="292608"/>
           </a:xfrm>
           <a:prstGeom prst="rect">
@@ -10022,13 +10246,13 @@
             <a:r>
               <a:rPr lang="en-US" sz="1300" b="1" dirty="0">
                 <a:solidFill>
-                  <a:srgbClr val="0F766E"/>
+                  <a:srgbClr val="4C1D95"/>
                 </a:solidFill>
                 <a:latin typeface="Trebuchet MS" pitchFamily="34" charset="0"/>
                 <a:ea typeface="Trebuchet MS" pitchFamily="34" charset="-122"/>
                 <a:cs typeface="Trebuchet MS" pitchFamily="34" charset="-120"/>
               </a:rPr>
-              <a:t>report</a:t>
+              <a:t>re</a:t>
             </a:r>
             <a:endParaRPr lang="en-US" sz="1300" dirty="0"/>
           </a:p>
@@ -10042,7 +10266,7 @@
         </p:nvSpPr>
         <p:spPr>
           <a:xfrm>
-            <a:off x="2938272" y="2569464"/>
+            <a:off x="2221992" y="2569464"/>
             <a:ext cx="1828800" cy="201168"/>
           </a:xfrm>
           <a:prstGeom prst="rect">
@@ -10067,7 +10291,7 @@
                 <a:ea typeface="Calibri" pitchFamily="34" charset="-122"/>
                 <a:cs typeface="Calibri" pitchFamily="34" charset="-120"/>
               </a:rPr>
-              <a:t>to carry back, to tell</a:t>
+              <a:t>again, back</a:t>
             </a:r>
             <a:endParaRPr lang="en-US" sz="850" dirty="0"/>
           </a:p>
@@ -10081,7 +10305,7 @@
         </p:nvSpPr>
         <p:spPr>
           <a:xfrm>
-            <a:off x="5803392" y="2258568"/>
+            <a:off x="4370832" y="2258568"/>
             <a:ext cx="1828800" cy="292608"/>
           </a:xfrm>
           <a:prstGeom prst="rect">
@@ -10115,7 +10339,7 @@
         </p:nvSpPr>
         <p:spPr>
           <a:xfrm>
-            <a:off x="5803392" y="2258568"/>
+            <a:off x="4370832" y="2258568"/>
             <a:ext cx="1828800" cy="292608"/>
           </a:xfrm>
           <a:prstGeom prst="rect">
@@ -10140,7 +10364,7 @@
                 <a:ea typeface="Trebuchet MS" pitchFamily="34" charset="-122"/>
                 <a:cs typeface="Trebuchet MS" pitchFamily="34" charset="-120"/>
               </a:rPr>
-              <a:t>er</a:t>
+              <a:t>port</a:t>
             </a:r>
             <a:endParaRPr lang="en-US" sz="1300" dirty="0"/>
           </a:p>
@@ -10154,7 +10378,7 @@
         </p:nvSpPr>
         <p:spPr>
           <a:xfrm>
-            <a:off x="5803392" y="2569464"/>
+            <a:off x="4370832" y="2569464"/>
             <a:ext cx="1828800" cy="201168"/>
           </a:xfrm>
           <a:prstGeom prst="rect">
@@ -10179,7 +10403,7 @@
                 <a:ea typeface="Calibri" pitchFamily="34" charset="-122"/>
                 <a:cs typeface="Calibri" pitchFamily="34" charset="-120"/>
               </a:rPr>
-              <a:t>a person who does something</a:t>
+              <a:t>carry, bring</a:t>
             </a:r>
             <a:endParaRPr lang="en-US" sz="850" dirty="0"/>
           </a:p>
@@ -10188,6 +10412,118 @@
       <p:sp>
         <p:nvSpPr>
           <p:cNvPr id="22" name="Shape 20"/>
+          <p:cNvSpPr/>
+          <p:nvPr/>
+        </p:nvSpPr>
+        <p:spPr>
+          <a:xfrm>
+            <a:off x="6519672" y="2258568"/>
+            <a:ext cx="1828800" cy="292608"/>
+          </a:xfrm>
+          <a:prstGeom prst="rect">
+            <a:avLst>
+              <a:gd name="adj" fmla="val 25000"/>
+            </a:avLst>
+          </a:prstGeom>
+          <a:solidFill>
+            <a:srgbClr val="FCE7F3"/>
+          </a:solidFill>
+          <a:ln w="19050">
+            <a:solidFill>
+              <a:srgbClr val="DB2777"/>
+            </a:solidFill>
+            <a:prstDash val="solid"/>
+          </a:ln>
+          <a:effectLst>
+            <a:outerShdw sx="100000" sy="100000" kx="0" ky="0" algn="bl" rotWithShape="0" blurRad="101600" dist="38100" dir="8100000">
+              <a:srgbClr val="000000">
+                <a:alpha val="12000"/>
+              </a:srgbClr>
+            </a:outerShdw>
+          </a:effectLst>
+        </p:spPr>
+      </p:sp>
+      <p:sp>
+        <p:nvSpPr>
+          <p:cNvPr id="23" name="Text 21"/>
+          <p:cNvSpPr/>
+          <p:nvPr/>
+        </p:nvSpPr>
+        <p:spPr>
+          <a:xfrm>
+            <a:off x="6519672" y="2258568"/>
+            <a:ext cx="1828800" cy="292608"/>
+          </a:xfrm>
+          <a:prstGeom prst="rect">
+            <a:avLst/>
+          </a:prstGeom>
+          <a:noFill/>
+          <a:ln/>
+        </p:spPr>
+        <p:txBody>
+          <a:bodyPr wrap="square" lIns="0" tIns="0" rIns="0" bIns="0" rtlCol="0" anchor="ctr"/>
+          <a:lstStyle/>
+          <a:p>
+            <a:pPr algn="ctr" indent="0" marL="0">
+              <a:buNone/>
+            </a:pPr>
+            <a:r>
+              <a:rPr lang="en-US" sz="1300" b="1" dirty="0">
+                <a:solidFill>
+                  <a:srgbClr val="9D174D"/>
+                </a:solidFill>
+                <a:latin typeface="Trebuchet MS" pitchFamily="34" charset="0"/>
+                <a:ea typeface="Trebuchet MS" pitchFamily="34" charset="-122"/>
+                <a:cs typeface="Trebuchet MS" pitchFamily="34" charset="-120"/>
+              </a:rPr>
+              <a:t>er</a:t>
+            </a:r>
+            <a:endParaRPr lang="en-US" sz="1300" dirty="0"/>
+          </a:p>
+        </p:txBody>
+      </p:sp>
+      <p:sp>
+        <p:nvSpPr>
+          <p:cNvPr id="24" name="Text 22"/>
+          <p:cNvSpPr/>
+          <p:nvPr/>
+        </p:nvSpPr>
+        <p:spPr>
+          <a:xfrm>
+            <a:off x="6519672" y="2569464"/>
+            <a:ext cx="1828800" cy="201168"/>
+          </a:xfrm>
+          <a:prstGeom prst="rect">
+            <a:avLst/>
+          </a:prstGeom>
+          <a:noFill/>
+          <a:ln/>
+        </p:spPr>
+        <p:txBody>
+          <a:bodyPr wrap="square" lIns="0" tIns="0" rIns="0" bIns="0" rtlCol="0" anchor="t"/>
+          <a:lstStyle/>
+          <a:p>
+            <a:pPr algn="ctr" indent="0" marL="0">
+              <a:buNone/>
+            </a:pPr>
+            <a:r>
+              <a:rPr lang="en-US" sz="850" dirty="0">
+                <a:solidFill>
+                  <a:srgbClr val="475569"/>
+                </a:solidFill>
+                <a:latin typeface="Calibri" pitchFamily="34" charset="0"/>
+                <a:ea typeface="Calibri" pitchFamily="34" charset="-122"/>
+                <a:cs typeface="Calibri" pitchFamily="34" charset="-120"/>
+              </a:rPr>
+              <a:t>person who does something</a:t>
+            </a:r>
+            <a:endParaRPr lang="en-US" sz="850" dirty="0"/>
+          </a:p>
+        </p:txBody>
+      </p:sp>
+      <p:sp>
+        <p:nvSpPr>
+          <p:cNvPr id="25" name="Shape 23"/>
           <p:cNvSpPr/>
           <p:nvPr/>
         </p:nvSpPr>
@@ -10214,7 +10550,7 @@
       </p:sp>
       <p:sp>
         <p:nvSpPr>
-          <p:cNvPr id="23" name="Text 21"/>
+          <p:cNvPr id="26" name="Text 24"/>
           <p:cNvSpPr/>
           <p:nvPr/>
         </p:nvSpPr>
@@ -10253,7 +10589,7 @@
       </p:sp>
       <p:sp>
         <p:nvSpPr>
-          <p:cNvPr id="24" name="Shape 22"/>
+          <p:cNvPr id="27" name="Shape 25"/>
           <p:cNvSpPr/>
           <p:nvPr/>
         </p:nvSpPr>
@@ -10280,7 +10616,7 @@
       </p:sp>
       <p:sp>
         <p:nvSpPr>
-          <p:cNvPr id="25" name="Shape 23"/>
+          <p:cNvPr id="28" name="Shape 26"/>
           <p:cNvSpPr/>
           <p:nvPr/>
         </p:nvSpPr>
@@ -10307,7 +10643,7 @@
       </p:sp>
       <p:sp>
         <p:nvSpPr>
-          <p:cNvPr id="26" name="Text 24"/>
+          <p:cNvPr id="29" name="Text 27"/>
           <p:cNvSpPr/>
           <p:nvPr/>
         </p:nvSpPr>
@@ -10346,7 +10682,7 @@
       </p:sp>
       <p:sp>
         <p:nvSpPr>
-          <p:cNvPr id="27" name="Text 25"/>
+          <p:cNvPr id="30" name="Text 28"/>
           <p:cNvSpPr/>
           <p:nvPr/>
         </p:nvSpPr>
@@ -10385,7 +10721,7 @@
       </p:sp>
       <p:sp>
         <p:nvSpPr>
-          <p:cNvPr id="28" name="Shape 26"/>
+          <p:cNvPr id="31" name="Shape 29"/>
           <p:cNvSpPr/>
           <p:nvPr/>
         </p:nvSpPr>
@@ -10412,7 +10748,7 @@
       </p:sp>
       <p:sp>
         <p:nvSpPr>
-          <p:cNvPr id="29" name="Text 27"/>
+          <p:cNvPr id="32" name="Text 30"/>
           <p:cNvSpPr/>
           <p:nvPr/>
         </p:nvSpPr>
@@ -10443,7 +10779,7 @@
                 <a:ea typeface="Trebuchet MS" pitchFamily="34" charset="-122"/>
                 <a:cs typeface="Trebuchet MS" pitchFamily="34" charset="-120"/>
               </a:rPr>
-              <a:t>por</a:t>
+              <a:t>port</a:t>
             </a:r>
             <a:endParaRPr lang="en-US" sz="1400" dirty="0"/>
           </a:p>
@@ -10451,7 +10787,7 @@
       </p:sp>
       <p:sp>
         <p:nvSpPr>
-          <p:cNvPr id="30" name="Text 28"/>
+          <p:cNvPr id="33" name="Text 31"/>
           <p:cNvSpPr/>
           <p:nvPr/>
         </p:nvSpPr>
@@ -10490,7 +10826,7 @@
       </p:sp>
       <p:sp>
         <p:nvSpPr>
-          <p:cNvPr id="31" name="Shape 29"/>
+          <p:cNvPr id="34" name="Shape 32"/>
           <p:cNvSpPr/>
           <p:nvPr/>
         </p:nvSpPr>
@@ -10517,7 +10853,7 @@
       </p:sp>
       <p:sp>
         <p:nvSpPr>
-          <p:cNvPr id="32" name="Text 30"/>
+          <p:cNvPr id="35" name="Text 33"/>
           <p:cNvSpPr/>
           <p:nvPr/>
         </p:nvSpPr>
@@ -10548,7 +10884,7 @@
                 <a:ea typeface="Trebuchet MS" pitchFamily="34" charset="-122"/>
                 <a:cs typeface="Trebuchet MS" pitchFamily="34" charset="-120"/>
               </a:rPr>
-              <a:t>ter</a:t>
+              <a:t>er</a:t>
             </a:r>
             <a:endParaRPr lang="en-US" sz="1400" dirty="0"/>
           </a:p>
@@ -10556,7 +10892,7 @@
       </p:sp>
       <p:sp>
         <p:nvSpPr>
-          <p:cNvPr id="33" name="Shape 31"/>
+          <p:cNvPr id="36" name="Shape 34"/>
           <p:cNvSpPr/>
           <p:nvPr/>
         </p:nvSpPr>
@@ -10583,7 +10919,7 @@
       </p:sp>
       <p:sp>
         <p:nvSpPr>
-          <p:cNvPr id="34" name="Text 32"/>
+          <p:cNvPr id="37" name="Text 35"/>
           <p:cNvSpPr/>
           <p:nvPr/>
         </p:nvSpPr>
@@ -10622,7 +10958,7 @@
       </p:sp>
       <p:sp>
         <p:nvSpPr>
-          <p:cNvPr id="35" name="Shape 33"/>
+          <p:cNvPr id="38" name="Shape 36"/>
           <p:cNvSpPr/>
           <p:nvPr/>
         </p:nvSpPr>
@@ -10649,7 +10985,7 @@
       </p:sp>
       <p:sp>
         <p:nvSpPr>
-          <p:cNvPr id="36" name="Shape 34"/>
+          <p:cNvPr id="39" name="Shape 37"/>
           <p:cNvSpPr/>
           <p:nvPr/>
         </p:nvSpPr>
@@ -10676,7 +11012,7 @@
       </p:sp>
       <p:sp>
         <p:nvSpPr>
-          <p:cNvPr id="37" name="Text 35"/>
+          <p:cNvPr id="40" name="Text 38"/>
           <p:cNvSpPr/>
           <p:nvPr/>
         </p:nvSpPr>
@@ -10715,7 +11051,7 @@
       </p:sp>
       <p:sp>
         <p:nvSpPr>
-          <p:cNvPr id="38" name="Shape 36"/>
+          <p:cNvPr id="41" name="Shape 39"/>
           <p:cNvSpPr/>
           <p:nvPr/>
         </p:nvSpPr>
@@ -10742,7 +11078,7 @@
       </p:sp>
       <p:sp>
         <p:nvSpPr>
-          <p:cNvPr id="39" name="Text 37"/>
+          <p:cNvPr id="42" name="Text 40"/>
           <p:cNvSpPr/>
           <p:nvPr/>
         </p:nvSpPr>
@@ -10781,7 +11117,7 @@
       </p:sp>
       <p:sp>
         <p:nvSpPr>
-          <p:cNvPr id="40" name="Shape 38"/>
+          <p:cNvPr id="43" name="Shape 41"/>
           <p:cNvSpPr/>
           <p:nvPr/>
         </p:nvSpPr>
@@ -10808,7 +11144,7 @@
       </p:sp>
       <p:sp>
         <p:nvSpPr>
-          <p:cNvPr id="41" name="Text 39"/>
+          <p:cNvPr id="44" name="Text 42"/>
           <p:cNvSpPr/>
           <p:nvPr/>
         </p:nvSpPr>
@@ -10847,7 +11183,7 @@
       </p:sp>
       <p:sp>
         <p:nvSpPr>
-          <p:cNvPr id="42" name="Shape 40"/>
+          <p:cNvPr id="45" name="Shape 43"/>
           <p:cNvSpPr/>
           <p:nvPr/>
         </p:nvSpPr>
@@ -10874,7 +11210,7 @@
       </p:sp>
       <p:sp>
         <p:nvSpPr>
-          <p:cNvPr id="43" name="Text 41"/>
+          <p:cNvPr id="46" name="Text 44"/>
           <p:cNvSpPr/>
           <p:nvPr/>
         </p:nvSpPr>
@@ -10913,7 +11249,7 @@
       </p:sp>
       <p:sp>
         <p:nvSpPr>
-          <p:cNvPr id="44" name="Shape 42"/>
+          <p:cNvPr id="47" name="Shape 45"/>
           <p:cNvSpPr/>
           <p:nvPr/>
         </p:nvSpPr>
@@ -10940,7 +11276,7 @@
       </p:sp>
       <p:sp>
         <p:nvSpPr>
-          <p:cNvPr id="45" name="Text 43"/>
+          <p:cNvPr id="48" name="Text 46"/>
           <p:cNvSpPr/>
           <p:nvPr/>
         </p:nvSpPr>
@@ -10979,7 +11315,7 @@
       </p:sp>
       <p:sp>
         <p:nvSpPr>
-          <p:cNvPr id="46" name="Shape 44"/>
+          <p:cNvPr id="49" name="Shape 47"/>
           <p:cNvSpPr/>
           <p:nvPr/>
         </p:nvSpPr>
@@ -11006,7 +11342,7 @@
       </p:sp>
       <p:sp>
         <p:nvSpPr>
-          <p:cNvPr id="47" name="Text 45"/>
+          <p:cNvPr id="50" name="Text 48"/>
           <p:cNvSpPr/>
           <p:nvPr/>
         </p:nvSpPr>
@@ -11468,7 +11804,7 @@
                 <a:ea typeface="Trebuchet MS" pitchFamily="34" charset="-122"/>
                 <a:cs typeface="Trebuchet MS" pitchFamily="34" charset="-120"/>
               </a:rPr>
-              <a:t>misreported</a:t>
+              <a:t>unreported</a:t>
             </a:r>
             <a:endParaRPr lang="en-US" sz="2800" dirty="0"/>
           </a:p>
@@ -12295,7 +12631,7 @@
                 <a:ea typeface="Trebuchet MS" pitchFamily="34" charset="-122"/>
                 <a:cs typeface="Trebuchet MS" pitchFamily="34" charset="-120"/>
               </a:rPr>
-              <a:t>misreported</a:t>
+              <a:t>unreported</a:t>
             </a:r>
             <a:endParaRPr lang="en-US" sz="2800" dirty="0"/>
           </a:p>
@@ -12375,8 +12711,8 @@
         </p:nvSpPr>
         <p:spPr>
           <a:xfrm>
-            <a:off x="2221992" y="2258568"/>
-            <a:ext cx="1828800" cy="292608"/>
+            <a:off x="1989734" y="2258568"/>
+            <a:ext cx="1581912" cy="292608"/>
           </a:xfrm>
           <a:prstGeom prst="rect">
             <a:avLst>
@@ -12409,8 +12745,8 @@
         </p:nvSpPr>
         <p:spPr>
           <a:xfrm>
-            <a:off x="2221992" y="2258568"/>
-            <a:ext cx="1828800" cy="292608"/>
+            <a:off x="1989734" y="2258568"/>
+            <a:ext cx="1581912" cy="292608"/>
           </a:xfrm>
           <a:prstGeom prst="rect">
             <a:avLst/>
@@ -12434,7 +12770,7 @@
                 <a:ea typeface="Trebuchet MS" pitchFamily="34" charset="-122"/>
                 <a:cs typeface="Trebuchet MS" pitchFamily="34" charset="-120"/>
               </a:rPr>
-              <a:t>mis</a:t>
+              <a:t>un</a:t>
             </a:r>
             <a:endParaRPr lang="en-US" sz="1300" dirty="0"/>
           </a:p>
@@ -12448,8 +12784,8 @@
         </p:nvSpPr>
         <p:spPr>
           <a:xfrm>
-            <a:off x="2221992" y="2569464"/>
-            <a:ext cx="1828800" cy="201168"/>
+            <a:off x="1989734" y="2569464"/>
+            <a:ext cx="1581912" cy="201168"/>
           </a:xfrm>
           <a:prstGeom prst="rect">
             <a:avLst/>
@@ -12473,7 +12809,7 @@
                 <a:ea typeface="Calibri" pitchFamily="34" charset="-122"/>
                 <a:cs typeface="Calibri" pitchFamily="34" charset="-120"/>
               </a:rPr>
-              <a:t>wrongly, badly</a:t>
+              <a:t>not</a:t>
             </a:r>
             <a:endParaRPr lang="en-US" sz="850" dirty="0"/>
           </a:p>
@@ -12487,8 +12823,8 @@
         </p:nvSpPr>
         <p:spPr>
           <a:xfrm>
-            <a:off x="4370832" y="2258568"/>
-            <a:ext cx="1828800" cy="292608"/>
+            <a:off x="3659429" y="2258568"/>
+            <a:ext cx="1581912" cy="292608"/>
           </a:xfrm>
           <a:prstGeom prst="rect">
             <a:avLst>
@@ -12496,11 +12832,11 @@
             </a:avLst>
           </a:prstGeom>
           <a:solidFill>
-            <a:srgbClr val="CCFBF1"/>
+            <a:srgbClr val="DDD6FE"/>
           </a:solidFill>
           <a:ln w="19050">
             <a:solidFill>
-              <a:srgbClr val="0D9488"/>
+              <a:srgbClr val="7C3AED"/>
             </a:solidFill>
             <a:prstDash val="solid"/>
           </a:ln>
@@ -12521,8 +12857,8 @@
         </p:nvSpPr>
         <p:spPr>
           <a:xfrm>
-            <a:off x="4370832" y="2258568"/>
-            <a:ext cx="1828800" cy="292608"/>
+            <a:off x="3659429" y="2258568"/>
+            <a:ext cx="1581912" cy="292608"/>
           </a:xfrm>
           <a:prstGeom prst="rect">
             <a:avLst/>
@@ -12540,13 +12876,13 @@
             <a:r>
               <a:rPr lang="en-US" sz="1300" b="1" dirty="0">
                 <a:solidFill>
-                  <a:srgbClr val="0F766E"/>
+                  <a:srgbClr val="4C1D95"/>
                 </a:solidFill>
                 <a:latin typeface="Trebuchet MS" pitchFamily="34" charset="0"/>
                 <a:ea typeface="Trebuchet MS" pitchFamily="34" charset="-122"/>
                 <a:cs typeface="Trebuchet MS" pitchFamily="34" charset="-120"/>
               </a:rPr>
-              <a:t>report</a:t>
+              <a:t>re</a:t>
             </a:r>
             <a:endParaRPr lang="en-US" sz="1300" dirty="0"/>
           </a:p>
@@ -12560,8 +12896,8 @@
         </p:nvSpPr>
         <p:spPr>
           <a:xfrm>
-            <a:off x="4370832" y="2569464"/>
-            <a:ext cx="1828800" cy="201168"/>
+            <a:off x="3659429" y="2569464"/>
+            <a:ext cx="1581912" cy="201168"/>
           </a:xfrm>
           <a:prstGeom prst="rect">
             <a:avLst/>
@@ -12585,7 +12921,7 @@
                 <a:ea typeface="Calibri" pitchFamily="34" charset="-122"/>
                 <a:cs typeface="Calibri" pitchFamily="34" charset="-120"/>
               </a:rPr>
-              <a:t>to carry back, to tell</a:t>
+              <a:t>again, back</a:t>
             </a:r>
             <a:endParaRPr lang="en-US" sz="850" dirty="0"/>
           </a:p>
@@ -12599,8 +12935,8 @@
         </p:nvSpPr>
         <p:spPr>
           <a:xfrm>
-            <a:off x="6519672" y="2258568"/>
-            <a:ext cx="1828800" cy="292608"/>
+            <a:off x="5329123" y="2258568"/>
+            <a:ext cx="1581912" cy="292608"/>
           </a:xfrm>
           <a:prstGeom prst="rect">
             <a:avLst>
@@ -12633,8 +12969,8 @@
         </p:nvSpPr>
         <p:spPr>
           <a:xfrm>
-            <a:off x="6519672" y="2258568"/>
-            <a:ext cx="1828800" cy="292608"/>
+            <a:off x="5329123" y="2258568"/>
+            <a:ext cx="1581912" cy="292608"/>
           </a:xfrm>
           <a:prstGeom prst="rect">
             <a:avLst/>
@@ -12658,7 +12994,7 @@
                 <a:ea typeface="Trebuchet MS" pitchFamily="34" charset="-122"/>
                 <a:cs typeface="Trebuchet MS" pitchFamily="34" charset="-120"/>
               </a:rPr>
-              <a:t>ed</a:t>
+              <a:t>port</a:t>
             </a:r>
             <a:endParaRPr lang="en-US" sz="1300" dirty="0"/>
           </a:p>
@@ -12672,8 +13008,8 @@
         </p:nvSpPr>
         <p:spPr>
           <a:xfrm>
-            <a:off x="6519672" y="2569464"/>
-            <a:ext cx="1828800" cy="201168"/>
+            <a:off x="5329123" y="2569464"/>
+            <a:ext cx="1581912" cy="201168"/>
           </a:xfrm>
           <a:prstGeom prst="rect">
             <a:avLst/>
@@ -12697,7 +13033,7 @@
                 <a:ea typeface="Calibri" pitchFamily="34" charset="-122"/>
                 <a:cs typeface="Calibri" pitchFamily="34" charset="-120"/>
               </a:rPr>
-              <a:t>happened in the past</a:t>
+              <a:t>carry, bring</a:t>
             </a:r>
             <a:endParaRPr lang="en-US" sz="850" dirty="0"/>
           </a:p>
@@ -12706,6 +13042,118 @@
       <p:sp>
         <p:nvSpPr>
           <p:cNvPr id="25" name="Shape 23"/>
+          <p:cNvSpPr/>
+          <p:nvPr/>
+        </p:nvSpPr>
+        <p:spPr>
+          <a:xfrm>
+            <a:off x="6998818" y="2258568"/>
+            <a:ext cx="1581912" cy="292608"/>
+          </a:xfrm>
+          <a:prstGeom prst="rect">
+            <a:avLst>
+              <a:gd name="adj" fmla="val 25000"/>
+            </a:avLst>
+          </a:prstGeom>
+          <a:solidFill>
+            <a:srgbClr val="FCE7F3"/>
+          </a:solidFill>
+          <a:ln w="19050">
+            <a:solidFill>
+              <a:srgbClr val="DB2777"/>
+            </a:solidFill>
+            <a:prstDash val="solid"/>
+          </a:ln>
+          <a:effectLst>
+            <a:outerShdw sx="100000" sy="100000" kx="0" ky="0" algn="bl" rotWithShape="0" blurRad="101600" dist="38100" dir="8100000">
+              <a:srgbClr val="000000">
+                <a:alpha val="12000"/>
+              </a:srgbClr>
+            </a:outerShdw>
+          </a:effectLst>
+        </p:spPr>
+      </p:sp>
+      <p:sp>
+        <p:nvSpPr>
+          <p:cNvPr id="26" name="Text 24"/>
+          <p:cNvSpPr/>
+          <p:nvPr/>
+        </p:nvSpPr>
+        <p:spPr>
+          <a:xfrm>
+            <a:off x="6998818" y="2258568"/>
+            <a:ext cx="1581912" cy="292608"/>
+          </a:xfrm>
+          <a:prstGeom prst="rect">
+            <a:avLst/>
+          </a:prstGeom>
+          <a:noFill/>
+          <a:ln/>
+        </p:spPr>
+        <p:txBody>
+          <a:bodyPr wrap="square" lIns="0" tIns="0" rIns="0" bIns="0" rtlCol="0" anchor="ctr"/>
+          <a:lstStyle/>
+          <a:p>
+            <a:pPr algn="ctr" indent="0" marL="0">
+              <a:buNone/>
+            </a:pPr>
+            <a:r>
+              <a:rPr lang="en-US" sz="1300" b="1" dirty="0">
+                <a:solidFill>
+                  <a:srgbClr val="9D174D"/>
+                </a:solidFill>
+                <a:latin typeface="Trebuchet MS" pitchFamily="34" charset="0"/>
+                <a:ea typeface="Trebuchet MS" pitchFamily="34" charset="-122"/>
+                <a:cs typeface="Trebuchet MS" pitchFamily="34" charset="-120"/>
+              </a:rPr>
+              <a:t>ed</a:t>
+            </a:r>
+            <a:endParaRPr lang="en-US" sz="1300" dirty="0"/>
+          </a:p>
+        </p:txBody>
+      </p:sp>
+      <p:sp>
+        <p:nvSpPr>
+          <p:cNvPr id="27" name="Text 25"/>
+          <p:cNvSpPr/>
+          <p:nvPr/>
+        </p:nvSpPr>
+        <p:spPr>
+          <a:xfrm>
+            <a:off x="6998818" y="2569464"/>
+            <a:ext cx="1581912" cy="201168"/>
+          </a:xfrm>
+          <a:prstGeom prst="rect">
+            <a:avLst/>
+          </a:prstGeom>
+          <a:noFill/>
+          <a:ln/>
+        </p:spPr>
+        <p:txBody>
+          <a:bodyPr wrap="square" lIns="0" tIns="0" rIns="0" bIns="0" rtlCol="0" anchor="t"/>
+          <a:lstStyle/>
+          <a:p>
+            <a:pPr algn="ctr" indent="0" marL="0">
+              <a:buNone/>
+            </a:pPr>
+            <a:r>
+              <a:rPr lang="en-US" sz="850" dirty="0">
+                <a:solidFill>
+                  <a:srgbClr val="475569"/>
+                </a:solidFill>
+                <a:latin typeface="Calibri" pitchFamily="34" charset="0"/>
+                <a:ea typeface="Calibri" pitchFamily="34" charset="-122"/>
+                <a:cs typeface="Calibri" pitchFamily="34" charset="-120"/>
+              </a:rPr>
+              <a:t>in the past</a:t>
+            </a:r>
+            <a:endParaRPr lang="en-US" sz="850" dirty="0"/>
+          </a:p>
+        </p:txBody>
+      </p:sp>
+      <p:sp>
+        <p:nvSpPr>
+          <p:cNvPr id="28" name="Shape 26"/>
           <p:cNvSpPr/>
           <p:nvPr/>
         </p:nvSpPr>
@@ -12732,7 +13180,7 @@
       </p:sp>
       <p:sp>
         <p:nvSpPr>
-          <p:cNvPr id="26" name="Text 24"/>
+          <p:cNvPr id="29" name="Text 27"/>
           <p:cNvSpPr/>
           <p:nvPr/>
         </p:nvSpPr>
@@ -12771,7 +13219,7 @@
       </p:sp>
       <p:sp>
         <p:nvSpPr>
-          <p:cNvPr id="27" name="Shape 25"/>
+          <p:cNvPr id="30" name="Shape 28"/>
           <p:cNvSpPr/>
           <p:nvPr/>
         </p:nvSpPr>
@@ -12798,7 +13246,7 @@
       </p:sp>
       <p:sp>
         <p:nvSpPr>
-          <p:cNvPr id="28" name="Text 26"/>
+          <p:cNvPr id="31" name="Text 29"/>
           <p:cNvSpPr/>
           <p:nvPr/>
         </p:nvSpPr>
@@ -12837,7 +13285,7 @@
       </p:sp>
       <p:sp>
         <p:nvSpPr>
-          <p:cNvPr id="29" name="Shape 27"/>
+          <p:cNvPr id="32" name="Shape 30"/>
           <p:cNvSpPr/>
           <p:nvPr/>
         </p:nvSpPr>
@@ -12864,7 +13312,7 @@
       </p:sp>
       <p:sp>
         <p:nvSpPr>
-          <p:cNvPr id="30" name="Text 28"/>
+          <p:cNvPr id="33" name="Text 31"/>
           <p:cNvSpPr/>
           <p:nvPr/>
         </p:nvSpPr>
@@ -12903,7 +13351,7 @@
       </p:sp>
       <p:sp>
         <p:nvSpPr>
-          <p:cNvPr id="31" name="Shape 29"/>
+          <p:cNvPr id="34" name="Shape 32"/>
           <p:cNvSpPr/>
           <p:nvPr/>
         </p:nvSpPr>
@@ -12930,7 +13378,7 @@
       </p:sp>
       <p:sp>
         <p:nvSpPr>
-          <p:cNvPr id="32" name="Text 30"/>
+          <p:cNvPr id="35" name="Text 33"/>
           <p:cNvSpPr/>
           <p:nvPr/>
         </p:nvSpPr>
@@ -13392,7 +13840,7 @@
                 <a:ea typeface="Trebuchet MS" pitchFamily="34" charset="-122"/>
                 <a:cs typeface="Trebuchet MS" pitchFamily="34" charset="-120"/>
               </a:rPr>
-              <a:t>misreported</a:t>
+              <a:t>unreported</a:t>
             </a:r>
             <a:endParaRPr lang="en-US" sz="2800" dirty="0"/>
           </a:p>
@@ -13472,8 +13920,8 @@
         </p:nvSpPr>
         <p:spPr>
           <a:xfrm>
-            <a:off x="2221992" y="2258568"/>
-            <a:ext cx="1828800" cy="292608"/>
+            <a:off x="1989734" y="2258568"/>
+            <a:ext cx="1581912" cy="292608"/>
           </a:xfrm>
           <a:prstGeom prst="rect">
             <a:avLst>
@@ -13506,8 +13954,8 @@
         </p:nvSpPr>
         <p:spPr>
           <a:xfrm>
-            <a:off x="2221992" y="2258568"/>
-            <a:ext cx="1828800" cy="292608"/>
+            <a:off x="1989734" y="2258568"/>
+            <a:ext cx="1581912" cy="292608"/>
           </a:xfrm>
           <a:prstGeom prst="rect">
             <a:avLst/>
@@ -13531,7 +13979,7 @@
                 <a:ea typeface="Trebuchet MS" pitchFamily="34" charset="-122"/>
                 <a:cs typeface="Trebuchet MS" pitchFamily="34" charset="-120"/>
               </a:rPr>
-              <a:t>mis</a:t>
+              <a:t>un</a:t>
             </a:r>
             <a:endParaRPr lang="en-US" sz="1300" dirty="0"/>
           </a:p>
@@ -13545,8 +13993,8 @@
         </p:nvSpPr>
         <p:spPr>
           <a:xfrm>
-            <a:off x="2221992" y="2569464"/>
-            <a:ext cx="1828800" cy="201168"/>
+            <a:off x="1989734" y="2569464"/>
+            <a:ext cx="1581912" cy="201168"/>
           </a:xfrm>
           <a:prstGeom prst="rect">
             <a:avLst/>
@@ -13570,7 +14018,7 @@
                 <a:ea typeface="Calibri" pitchFamily="34" charset="-122"/>
                 <a:cs typeface="Calibri" pitchFamily="34" charset="-120"/>
               </a:rPr>
-              <a:t>wrongly, badly</a:t>
+              <a:t>not</a:t>
             </a:r>
             <a:endParaRPr lang="en-US" sz="850" dirty="0"/>
           </a:p>
@@ -13584,8 +14032,8 @@
         </p:nvSpPr>
         <p:spPr>
           <a:xfrm>
-            <a:off x="4370832" y="2258568"/>
-            <a:ext cx="1828800" cy="292608"/>
+            <a:off x="3659429" y="2258568"/>
+            <a:ext cx="1581912" cy="292608"/>
           </a:xfrm>
           <a:prstGeom prst="rect">
             <a:avLst>
@@ -13593,11 +14041,11 @@
             </a:avLst>
           </a:prstGeom>
           <a:solidFill>
-            <a:srgbClr val="CCFBF1"/>
+            <a:srgbClr val="DDD6FE"/>
           </a:solidFill>
           <a:ln w="19050">
             <a:solidFill>
-              <a:srgbClr val="0D9488"/>
+              <a:srgbClr val="7C3AED"/>
             </a:solidFill>
             <a:prstDash val="solid"/>
           </a:ln>
@@ -13618,8 +14066,8 @@
         </p:nvSpPr>
         <p:spPr>
           <a:xfrm>
-            <a:off x="4370832" y="2258568"/>
-            <a:ext cx="1828800" cy="292608"/>
+            <a:off x="3659429" y="2258568"/>
+            <a:ext cx="1581912" cy="292608"/>
           </a:xfrm>
           <a:prstGeom prst="rect">
             <a:avLst/>
@@ -13637,13 +14085,13 @@
             <a:r>
               <a:rPr lang="en-US" sz="1300" b="1" dirty="0">
                 <a:solidFill>
-                  <a:srgbClr val="0F766E"/>
+                  <a:srgbClr val="4C1D95"/>
                 </a:solidFill>
                 <a:latin typeface="Trebuchet MS" pitchFamily="34" charset="0"/>
                 <a:ea typeface="Trebuchet MS" pitchFamily="34" charset="-122"/>
                 <a:cs typeface="Trebuchet MS" pitchFamily="34" charset="-120"/>
               </a:rPr>
-              <a:t>report</a:t>
+              <a:t>re</a:t>
             </a:r>
             <a:endParaRPr lang="en-US" sz="1300" dirty="0"/>
           </a:p>
@@ -13657,8 +14105,8 @@
         </p:nvSpPr>
         <p:spPr>
           <a:xfrm>
-            <a:off x="4370832" y="2569464"/>
-            <a:ext cx="1828800" cy="201168"/>
+            <a:off x="3659429" y="2569464"/>
+            <a:ext cx="1581912" cy="201168"/>
           </a:xfrm>
           <a:prstGeom prst="rect">
             <a:avLst/>
@@ -13682,7 +14130,7 @@
                 <a:ea typeface="Calibri" pitchFamily="34" charset="-122"/>
                 <a:cs typeface="Calibri" pitchFamily="34" charset="-120"/>
               </a:rPr>
-              <a:t>to carry back, to tell</a:t>
+              <a:t>again, back</a:t>
             </a:r>
             <a:endParaRPr lang="en-US" sz="850" dirty="0"/>
           </a:p>
@@ -13696,8 +14144,8 @@
         </p:nvSpPr>
         <p:spPr>
           <a:xfrm>
-            <a:off x="6519672" y="2258568"/>
-            <a:ext cx="1828800" cy="292608"/>
+            <a:off x="5329123" y="2258568"/>
+            <a:ext cx="1581912" cy="292608"/>
           </a:xfrm>
           <a:prstGeom prst="rect">
             <a:avLst>
@@ -13730,8 +14178,8 @@
         </p:nvSpPr>
         <p:spPr>
           <a:xfrm>
-            <a:off x="6519672" y="2258568"/>
-            <a:ext cx="1828800" cy="292608"/>
+            <a:off x="5329123" y="2258568"/>
+            <a:ext cx="1581912" cy="292608"/>
           </a:xfrm>
           <a:prstGeom prst="rect">
             <a:avLst/>
@@ -13755,7 +14203,7 @@
                 <a:ea typeface="Trebuchet MS" pitchFamily="34" charset="-122"/>
                 <a:cs typeface="Trebuchet MS" pitchFamily="34" charset="-120"/>
               </a:rPr>
-              <a:t>ed</a:t>
+              <a:t>port</a:t>
             </a:r>
             <a:endParaRPr lang="en-US" sz="1300" dirty="0"/>
           </a:p>
@@ -13769,8 +14217,8 @@
         </p:nvSpPr>
         <p:spPr>
           <a:xfrm>
-            <a:off x="6519672" y="2569464"/>
-            <a:ext cx="1828800" cy="201168"/>
+            <a:off x="5329123" y="2569464"/>
+            <a:ext cx="1581912" cy="201168"/>
           </a:xfrm>
           <a:prstGeom prst="rect">
             <a:avLst/>
@@ -13794,7 +14242,7 @@
                 <a:ea typeface="Calibri" pitchFamily="34" charset="-122"/>
                 <a:cs typeface="Calibri" pitchFamily="34" charset="-120"/>
               </a:rPr>
-              <a:t>happened in the past</a:t>
+              <a:t>carry, bring</a:t>
             </a:r>
             <a:endParaRPr lang="en-US" sz="850" dirty="0"/>
           </a:p>
@@ -13803,6 +14251,118 @@
       <p:sp>
         <p:nvSpPr>
           <p:cNvPr id="25" name="Shape 23"/>
+          <p:cNvSpPr/>
+          <p:nvPr/>
+        </p:nvSpPr>
+        <p:spPr>
+          <a:xfrm>
+            <a:off x="6998818" y="2258568"/>
+            <a:ext cx="1581912" cy="292608"/>
+          </a:xfrm>
+          <a:prstGeom prst="rect">
+            <a:avLst>
+              <a:gd name="adj" fmla="val 25000"/>
+            </a:avLst>
+          </a:prstGeom>
+          <a:solidFill>
+            <a:srgbClr val="FCE7F3"/>
+          </a:solidFill>
+          <a:ln w="19050">
+            <a:solidFill>
+              <a:srgbClr val="DB2777"/>
+            </a:solidFill>
+            <a:prstDash val="solid"/>
+          </a:ln>
+          <a:effectLst>
+            <a:outerShdw sx="100000" sy="100000" kx="0" ky="0" algn="bl" rotWithShape="0" blurRad="101600" dist="38100" dir="8100000">
+              <a:srgbClr val="000000">
+                <a:alpha val="12000"/>
+              </a:srgbClr>
+            </a:outerShdw>
+          </a:effectLst>
+        </p:spPr>
+      </p:sp>
+      <p:sp>
+        <p:nvSpPr>
+          <p:cNvPr id="26" name="Text 24"/>
+          <p:cNvSpPr/>
+          <p:nvPr/>
+        </p:nvSpPr>
+        <p:spPr>
+          <a:xfrm>
+            <a:off x="6998818" y="2258568"/>
+            <a:ext cx="1581912" cy="292608"/>
+          </a:xfrm>
+          <a:prstGeom prst="rect">
+            <a:avLst/>
+          </a:prstGeom>
+          <a:noFill/>
+          <a:ln/>
+        </p:spPr>
+        <p:txBody>
+          <a:bodyPr wrap="square" lIns="0" tIns="0" rIns="0" bIns="0" rtlCol="0" anchor="ctr"/>
+          <a:lstStyle/>
+          <a:p>
+            <a:pPr algn="ctr" indent="0" marL="0">
+              <a:buNone/>
+            </a:pPr>
+            <a:r>
+              <a:rPr lang="en-US" sz="1300" b="1" dirty="0">
+                <a:solidFill>
+                  <a:srgbClr val="9D174D"/>
+                </a:solidFill>
+                <a:latin typeface="Trebuchet MS" pitchFamily="34" charset="0"/>
+                <a:ea typeface="Trebuchet MS" pitchFamily="34" charset="-122"/>
+                <a:cs typeface="Trebuchet MS" pitchFamily="34" charset="-120"/>
+              </a:rPr>
+              <a:t>ed</a:t>
+            </a:r>
+            <a:endParaRPr lang="en-US" sz="1300" dirty="0"/>
+          </a:p>
+        </p:txBody>
+      </p:sp>
+      <p:sp>
+        <p:nvSpPr>
+          <p:cNvPr id="27" name="Text 25"/>
+          <p:cNvSpPr/>
+          <p:nvPr/>
+        </p:nvSpPr>
+        <p:spPr>
+          <a:xfrm>
+            <a:off x="6998818" y="2569464"/>
+            <a:ext cx="1581912" cy="201168"/>
+          </a:xfrm>
+          <a:prstGeom prst="rect">
+            <a:avLst/>
+          </a:prstGeom>
+          <a:noFill/>
+          <a:ln/>
+        </p:spPr>
+        <p:txBody>
+          <a:bodyPr wrap="square" lIns="0" tIns="0" rIns="0" bIns="0" rtlCol="0" anchor="t"/>
+          <a:lstStyle/>
+          <a:p>
+            <a:pPr algn="ctr" indent="0" marL="0">
+              <a:buNone/>
+            </a:pPr>
+            <a:r>
+              <a:rPr lang="en-US" sz="850" dirty="0">
+                <a:solidFill>
+                  <a:srgbClr val="475569"/>
+                </a:solidFill>
+                <a:latin typeface="Calibri" pitchFamily="34" charset="0"/>
+                <a:ea typeface="Calibri" pitchFamily="34" charset="-122"/>
+                <a:cs typeface="Calibri" pitchFamily="34" charset="-120"/>
+              </a:rPr>
+              <a:t>in the past</a:t>
+            </a:r>
+            <a:endParaRPr lang="en-US" sz="850" dirty="0"/>
+          </a:p>
+        </p:txBody>
+      </p:sp>
+      <p:sp>
+        <p:nvSpPr>
+          <p:cNvPr id="28" name="Shape 26"/>
           <p:cNvSpPr/>
           <p:nvPr/>
         </p:nvSpPr>
@@ -13829,7 +14389,7 @@
       </p:sp>
       <p:sp>
         <p:nvSpPr>
-          <p:cNvPr id="26" name="Text 24"/>
+          <p:cNvPr id="29" name="Text 27"/>
           <p:cNvSpPr/>
           <p:nvPr/>
         </p:nvSpPr>
@@ -13868,7 +14428,7 @@
       </p:sp>
       <p:sp>
         <p:nvSpPr>
-          <p:cNvPr id="27" name="Shape 25"/>
+          <p:cNvPr id="30" name="Shape 28"/>
           <p:cNvSpPr/>
           <p:nvPr/>
         </p:nvSpPr>
@@ -13895,7 +14455,7 @@
       </p:sp>
       <p:sp>
         <p:nvSpPr>
-          <p:cNvPr id="28" name="Shape 26"/>
+          <p:cNvPr id="31" name="Shape 29"/>
           <p:cNvSpPr/>
           <p:nvPr/>
         </p:nvSpPr>
@@ -13922,7 +14482,7 @@
       </p:sp>
       <p:sp>
         <p:nvSpPr>
-          <p:cNvPr id="29" name="Text 27"/>
+          <p:cNvPr id="32" name="Text 30"/>
           <p:cNvSpPr/>
           <p:nvPr/>
         </p:nvSpPr>
@@ -13953,7 +14513,7 @@
                 <a:ea typeface="Trebuchet MS" pitchFamily="34" charset="-122"/>
                 <a:cs typeface="Trebuchet MS" pitchFamily="34" charset="-120"/>
               </a:rPr>
-              <a:t>mis</a:t>
+              <a:t>un</a:t>
             </a:r>
             <a:endParaRPr lang="en-US" sz="1400" dirty="0"/>
           </a:p>
@@ -13961,7 +14521,7 @@
       </p:sp>
       <p:sp>
         <p:nvSpPr>
-          <p:cNvPr id="30" name="Text 28"/>
+          <p:cNvPr id="33" name="Text 31"/>
           <p:cNvSpPr/>
           <p:nvPr/>
         </p:nvSpPr>
@@ -14000,7 +14560,7 @@
       </p:sp>
       <p:sp>
         <p:nvSpPr>
-          <p:cNvPr id="31" name="Shape 29"/>
+          <p:cNvPr id="34" name="Shape 32"/>
           <p:cNvSpPr/>
           <p:nvPr/>
         </p:nvSpPr>
@@ -14027,7 +14587,7 @@
       </p:sp>
       <p:sp>
         <p:nvSpPr>
-          <p:cNvPr id="32" name="Text 30"/>
+          <p:cNvPr id="35" name="Text 33"/>
           <p:cNvSpPr/>
           <p:nvPr/>
         </p:nvSpPr>
@@ -14066,7 +14626,7 @@
       </p:sp>
       <p:sp>
         <p:nvSpPr>
-          <p:cNvPr id="33" name="Text 31"/>
+          <p:cNvPr id="36" name="Text 34"/>
           <p:cNvSpPr/>
           <p:nvPr/>
         </p:nvSpPr>
@@ -14105,7 +14665,7 @@
       </p:sp>
       <p:sp>
         <p:nvSpPr>
-          <p:cNvPr id="34" name="Shape 32"/>
+          <p:cNvPr id="37" name="Shape 35"/>
           <p:cNvSpPr/>
           <p:nvPr/>
         </p:nvSpPr>
@@ -14132,7 +14692,7 @@
       </p:sp>
       <p:sp>
         <p:nvSpPr>
-          <p:cNvPr id="35" name="Text 33"/>
+          <p:cNvPr id="38" name="Text 36"/>
           <p:cNvSpPr/>
           <p:nvPr/>
         </p:nvSpPr>
@@ -14163,7 +14723,7 @@
                 <a:ea typeface="Trebuchet MS" pitchFamily="34" charset="-122"/>
                 <a:cs typeface="Trebuchet MS" pitchFamily="34" charset="-120"/>
               </a:rPr>
-              <a:t>por</a:t>
+              <a:t>port</a:t>
             </a:r>
             <a:endParaRPr lang="en-US" sz="1400" dirty="0"/>
           </a:p>
@@ -14171,7 +14731,7 @@
       </p:sp>
       <p:sp>
         <p:nvSpPr>
-          <p:cNvPr id="36" name="Text 34"/>
+          <p:cNvPr id="39" name="Text 37"/>
           <p:cNvSpPr/>
           <p:nvPr/>
         </p:nvSpPr>
@@ -14210,7 +14770,7 @@
       </p:sp>
       <p:sp>
         <p:nvSpPr>
-          <p:cNvPr id="37" name="Shape 35"/>
+          <p:cNvPr id="40" name="Shape 38"/>
           <p:cNvSpPr/>
           <p:nvPr/>
         </p:nvSpPr>
@@ -14237,7 +14797,7 @@
       </p:sp>
       <p:sp>
         <p:nvSpPr>
-          <p:cNvPr id="38" name="Text 36"/>
+          <p:cNvPr id="41" name="Text 39"/>
           <p:cNvSpPr/>
           <p:nvPr/>
         </p:nvSpPr>
@@ -14268,7 +14828,7 @@
                 <a:ea typeface="Trebuchet MS" pitchFamily="34" charset="-122"/>
                 <a:cs typeface="Trebuchet MS" pitchFamily="34" charset="-120"/>
               </a:rPr>
-              <a:t>ted</a:t>
+              <a:t>ed</a:t>
             </a:r>
             <a:endParaRPr lang="en-US" sz="1400" dirty="0"/>
           </a:p>
@@ -14276,7 +14836,7 @@
       </p:sp>
       <p:sp>
         <p:nvSpPr>
-          <p:cNvPr id="39" name="Shape 37"/>
+          <p:cNvPr id="42" name="Shape 40"/>
           <p:cNvSpPr/>
           <p:nvPr/>
         </p:nvSpPr>
@@ -14303,7 +14863,7 @@
       </p:sp>
       <p:sp>
         <p:nvSpPr>
-          <p:cNvPr id="40" name="Text 38"/>
+          <p:cNvPr id="43" name="Text 41"/>
           <p:cNvSpPr/>
           <p:nvPr/>
         </p:nvSpPr>
@@ -14342,7 +14902,7 @@
       </p:sp>
       <p:sp>
         <p:nvSpPr>
-          <p:cNvPr id="41" name="Shape 39"/>
+          <p:cNvPr id="44" name="Shape 42"/>
           <p:cNvSpPr/>
           <p:nvPr/>
         </p:nvSpPr>
@@ -14369,7 +14929,7 @@
       </p:sp>
       <p:sp>
         <p:nvSpPr>
-          <p:cNvPr id="42" name="Text 40"/>
+          <p:cNvPr id="45" name="Text 43"/>
           <p:cNvSpPr/>
           <p:nvPr/>
         </p:nvSpPr>
@@ -15096,7 +15656,7 @@
                 <a:ea typeface="Trebuchet MS" pitchFamily="34" charset="-122"/>
                 <a:cs typeface="Trebuchet MS" pitchFamily="34" charset="-120"/>
               </a:rPr>
-              <a:t>misreported</a:t>
+              <a:t>unreported</a:t>
             </a:r>
             <a:endParaRPr lang="en-US" sz="2800" dirty="0"/>
           </a:p>
@@ -15176,8 +15736,8 @@
         </p:nvSpPr>
         <p:spPr>
           <a:xfrm>
-            <a:off x="2221992" y="2258568"/>
-            <a:ext cx="1828800" cy="292608"/>
+            <a:off x="1989734" y="2258568"/>
+            <a:ext cx="1581912" cy="292608"/>
           </a:xfrm>
           <a:prstGeom prst="rect">
             <a:avLst>
@@ -15210,8 +15770,8 @@
         </p:nvSpPr>
         <p:spPr>
           <a:xfrm>
-            <a:off x="2221992" y="2258568"/>
-            <a:ext cx="1828800" cy="292608"/>
+            <a:off x="1989734" y="2258568"/>
+            <a:ext cx="1581912" cy="292608"/>
           </a:xfrm>
           <a:prstGeom prst="rect">
             <a:avLst/>
@@ -15235,7 +15795,7 @@
                 <a:ea typeface="Trebuchet MS" pitchFamily="34" charset="-122"/>
                 <a:cs typeface="Trebuchet MS" pitchFamily="34" charset="-120"/>
               </a:rPr>
-              <a:t>mis</a:t>
+              <a:t>un</a:t>
             </a:r>
             <a:endParaRPr lang="en-US" sz="1300" dirty="0"/>
           </a:p>
@@ -15249,8 +15809,8 @@
         </p:nvSpPr>
         <p:spPr>
           <a:xfrm>
-            <a:off x="2221992" y="2569464"/>
-            <a:ext cx="1828800" cy="201168"/>
+            <a:off x="1989734" y="2569464"/>
+            <a:ext cx="1581912" cy="201168"/>
           </a:xfrm>
           <a:prstGeom prst="rect">
             <a:avLst/>
@@ -15274,7 +15834,7 @@
                 <a:ea typeface="Calibri" pitchFamily="34" charset="-122"/>
                 <a:cs typeface="Calibri" pitchFamily="34" charset="-120"/>
               </a:rPr>
-              <a:t>wrongly, badly</a:t>
+              <a:t>not</a:t>
             </a:r>
             <a:endParaRPr lang="en-US" sz="850" dirty="0"/>
           </a:p>
@@ -15288,8 +15848,8 @@
         </p:nvSpPr>
         <p:spPr>
           <a:xfrm>
-            <a:off x="4370832" y="2258568"/>
-            <a:ext cx="1828800" cy="292608"/>
+            <a:off x="3659429" y="2258568"/>
+            <a:ext cx="1581912" cy="292608"/>
           </a:xfrm>
           <a:prstGeom prst="rect">
             <a:avLst>
@@ -15297,11 +15857,11 @@
             </a:avLst>
           </a:prstGeom>
           <a:solidFill>
-            <a:srgbClr val="CCFBF1"/>
+            <a:srgbClr val="DDD6FE"/>
           </a:solidFill>
           <a:ln w="19050">
             <a:solidFill>
-              <a:srgbClr val="0D9488"/>
+              <a:srgbClr val="7C3AED"/>
             </a:solidFill>
             <a:prstDash val="solid"/>
           </a:ln>
@@ -15322,8 +15882,8 @@
         </p:nvSpPr>
         <p:spPr>
           <a:xfrm>
-            <a:off x="4370832" y="2258568"/>
-            <a:ext cx="1828800" cy="292608"/>
+            <a:off x="3659429" y="2258568"/>
+            <a:ext cx="1581912" cy="292608"/>
           </a:xfrm>
           <a:prstGeom prst="rect">
             <a:avLst/>
@@ -15341,13 +15901,13 @@
             <a:r>
               <a:rPr lang="en-US" sz="1300" b="1" dirty="0">
                 <a:solidFill>
-                  <a:srgbClr val="0F766E"/>
+                  <a:srgbClr val="4C1D95"/>
                 </a:solidFill>
                 <a:latin typeface="Trebuchet MS" pitchFamily="34" charset="0"/>
                 <a:ea typeface="Trebuchet MS" pitchFamily="34" charset="-122"/>
                 <a:cs typeface="Trebuchet MS" pitchFamily="34" charset="-120"/>
               </a:rPr>
-              <a:t>report</a:t>
+              <a:t>re</a:t>
             </a:r>
             <a:endParaRPr lang="en-US" sz="1300" dirty="0"/>
           </a:p>
@@ -15361,8 +15921,8 @@
         </p:nvSpPr>
         <p:spPr>
           <a:xfrm>
-            <a:off x="4370832" y="2569464"/>
-            <a:ext cx="1828800" cy="201168"/>
+            <a:off x="3659429" y="2569464"/>
+            <a:ext cx="1581912" cy="201168"/>
           </a:xfrm>
           <a:prstGeom prst="rect">
             <a:avLst/>
@@ -15386,7 +15946,7 @@
                 <a:ea typeface="Calibri" pitchFamily="34" charset="-122"/>
                 <a:cs typeface="Calibri" pitchFamily="34" charset="-120"/>
               </a:rPr>
-              <a:t>to carry back, to tell</a:t>
+              <a:t>again, back</a:t>
             </a:r>
             <a:endParaRPr lang="en-US" sz="850" dirty="0"/>
           </a:p>
@@ -15400,8 +15960,8 @@
         </p:nvSpPr>
         <p:spPr>
           <a:xfrm>
-            <a:off x="6519672" y="2258568"/>
-            <a:ext cx="1828800" cy="292608"/>
+            <a:off x="5329123" y="2258568"/>
+            <a:ext cx="1581912" cy="292608"/>
           </a:xfrm>
           <a:prstGeom prst="rect">
             <a:avLst>
@@ -15434,8 +15994,8 @@
         </p:nvSpPr>
         <p:spPr>
           <a:xfrm>
-            <a:off x="6519672" y="2258568"/>
-            <a:ext cx="1828800" cy="292608"/>
+            <a:off x="5329123" y="2258568"/>
+            <a:ext cx="1581912" cy="292608"/>
           </a:xfrm>
           <a:prstGeom prst="rect">
             <a:avLst/>
@@ -15459,7 +16019,7 @@
                 <a:ea typeface="Trebuchet MS" pitchFamily="34" charset="-122"/>
                 <a:cs typeface="Trebuchet MS" pitchFamily="34" charset="-120"/>
               </a:rPr>
-              <a:t>ed</a:t>
+              <a:t>port</a:t>
             </a:r>
             <a:endParaRPr lang="en-US" sz="1300" dirty="0"/>
           </a:p>
@@ -15473,8 +16033,8 @@
         </p:nvSpPr>
         <p:spPr>
           <a:xfrm>
-            <a:off x="6519672" y="2569464"/>
-            <a:ext cx="1828800" cy="201168"/>
+            <a:off x="5329123" y="2569464"/>
+            <a:ext cx="1581912" cy="201168"/>
           </a:xfrm>
           <a:prstGeom prst="rect">
             <a:avLst/>
@@ -15498,7 +16058,7 @@
                 <a:ea typeface="Calibri" pitchFamily="34" charset="-122"/>
                 <a:cs typeface="Calibri" pitchFamily="34" charset="-120"/>
               </a:rPr>
-              <a:t>happened in the past</a:t>
+              <a:t>carry, bring</a:t>
             </a:r>
             <a:endParaRPr lang="en-US" sz="850" dirty="0"/>
           </a:p>
@@ -15507,6 +16067,118 @@
       <p:sp>
         <p:nvSpPr>
           <p:cNvPr id="25" name="Shape 23"/>
+          <p:cNvSpPr/>
+          <p:nvPr/>
+        </p:nvSpPr>
+        <p:spPr>
+          <a:xfrm>
+            <a:off x="6998818" y="2258568"/>
+            <a:ext cx="1581912" cy="292608"/>
+          </a:xfrm>
+          <a:prstGeom prst="rect">
+            <a:avLst>
+              <a:gd name="adj" fmla="val 25000"/>
+            </a:avLst>
+          </a:prstGeom>
+          <a:solidFill>
+            <a:srgbClr val="FCE7F3"/>
+          </a:solidFill>
+          <a:ln w="19050">
+            <a:solidFill>
+              <a:srgbClr val="DB2777"/>
+            </a:solidFill>
+            <a:prstDash val="solid"/>
+          </a:ln>
+          <a:effectLst>
+            <a:outerShdw sx="100000" sy="100000" kx="0" ky="0" algn="bl" rotWithShape="0" blurRad="101600" dist="38100" dir="8100000">
+              <a:srgbClr val="000000">
+                <a:alpha val="12000"/>
+              </a:srgbClr>
+            </a:outerShdw>
+          </a:effectLst>
+        </p:spPr>
+      </p:sp>
+      <p:sp>
+        <p:nvSpPr>
+          <p:cNvPr id="26" name="Text 24"/>
+          <p:cNvSpPr/>
+          <p:nvPr/>
+        </p:nvSpPr>
+        <p:spPr>
+          <a:xfrm>
+            <a:off x="6998818" y="2258568"/>
+            <a:ext cx="1581912" cy="292608"/>
+          </a:xfrm>
+          <a:prstGeom prst="rect">
+            <a:avLst/>
+          </a:prstGeom>
+          <a:noFill/>
+          <a:ln/>
+        </p:spPr>
+        <p:txBody>
+          <a:bodyPr wrap="square" lIns="0" tIns="0" rIns="0" bIns="0" rtlCol="0" anchor="ctr"/>
+          <a:lstStyle/>
+          <a:p>
+            <a:pPr algn="ctr" indent="0" marL="0">
+              <a:buNone/>
+            </a:pPr>
+            <a:r>
+              <a:rPr lang="en-US" sz="1300" b="1" dirty="0">
+                <a:solidFill>
+                  <a:srgbClr val="9D174D"/>
+                </a:solidFill>
+                <a:latin typeface="Trebuchet MS" pitchFamily="34" charset="0"/>
+                <a:ea typeface="Trebuchet MS" pitchFamily="34" charset="-122"/>
+                <a:cs typeface="Trebuchet MS" pitchFamily="34" charset="-120"/>
+              </a:rPr>
+              <a:t>ed</a:t>
+            </a:r>
+            <a:endParaRPr lang="en-US" sz="1300" dirty="0"/>
+          </a:p>
+        </p:txBody>
+      </p:sp>
+      <p:sp>
+        <p:nvSpPr>
+          <p:cNvPr id="27" name="Text 25"/>
+          <p:cNvSpPr/>
+          <p:nvPr/>
+        </p:nvSpPr>
+        <p:spPr>
+          <a:xfrm>
+            <a:off x="6998818" y="2569464"/>
+            <a:ext cx="1581912" cy="201168"/>
+          </a:xfrm>
+          <a:prstGeom prst="rect">
+            <a:avLst/>
+          </a:prstGeom>
+          <a:noFill/>
+          <a:ln/>
+        </p:spPr>
+        <p:txBody>
+          <a:bodyPr wrap="square" lIns="0" tIns="0" rIns="0" bIns="0" rtlCol="0" anchor="t"/>
+          <a:lstStyle/>
+          <a:p>
+            <a:pPr algn="ctr" indent="0" marL="0">
+              <a:buNone/>
+            </a:pPr>
+            <a:r>
+              <a:rPr lang="en-US" sz="850" dirty="0">
+                <a:solidFill>
+                  <a:srgbClr val="475569"/>
+                </a:solidFill>
+                <a:latin typeface="Calibri" pitchFamily="34" charset="0"/>
+                <a:ea typeface="Calibri" pitchFamily="34" charset="-122"/>
+                <a:cs typeface="Calibri" pitchFamily="34" charset="-120"/>
+              </a:rPr>
+              <a:t>in the past</a:t>
+            </a:r>
+            <a:endParaRPr lang="en-US" sz="850" dirty="0"/>
+          </a:p>
+        </p:txBody>
+      </p:sp>
+      <p:sp>
+        <p:nvSpPr>
+          <p:cNvPr id="28" name="Shape 26"/>
           <p:cNvSpPr/>
           <p:nvPr/>
         </p:nvSpPr>
@@ -15533,7 +16205,7 @@
       </p:sp>
       <p:sp>
         <p:nvSpPr>
-          <p:cNvPr id="26" name="Text 24"/>
+          <p:cNvPr id="29" name="Text 27"/>
           <p:cNvSpPr/>
           <p:nvPr/>
         </p:nvSpPr>
@@ -15572,7 +16244,7 @@
       </p:sp>
       <p:sp>
         <p:nvSpPr>
-          <p:cNvPr id="27" name="Shape 25"/>
+          <p:cNvPr id="30" name="Shape 28"/>
           <p:cNvSpPr/>
           <p:nvPr/>
         </p:nvSpPr>
@@ -15599,7 +16271,7 @@
       </p:sp>
       <p:sp>
         <p:nvSpPr>
-          <p:cNvPr id="28" name="Shape 26"/>
+          <p:cNvPr id="31" name="Shape 29"/>
           <p:cNvSpPr/>
           <p:nvPr/>
         </p:nvSpPr>
@@ -15626,7 +16298,7 @@
       </p:sp>
       <p:sp>
         <p:nvSpPr>
-          <p:cNvPr id="29" name="Text 27"/>
+          <p:cNvPr id="32" name="Text 30"/>
           <p:cNvSpPr/>
           <p:nvPr/>
         </p:nvSpPr>
@@ -15657,7 +16329,7 @@
                 <a:ea typeface="Trebuchet MS" pitchFamily="34" charset="-122"/>
                 <a:cs typeface="Trebuchet MS" pitchFamily="34" charset="-120"/>
               </a:rPr>
-              <a:t>mis</a:t>
+              <a:t>un</a:t>
             </a:r>
             <a:endParaRPr lang="en-US" sz="1400" dirty="0"/>
           </a:p>
@@ -15665,7 +16337,7 @@
       </p:sp>
       <p:sp>
         <p:nvSpPr>
-          <p:cNvPr id="30" name="Text 28"/>
+          <p:cNvPr id="33" name="Text 31"/>
           <p:cNvSpPr/>
           <p:nvPr/>
         </p:nvSpPr>
@@ -15704,7 +16376,7 @@
       </p:sp>
       <p:sp>
         <p:nvSpPr>
-          <p:cNvPr id="31" name="Shape 29"/>
+          <p:cNvPr id="34" name="Shape 32"/>
           <p:cNvSpPr/>
           <p:nvPr/>
         </p:nvSpPr>
@@ -15731,7 +16403,7 @@
       </p:sp>
       <p:sp>
         <p:nvSpPr>
-          <p:cNvPr id="32" name="Text 30"/>
+          <p:cNvPr id="35" name="Text 33"/>
           <p:cNvSpPr/>
           <p:nvPr/>
         </p:nvSpPr>
@@ -15770,7 +16442,7 @@
       </p:sp>
       <p:sp>
         <p:nvSpPr>
-          <p:cNvPr id="33" name="Text 31"/>
+          <p:cNvPr id="36" name="Text 34"/>
           <p:cNvSpPr/>
           <p:nvPr/>
         </p:nvSpPr>
@@ -15809,7 +16481,7 @@
       </p:sp>
       <p:sp>
         <p:nvSpPr>
-          <p:cNvPr id="34" name="Shape 32"/>
+          <p:cNvPr id="37" name="Shape 35"/>
           <p:cNvSpPr/>
           <p:nvPr/>
         </p:nvSpPr>
@@ -15836,7 +16508,7 @@
       </p:sp>
       <p:sp>
         <p:nvSpPr>
-          <p:cNvPr id="35" name="Text 33"/>
+          <p:cNvPr id="38" name="Text 36"/>
           <p:cNvSpPr/>
           <p:nvPr/>
         </p:nvSpPr>
@@ -15867,7 +16539,7 @@
                 <a:ea typeface="Trebuchet MS" pitchFamily="34" charset="-122"/>
                 <a:cs typeface="Trebuchet MS" pitchFamily="34" charset="-120"/>
               </a:rPr>
-              <a:t>por</a:t>
+              <a:t>port</a:t>
             </a:r>
             <a:endParaRPr lang="en-US" sz="1400" dirty="0"/>
           </a:p>
@@ -15875,7 +16547,7 @@
       </p:sp>
       <p:sp>
         <p:nvSpPr>
-          <p:cNvPr id="36" name="Text 34"/>
+          <p:cNvPr id="39" name="Text 37"/>
           <p:cNvSpPr/>
           <p:nvPr/>
         </p:nvSpPr>
@@ -15914,7 +16586,7 @@
       </p:sp>
       <p:sp>
         <p:nvSpPr>
-          <p:cNvPr id="37" name="Shape 35"/>
+          <p:cNvPr id="40" name="Shape 38"/>
           <p:cNvSpPr/>
           <p:nvPr/>
         </p:nvSpPr>
@@ -15941,7 +16613,7 @@
       </p:sp>
       <p:sp>
         <p:nvSpPr>
-          <p:cNvPr id="38" name="Text 36"/>
+          <p:cNvPr id="41" name="Text 39"/>
           <p:cNvSpPr/>
           <p:nvPr/>
         </p:nvSpPr>
@@ -15972,7 +16644,7 @@
                 <a:ea typeface="Trebuchet MS" pitchFamily="34" charset="-122"/>
                 <a:cs typeface="Trebuchet MS" pitchFamily="34" charset="-120"/>
               </a:rPr>
-              <a:t>ted</a:t>
+              <a:t>ed</a:t>
             </a:r>
             <a:endParaRPr lang="en-US" sz="1400" dirty="0"/>
           </a:p>
@@ -15980,7 +16652,7 @@
       </p:sp>
       <p:sp>
         <p:nvSpPr>
-          <p:cNvPr id="39" name="Shape 37"/>
+          <p:cNvPr id="42" name="Shape 40"/>
           <p:cNvSpPr/>
           <p:nvPr/>
         </p:nvSpPr>
@@ -16007,7 +16679,7 @@
       </p:sp>
       <p:sp>
         <p:nvSpPr>
-          <p:cNvPr id="40" name="Text 38"/>
+          <p:cNvPr id="43" name="Text 41"/>
           <p:cNvSpPr/>
           <p:nvPr/>
         </p:nvSpPr>
@@ -16046,7 +16718,7 @@
       </p:sp>
       <p:sp>
         <p:nvSpPr>
-          <p:cNvPr id="41" name="Shape 39"/>
+          <p:cNvPr id="44" name="Shape 42"/>
           <p:cNvSpPr/>
           <p:nvPr/>
         </p:nvSpPr>
@@ -16073,7 +16745,7 @@
       </p:sp>
       <p:sp>
         <p:nvSpPr>
-          <p:cNvPr id="42" name="Shape 40"/>
+          <p:cNvPr id="45" name="Shape 43"/>
           <p:cNvSpPr/>
           <p:nvPr/>
         </p:nvSpPr>
@@ -16100,7 +16772,7 @@
       </p:sp>
       <p:sp>
         <p:nvSpPr>
-          <p:cNvPr id="43" name="Text 41"/>
+          <p:cNvPr id="46" name="Text 44"/>
           <p:cNvSpPr/>
           <p:nvPr/>
         </p:nvSpPr>
@@ -16131,7 +16803,7 @@
                 <a:ea typeface="Trebuchet MS" pitchFamily="34" charset="-122"/>
                 <a:cs typeface="Trebuchet MS" pitchFamily="34" charset="-120"/>
               </a:rPr>
-              <a:t>m</a:t>
+              <a:t>u</a:t>
             </a:r>
             <a:endParaRPr lang="en-US" sz="900" dirty="0"/>
           </a:p>
@@ -16139,7 +16811,7 @@
       </p:sp>
       <p:sp>
         <p:nvSpPr>
-          <p:cNvPr id="44" name="Shape 42"/>
+          <p:cNvPr id="47" name="Shape 45"/>
           <p:cNvSpPr/>
           <p:nvPr/>
         </p:nvSpPr>
@@ -16166,7 +16838,7 @@
       </p:sp>
       <p:sp>
         <p:nvSpPr>
-          <p:cNvPr id="45" name="Text 43"/>
+          <p:cNvPr id="48" name="Text 46"/>
           <p:cNvSpPr/>
           <p:nvPr/>
         </p:nvSpPr>
@@ -16197,7 +16869,7 @@
                 <a:ea typeface="Trebuchet MS" pitchFamily="34" charset="-122"/>
                 <a:cs typeface="Trebuchet MS" pitchFamily="34" charset="-120"/>
               </a:rPr>
-              <a:t>i</a:t>
+              <a:t>n</a:t>
             </a:r>
             <a:endParaRPr lang="en-US" sz="900" dirty="0"/>
           </a:p>
@@ -16205,7 +16877,7 @@
       </p:sp>
       <p:sp>
         <p:nvSpPr>
-          <p:cNvPr id="46" name="Shape 44"/>
+          <p:cNvPr id="49" name="Shape 47"/>
           <p:cNvSpPr/>
           <p:nvPr/>
         </p:nvSpPr>
@@ -16232,7 +16904,7 @@
       </p:sp>
       <p:sp>
         <p:nvSpPr>
-          <p:cNvPr id="47" name="Text 45"/>
+          <p:cNvPr id="50" name="Text 48"/>
           <p:cNvSpPr/>
           <p:nvPr/>
         </p:nvSpPr>
@@ -16263,7 +16935,7 @@
                 <a:ea typeface="Trebuchet MS" pitchFamily="34" charset="-122"/>
                 <a:cs typeface="Trebuchet MS" pitchFamily="34" charset="-120"/>
               </a:rPr>
-              <a:t>s</a:t>
+              <a:t>r</a:t>
             </a:r>
             <a:endParaRPr lang="en-US" sz="900" dirty="0"/>
           </a:p>
@@ -16271,7 +16943,7 @@
       </p:sp>
       <p:sp>
         <p:nvSpPr>
-          <p:cNvPr id="48" name="Shape 46"/>
+          <p:cNvPr id="51" name="Shape 49"/>
           <p:cNvSpPr/>
           <p:nvPr/>
         </p:nvSpPr>
@@ -16298,7 +16970,7 @@
       </p:sp>
       <p:sp>
         <p:nvSpPr>
-          <p:cNvPr id="49" name="Text 47"/>
+          <p:cNvPr id="52" name="Text 50"/>
           <p:cNvSpPr/>
           <p:nvPr/>
         </p:nvSpPr>
@@ -16329,7 +17001,7 @@
                 <a:ea typeface="Trebuchet MS" pitchFamily="34" charset="-122"/>
                 <a:cs typeface="Trebuchet MS" pitchFamily="34" charset="-120"/>
               </a:rPr>
-              <a:t>r</a:t>
+              <a:t>e</a:t>
             </a:r>
             <a:endParaRPr lang="en-US" sz="900" dirty="0"/>
           </a:p>
@@ -16337,7 +17009,7 @@
       </p:sp>
       <p:sp>
         <p:nvSpPr>
-          <p:cNvPr id="50" name="Shape 48"/>
+          <p:cNvPr id="53" name="Shape 51"/>
           <p:cNvSpPr/>
           <p:nvPr/>
         </p:nvSpPr>
@@ -16364,7 +17036,7 @@
       </p:sp>
       <p:sp>
         <p:nvSpPr>
-          <p:cNvPr id="51" name="Text 49"/>
+          <p:cNvPr id="54" name="Text 52"/>
           <p:cNvSpPr/>
           <p:nvPr/>
         </p:nvSpPr>
@@ -16395,7 +17067,7 @@
                 <a:ea typeface="Trebuchet MS" pitchFamily="34" charset="-122"/>
                 <a:cs typeface="Trebuchet MS" pitchFamily="34" charset="-120"/>
               </a:rPr>
-              <a:t>e</a:t>
+              <a:t>p</a:t>
             </a:r>
             <a:endParaRPr lang="en-US" sz="900" dirty="0"/>
           </a:p>
@@ -16403,7 +17075,7 @@
       </p:sp>
       <p:sp>
         <p:nvSpPr>
-          <p:cNvPr id="52" name="Shape 50"/>
+          <p:cNvPr id="55" name="Shape 53"/>
           <p:cNvSpPr/>
           <p:nvPr/>
         </p:nvSpPr>
@@ -16430,7 +17102,7 @@
       </p:sp>
       <p:sp>
         <p:nvSpPr>
-          <p:cNvPr id="53" name="Text 51"/>
+          <p:cNvPr id="56" name="Text 54"/>
           <p:cNvSpPr/>
           <p:nvPr/>
         </p:nvSpPr>
@@ -16461,7 +17133,7 @@
                 <a:ea typeface="Trebuchet MS" pitchFamily="34" charset="-122"/>
                 <a:cs typeface="Trebuchet MS" pitchFamily="34" charset="-120"/>
               </a:rPr>
-              <a:t>p</a:t>
+              <a:t>or</a:t>
             </a:r>
             <a:endParaRPr lang="en-US" sz="900" dirty="0"/>
           </a:p>
@@ -16469,7 +17141,7 @@
       </p:sp>
       <p:sp>
         <p:nvSpPr>
-          <p:cNvPr id="54" name="Shape 52"/>
+          <p:cNvPr id="57" name="Shape 55"/>
           <p:cNvSpPr/>
           <p:nvPr/>
         </p:nvSpPr>
@@ -16496,7 +17168,7 @@
       </p:sp>
       <p:sp>
         <p:nvSpPr>
-          <p:cNvPr id="55" name="Text 53"/>
+          <p:cNvPr id="58" name="Text 56"/>
           <p:cNvSpPr/>
           <p:nvPr/>
         </p:nvSpPr>
@@ -16527,7 +17199,7 @@
                 <a:ea typeface="Trebuchet MS" pitchFamily="34" charset="-122"/>
                 <a:cs typeface="Trebuchet MS" pitchFamily="34" charset="-120"/>
               </a:rPr>
-              <a:t>or</a:t>
+              <a:t>t</a:t>
             </a:r>
             <a:endParaRPr lang="en-US" sz="900" dirty="0"/>
           </a:p>
@@ -16535,7 +17207,7 @@
       </p:sp>
       <p:sp>
         <p:nvSpPr>
-          <p:cNvPr id="56" name="Shape 54"/>
+          <p:cNvPr id="59" name="Shape 57"/>
           <p:cNvSpPr/>
           <p:nvPr/>
         </p:nvSpPr>
@@ -16562,7 +17234,7 @@
       </p:sp>
       <p:sp>
         <p:nvSpPr>
-          <p:cNvPr id="57" name="Text 55"/>
+          <p:cNvPr id="60" name="Text 58"/>
           <p:cNvSpPr/>
           <p:nvPr/>
         </p:nvSpPr>
@@ -16593,7 +17265,7 @@
                 <a:ea typeface="Trebuchet MS" pitchFamily="34" charset="-122"/>
                 <a:cs typeface="Trebuchet MS" pitchFamily="34" charset="-120"/>
               </a:rPr>
-              <a:t>t</a:t>
+              <a:t>e</a:t>
             </a:r>
             <a:endParaRPr lang="en-US" sz="900" dirty="0"/>
           </a:p>
@@ -16601,7 +17273,7 @@
       </p:sp>
       <p:sp>
         <p:nvSpPr>
-          <p:cNvPr id="58" name="Shape 56"/>
+          <p:cNvPr id="61" name="Shape 59"/>
           <p:cNvSpPr/>
           <p:nvPr/>
         </p:nvSpPr>
@@ -16628,7 +17300,7 @@
       </p:sp>
       <p:sp>
         <p:nvSpPr>
-          <p:cNvPr id="59" name="Text 57"/>
+          <p:cNvPr id="62" name="Text 60"/>
           <p:cNvSpPr/>
           <p:nvPr/>
         </p:nvSpPr>
@@ -16659,7 +17331,7 @@
                 <a:ea typeface="Trebuchet MS" pitchFamily="34" charset="-122"/>
                 <a:cs typeface="Trebuchet MS" pitchFamily="34" charset="-120"/>
               </a:rPr>
-              <a:t>ed</a:t>
+              <a:t>d</a:t>
             </a:r>
             <a:endParaRPr lang="en-US" sz="900" dirty="0"/>
           </a:p>
@@ -17567,7 +18239,7 @@
                 <a:ea typeface="Trebuchet MS" pitchFamily="34" charset="-122"/>
                 <a:cs typeface="Trebuchet MS" pitchFamily="34" charset="-120"/>
               </a:rPr>
-              <a:t>1</a:t>
+              <a:t>2</a:t>
             </a:r>
             <a:pPr algn="ctr" indent="0" marL="0">
               <a:buNone/>
@@ -17581,7 +18253,7 @@
                 <a:ea typeface="Trebuchet MS" pitchFamily="34" charset="-122"/>
                 <a:cs typeface="Trebuchet MS" pitchFamily="34" charset="-120"/>
               </a:rPr>
-              <a:t>  punctuation mark</a:t>
+              <a:t>  punctuation marks</a:t>
             </a:r>
             <a:endParaRPr lang="en-US" sz="2800" dirty="0"/>
           </a:p>
@@ -17985,7 +18657,7 @@
                 <a:ea typeface="Calibri" pitchFamily="34" charset="-122"/>
                 <a:cs typeface="Calibri" pitchFamily="34" charset="-120"/>
               </a:rPr>
-              <a:t>The </a:t>
+              <a:t>She was </a:t>
             </a:r>
             <a:pPr algn="l" indent="0" marL="0">
               <a:buNone/>
@@ -18016,7 +18688,7 @@
                 <a:ea typeface="Calibri" pitchFamily="34" charset="-122"/>
                 <a:cs typeface="Calibri" pitchFamily="34" charset="-120"/>
               </a:rPr>
-              <a:t> on the bushfire was </a:t>
+              <a:t> on how the </a:t>
             </a:r>
             <a:pPr algn="l" indent="0" marL="0">
               <a:buNone/>
@@ -18033,7 +18705,7 @@
                 <a:ea typeface="Calibri" pitchFamily="34" charset="-122"/>
                 <a:cs typeface="Calibri" pitchFamily="34" charset="-120"/>
               </a:rPr>
-              <a:t>unreported</a:t>
+              <a:t>misreport</a:t>
             </a:r>
             <a:pPr algn="l" indent="0" marL="0">
               <a:buNone/>
@@ -18047,7 +18719,7 @@
                 <a:ea typeface="Calibri" pitchFamily="34" charset="-122"/>
                 <a:cs typeface="Calibri" pitchFamily="34" charset="-120"/>
               </a:rPr>
-              <a:t> overseas, so the journalist decided to write a full </a:t>
+              <a:t> had spread, but the </a:t>
             </a:r>
             <a:pPr algn="l" indent="0" marL="0">
               <a:buNone/>
@@ -18064,7 +18736,7 @@
                 <a:ea typeface="Calibri" pitchFamily="34" charset="-122"/>
                 <a:cs typeface="Calibri" pitchFamily="34" charset="-120"/>
               </a:rPr>
-              <a:t>report</a:t>
+              <a:t>self-reported</a:t>
             </a:r>
             <a:pPr algn="l" indent="0" marL="0">
               <a:buNone/>
@@ -18078,7 +18750,7 @@
                 <a:ea typeface="Calibri" pitchFamily="34" charset="-122"/>
                 <a:cs typeface="Calibri" pitchFamily="34" charset="-120"/>
               </a:rPr>
-              <a:t> herself.</a:t>
+              <a:t> data told a different story.</a:t>
             </a:r>
             <a:endParaRPr lang="en-US" sz="1800" dirty="0"/>
           </a:p>
@@ -18361,7 +19033,7 @@
                 <a:ea typeface="Trebuchet MS" pitchFamily="34" charset="-122"/>
                 <a:cs typeface="Trebuchet MS" pitchFamily="34" charset="-120"/>
               </a:rPr>
-              <a:t>unreported</a:t>
+              <a:t>misreport</a:t>
             </a:r>
             <a:endParaRPr lang="en-US" sz="1400" dirty="0"/>
           </a:p>
@@ -18489,7 +19161,7 @@
                 <a:ea typeface="Trebuchet MS" pitchFamily="34" charset="-122"/>
                 <a:cs typeface="Trebuchet MS" pitchFamily="34" charset="-120"/>
               </a:rPr>
-              <a:t>report</a:t>
+              <a:t>self-reported</a:t>
             </a:r>
             <a:endParaRPr lang="en-US" sz="1400" dirty="0"/>
           </a:p>
@@ -19866,7 +20538,7 @@
         </p:nvSpPr>
         <p:spPr>
           <a:xfrm>
-            <a:off x="2938272" y="2258568"/>
+            <a:off x="2221992" y="2258568"/>
             <a:ext cx="1828800" cy="292608"/>
           </a:xfrm>
           <a:prstGeom prst="rect">
@@ -19875,11 +20547,11 @@
             </a:avLst>
           </a:prstGeom>
           <a:solidFill>
-            <a:srgbClr val="CCFBF1"/>
+            <a:srgbClr val="DDD6FE"/>
           </a:solidFill>
           <a:ln w="19050">
             <a:solidFill>
-              <a:srgbClr val="0D9488"/>
+              <a:srgbClr val="7C3AED"/>
             </a:solidFill>
             <a:prstDash val="solid"/>
           </a:ln>
@@ -19900,7 +20572,7 @@
         </p:nvSpPr>
         <p:spPr>
           <a:xfrm>
-            <a:off x="2938272" y="2258568"/>
+            <a:off x="2221992" y="2258568"/>
             <a:ext cx="1828800" cy="292608"/>
           </a:xfrm>
           <a:prstGeom prst="rect">
@@ -19919,13 +20591,13 @@
             <a:r>
               <a:rPr lang="en-US" sz="1300" b="1" dirty="0">
                 <a:solidFill>
-                  <a:srgbClr val="0F766E"/>
+                  <a:srgbClr val="4C1D95"/>
                 </a:solidFill>
                 <a:latin typeface="Trebuchet MS" pitchFamily="34" charset="0"/>
                 <a:ea typeface="Trebuchet MS" pitchFamily="34" charset="-122"/>
                 <a:cs typeface="Trebuchet MS" pitchFamily="34" charset="-120"/>
               </a:rPr>
-              <a:t>report</a:t>
+              <a:t>re</a:t>
             </a:r>
             <a:endParaRPr lang="en-US" sz="1300" dirty="0"/>
           </a:p>
@@ -19939,7 +20611,7 @@
         </p:nvSpPr>
         <p:spPr>
           <a:xfrm>
-            <a:off x="2938272" y="2569464"/>
+            <a:off x="2221992" y="2569464"/>
             <a:ext cx="1828800" cy="201168"/>
           </a:xfrm>
           <a:prstGeom prst="rect">
@@ -19964,7 +20636,7 @@
                 <a:ea typeface="Calibri" pitchFamily="34" charset="-122"/>
                 <a:cs typeface="Calibri" pitchFamily="34" charset="-120"/>
               </a:rPr>
-              <a:t>to carry back, to tell</a:t>
+              <a:t>again, back</a:t>
             </a:r>
             <a:endParaRPr lang="en-US" sz="850" dirty="0"/>
           </a:p>
@@ -19978,7 +20650,7 @@
         </p:nvSpPr>
         <p:spPr>
           <a:xfrm>
-            <a:off x="5803392" y="2258568"/>
+            <a:off x="4370832" y="2258568"/>
             <a:ext cx="1828800" cy="292608"/>
           </a:xfrm>
           <a:prstGeom prst="rect">
@@ -20012,7 +20684,7 @@
         </p:nvSpPr>
         <p:spPr>
           <a:xfrm>
-            <a:off x="5803392" y="2258568"/>
+            <a:off x="4370832" y="2258568"/>
             <a:ext cx="1828800" cy="292608"/>
           </a:xfrm>
           <a:prstGeom prst="rect">
@@ -20037,7 +20709,7 @@
                 <a:ea typeface="Trebuchet MS" pitchFamily="34" charset="-122"/>
                 <a:cs typeface="Trebuchet MS" pitchFamily="34" charset="-120"/>
               </a:rPr>
-              <a:t>ing</a:t>
+              <a:t>port</a:t>
             </a:r>
             <a:endParaRPr lang="en-US" sz="1300" dirty="0"/>
           </a:p>
@@ -20051,7 +20723,7 @@
         </p:nvSpPr>
         <p:spPr>
           <a:xfrm>
-            <a:off x="5803392" y="2569464"/>
+            <a:off x="4370832" y="2569464"/>
             <a:ext cx="1828800" cy="201168"/>
           </a:xfrm>
           <a:prstGeom prst="rect">
@@ -20076,7 +20748,7 @@
                 <a:ea typeface="Calibri" pitchFamily="34" charset="-122"/>
                 <a:cs typeface="Calibri" pitchFamily="34" charset="-120"/>
               </a:rPr>
-              <a:t>action happening now</a:t>
+              <a:t>carry, bring</a:t>
             </a:r>
             <a:endParaRPr lang="en-US" sz="850" dirty="0"/>
           </a:p>
@@ -20085,6 +20757,118 @@
       <p:sp>
         <p:nvSpPr>
           <p:cNvPr id="22" name="Shape 20"/>
+          <p:cNvSpPr/>
+          <p:nvPr/>
+        </p:nvSpPr>
+        <p:spPr>
+          <a:xfrm>
+            <a:off x="6519672" y="2258568"/>
+            <a:ext cx="1828800" cy="292608"/>
+          </a:xfrm>
+          <a:prstGeom prst="rect">
+            <a:avLst>
+              <a:gd name="adj" fmla="val 25000"/>
+            </a:avLst>
+          </a:prstGeom>
+          <a:solidFill>
+            <a:srgbClr val="FCE7F3"/>
+          </a:solidFill>
+          <a:ln w="19050">
+            <a:solidFill>
+              <a:srgbClr val="DB2777"/>
+            </a:solidFill>
+            <a:prstDash val="solid"/>
+          </a:ln>
+          <a:effectLst>
+            <a:outerShdw sx="100000" sy="100000" kx="0" ky="0" algn="bl" rotWithShape="0" blurRad="101600" dist="38100" dir="8100000">
+              <a:srgbClr val="000000">
+                <a:alpha val="12000"/>
+              </a:srgbClr>
+            </a:outerShdw>
+          </a:effectLst>
+        </p:spPr>
+      </p:sp>
+      <p:sp>
+        <p:nvSpPr>
+          <p:cNvPr id="23" name="Text 21"/>
+          <p:cNvSpPr/>
+          <p:nvPr/>
+        </p:nvSpPr>
+        <p:spPr>
+          <a:xfrm>
+            <a:off x="6519672" y="2258568"/>
+            <a:ext cx="1828800" cy="292608"/>
+          </a:xfrm>
+          <a:prstGeom prst="rect">
+            <a:avLst/>
+          </a:prstGeom>
+          <a:noFill/>
+          <a:ln/>
+        </p:spPr>
+        <p:txBody>
+          <a:bodyPr wrap="square" lIns="0" tIns="0" rIns="0" bIns="0" rtlCol="0" anchor="ctr"/>
+          <a:lstStyle/>
+          <a:p>
+            <a:pPr algn="ctr" indent="0" marL="0">
+              <a:buNone/>
+            </a:pPr>
+            <a:r>
+              <a:rPr lang="en-US" sz="1300" b="1" dirty="0">
+                <a:solidFill>
+                  <a:srgbClr val="9D174D"/>
+                </a:solidFill>
+                <a:latin typeface="Trebuchet MS" pitchFamily="34" charset="0"/>
+                <a:ea typeface="Trebuchet MS" pitchFamily="34" charset="-122"/>
+                <a:cs typeface="Trebuchet MS" pitchFamily="34" charset="-120"/>
+              </a:rPr>
+              <a:t>ing</a:t>
+            </a:r>
+            <a:endParaRPr lang="en-US" sz="1300" dirty="0"/>
+          </a:p>
+        </p:txBody>
+      </p:sp>
+      <p:sp>
+        <p:nvSpPr>
+          <p:cNvPr id="24" name="Text 22"/>
+          <p:cNvSpPr/>
+          <p:nvPr/>
+        </p:nvSpPr>
+        <p:spPr>
+          <a:xfrm>
+            <a:off x="6519672" y="2569464"/>
+            <a:ext cx="1828800" cy="201168"/>
+          </a:xfrm>
+          <a:prstGeom prst="rect">
+            <a:avLst/>
+          </a:prstGeom>
+          <a:noFill/>
+          <a:ln/>
+        </p:spPr>
+        <p:txBody>
+          <a:bodyPr wrap="square" lIns="0" tIns="0" rIns="0" bIns="0" rtlCol="0" anchor="t"/>
+          <a:lstStyle/>
+          <a:p>
+            <a:pPr algn="ctr" indent="0" marL="0">
+              <a:buNone/>
+            </a:pPr>
+            <a:r>
+              <a:rPr lang="en-US" sz="850" dirty="0">
+                <a:solidFill>
+                  <a:srgbClr val="475569"/>
+                </a:solidFill>
+                <a:latin typeface="Calibri" pitchFamily="34" charset="0"/>
+                <a:ea typeface="Calibri" pitchFamily="34" charset="-122"/>
+                <a:cs typeface="Calibri" pitchFamily="34" charset="-120"/>
+              </a:rPr>
+              <a:t>ongoing action</a:t>
+            </a:r>
+            <a:endParaRPr lang="en-US" sz="850" dirty="0"/>
+          </a:p>
+        </p:txBody>
+      </p:sp>
+      <p:sp>
+        <p:nvSpPr>
+          <p:cNvPr id="25" name="Shape 23"/>
           <p:cNvSpPr/>
           <p:nvPr/>
         </p:nvSpPr>
@@ -20111,7 +20895,7 @@
       </p:sp>
       <p:sp>
         <p:nvSpPr>
-          <p:cNvPr id="23" name="Text 21"/>
+          <p:cNvPr id="26" name="Text 24"/>
           <p:cNvSpPr/>
           <p:nvPr/>
         </p:nvSpPr>
@@ -20150,7 +20934,7 @@
       </p:sp>
       <p:sp>
         <p:nvSpPr>
-          <p:cNvPr id="24" name="Shape 22"/>
+          <p:cNvPr id="27" name="Shape 25"/>
           <p:cNvSpPr/>
           <p:nvPr/>
         </p:nvSpPr>
@@ -20177,7 +20961,7 @@
       </p:sp>
       <p:sp>
         <p:nvSpPr>
-          <p:cNvPr id="25" name="Text 23"/>
+          <p:cNvPr id="28" name="Text 26"/>
           <p:cNvSpPr/>
           <p:nvPr/>
         </p:nvSpPr>
@@ -20216,7 +21000,7 @@
       </p:sp>
       <p:sp>
         <p:nvSpPr>
-          <p:cNvPr id="26" name="Shape 24"/>
+          <p:cNvPr id="29" name="Shape 27"/>
           <p:cNvSpPr/>
           <p:nvPr/>
         </p:nvSpPr>
@@ -20243,7 +21027,7 @@
       </p:sp>
       <p:sp>
         <p:nvSpPr>
-          <p:cNvPr id="27" name="Text 25"/>
+          <p:cNvPr id="30" name="Text 28"/>
           <p:cNvSpPr/>
           <p:nvPr/>
         </p:nvSpPr>
@@ -20282,7 +21066,7 @@
       </p:sp>
       <p:sp>
         <p:nvSpPr>
-          <p:cNvPr id="28" name="Shape 26"/>
+          <p:cNvPr id="31" name="Shape 29"/>
           <p:cNvSpPr/>
           <p:nvPr/>
         </p:nvSpPr>
@@ -20309,7 +21093,7 @@
       </p:sp>
       <p:sp>
         <p:nvSpPr>
-          <p:cNvPr id="29" name="Text 27"/>
+          <p:cNvPr id="32" name="Text 30"/>
           <p:cNvSpPr/>
           <p:nvPr/>
         </p:nvSpPr>
@@ -20851,7 +21635,7 @@
         </p:nvSpPr>
         <p:spPr>
           <a:xfrm>
-            <a:off x="2938272" y="2258568"/>
+            <a:off x="2221992" y="2258568"/>
             <a:ext cx="1828800" cy="292608"/>
           </a:xfrm>
           <a:prstGeom prst="rect">
@@ -20860,11 +21644,11 @@
             </a:avLst>
           </a:prstGeom>
           <a:solidFill>
-            <a:srgbClr val="CCFBF1"/>
+            <a:srgbClr val="DDD6FE"/>
           </a:solidFill>
           <a:ln w="19050">
             <a:solidFill>
-              <a:srgbClr val="0D9488"/>
+              <a:srgbClr val="7C3AED"/>
             </a:solidFill>
             <a:prstDash val="solid"/>
           </a:ln>
@@ -20885,7 +21669,7 @@
         </p:nvSpPr>
         <p:spPr>
           <a:xfrm>
-            <a:off x="2938272" y="2258568"/>
+            <a:off x="2221992" y="2258568"/>
             <a:ext cx="1828800" cy="292608"/>
           </a:xfrm>
           <a:prstGeom prst="rect">
@@ -20904,13 +21688,13 @@
             <a:r>
               <a:rPr lang="en-US" sz="1300" b="1" dirty="0">
                 <a:solidFill>
-                  <a:srgbClr val="0F766E"/>
+                  <a:srgbClr val="4C1D95"/>
                 </a:solidFill>
                 <a:latin typeface="Trebuchet MS" pitchFamily="34" charset="0"/>
                 <a:ea typeface="Trebuchet MS" pitchFamily="34" charset="-122"/>
                 <a:cs typeface="Trebuchet MS" pitchFamily="34" charset="-120"/>
               </a:rPr>
-              <a:t>report</a:t>
+              <a:t>re</a:t>
             </a:r>
             <a:endParaRPr lang="en-US" sz="1300" dirty="0"/>
           </a:p>
@@ -20924,7 +21708,7 @@
         </p:nvSpPr>
         <p:spPr>
           <a:xfrm>
-            <a:off x="2938272" y="2569464"/>
+            <a:off x="2221992" y="2569464"/>
             <a:ext cx="1828800" cy="201168"/>
           </a:xfrm>
           <a:prstGeom prst="rect">
@@ -20949,7 +21733,7 @@
                 <a:ea typeface="Calibri" pitchFamily="34" charset="-122"/>
                 <a:cs typeface="Calibri" pitchFamily="34" charset="-120"/>
               </a:rPr>
-              <a:t>to carry back, to tell</a:t>
+              <a:t>again, back</a:t>
             </a:r>
             <a:endParaRPr lang="en-US" sz="850" dirty="0"/>
           </a:p>
@@ -20963,7 +21747,7 @@
         </p:nvSpPr>
         <p:spPr>
           <a:xfrm>
-            <a:off x="5803392" y="2258568"/>
+            <a:off x="4370832" y="2258568"/>
             <a:ext cx="1828800" cy="292608"/>
           </a:xfrm>
           <a:prstGeom prst="rect">
@@ -20997,7 +21781,7 @@
         </p:nvSpPr>
         <p:spPr>
           <a:xfrm>
-            <a:off x="5803392" y="2258568"/>
+            <a:off x="4370832" y="2258568"/>
             <a:ext cx="1828800" cy="292608"/>
           </a:xfrm>
           <a:prstGeom prst="rect">
@@ -21022,7 +21806,7 @@
                 <a:ea typeface="Trebuchet MS" pitchFamily="34" charset="-122"/>
                 <a:cs typeface="Trebuchet MS" pitchFamily="34" charset="-120"/>
               </a:rPr>
-              <a:t>ing</a:t>
+              <a:t>port</a:t>
             </a:r>
             <a:endParaRPr lang="en-US" sz="1300" dirty="0"/>
           </a:p>
@@ -21036,7 +21820,7 @@
         </p:nvSpPr>
         <p:spPr>
           <a:xfrm>
-            <a:off x="5803392" y="2569464"/>
+            <a:off x="4370832" y="2569464"/>
             <a:ext cx="1828800" cy="201168"/>
           </a:xfrm>
           <a:prstGeom prst="rect">
@@ -21061,7 +21845,7 @@
                 <a:ea typeface="Calibri" pitchFamily="34" charset="-122"/>
                 <a:cs typeface="Calibri" pitchFamily="34" charset="-120"/>
               </a:rPr>
-              <a:t>action happening now</a:t>
+              <a:t>carry, bring</a:t>
             </a:r>
             <a:endParaRPr lang="en-US" sz="850" dirty="0"/>
           </a:p>
@@ -21070,6 +21854,118 @@
       <p:sp>
         <p:nvSpPr>
           <p:cNvPr id="22" name="Shape 20"/>
+          <p:cNvSpPr/>
+          <p:nvPr/>
+        </p:nvSpPr>
+        <p:spPr>
+          <a:xfrm>
+            <a:off x="6519672" y="2258568"/>
+            <a:ext cx="1828800" cy="292608"/>
+          </a:xfrm>
+          <a:prstGeom prst="rect">
+            <a:avLst>
+              <a:gd name="adj" fmla="val 25000"/>
+            </a:avLst>
+          </a:prstGeom>
+          <a:solidFill>
+            <a:srgbClr val="FCE7F3"/>
+          </a:solidFill>
+          <a:ln w="19050">
+            <a:solidFill>
+              <a:srgbClr val="DB2777"/>
+            </a:solidFill>
+            <a:prstDash val="solid"/>
+          </a:ln>
+          <a:effectLst>
+            <a:outerShdw sx="100000" sy="100000" kx="0" ky="0" algn="bl" rotWithShape="0" blurRad="101600" dist="38100" dir="8100000">
+              <a:srgbClr val="000000">
+                <a:alpha val="12000"/>
+              </a:srgbClr>
+            </a:outerShdw>
+          </a:effectLst>
+        </p:spPr>
+      </p:sp>
+      <p:sp>
+        <p:nvSpPr>
+          <p:cNvPr id="23" name="Text 21"/>
+          <p:cNvSpPr/>
+          <p:nvPr/>
+        </p:nvSpPr>
+        <p:spPr>
+          <a:xfrm>
+            <a:off x="6519672" y="2258568"/>
+            <a:ext cx="1828800" cy="292608"/>
+          </a:xfrm>
+          <a:prstGeom prst="rect">
+            <a:avLst/>
+          </a:prstGeom>
+          <a:noFill/>
+          <a:ln/>
+        </p:spPr>
+        <p:txBody>
+          <a:bodyPr wrap="square" lIns="0" tIns="0" rIns="0" bIns="0" rtlCol="0" anchor="ctr"/>
+          <a:lstStyle/>
+          <a:p>
+            <a:pPr algn="ctr" indent="0" marL="0">
+              <a:buNone/>
+            </a:pPr>
+            <a:r>
+              <a:rPr lang="en-US" sz="1300" b="1" dirty="0">
+                <a:solidFill>
+                  <a:srgbClr val="9D174D"/>
+                </a:solidFill>
+                <a:latin typeface="Trebuchet MS" pitchFamily="34" charset="0"/>
+                <a:ea typeface="Trebuchet MS" pitchFamily="34" charset="-122"/>
+                <a:cs typeface="Trebuchet MS" pitchFamily="34" charset="-120"/>
+              </a:rPr>
+              <a:t>ing</a:t>
+            </a:r>
+            <a:endParaRPr lang="en-US" sz="1300" dirty="0"/>
+          </a:p>
+        </p:txBody>
+      </p:sp>
+      <p:sp>
+        <p:nvSpPr>
+          <p:cNvPr id="24" name="Text 22"/>
+          <p:cNvSpPr/>
+          <p:nvPr/>
+        </p:nvSpPr>
+        <p:spPr>
+          <a:xfrm>
+            <a:off x="6519672" y="2569464"/>
+            <a:ext cx="1828800" cy="201168"/>
+          </a:xfrm>
+          <a:prstGeom prst="rect">
+            <a:avLst/>
+          </a:prstGeom>
+          <a:noFill/>
+          <a:ln/>
+        </p:spPr>
+        <p:txBody>
+          <a:bodyPr wrap="square" lIns="0" tIns="0" rIns="0" bIns="0" rtlCol="0" anchor="t"/>
+          <a:lstStyle/>
+          <a:p>
+            <a:pPr algn="ctr" indent="0" marL="0">
+              <a:buNone/>
+            </a:pPr>
+            <a:r>
+              <a:rPr lang="en-US" sz="850" dirty="0">
+                <a:solidFill>
+                  <a:srgbClr val="475569"/>
+                </a:solidFill>
+                <a:latin typeface="Calibri" pitchFamily="34" charset="0"/>
+                <a:ea typeface="Calibri" pitchFamily="34" charset="-122"/>
+                <a:cs typeface="Calibri" pitchFamily="34" charset="-120"/>
+              </a:rPr>
+              <a:t>ongoing action</a:t>
+            </a:r>
+            <a:endParaRPr lang="en-US" sz="850" dirty="0"/>
+          </a:p>
+        </p:txBody>
+      </p:sp>
+      <p:sp>
+        <p:nvSpPr>
+          <p:cNvPr id="25" name="Shape 23"/>
           <p:cNvSpPr/>
           <p:nvPr/>
         </p:nvSpPr>
@@ -21096,7 +21992,7 @@
       </p:sp>
       <p:sp>
         <p:nvSpPr>
-          <p:cNvPr id="23" name="Text 21"/>
+          <p:cNvPr id="26" name="Text 24"/>
           <p:cNvSpPr/>
           <p:nvPr/>
         </p:nvSpPr>
@@ -21135,7 +22031,7 @@
       </p:sp>
       <p:sp>
         <p:nvSpPr>
-          <p:cNvPr id="24" name="Shape 22"/>
+          <p:cNvPr id="27" name="Shape 25"/>
           <p:cNvSpPr/>
           <p:nvPr/>
         </p:nvSpPr>
@@ -21162,7 +22058,7 @@
       </p:sp>
       <p:sp>
         <p:nvSpPr>
-          <p:cNvPr id="25" name="Shape 23"/>
+          <p:cNvPr id="28" name="Shape 26"/>
           <p:cNvSpPr/>
           <p:nvPr/>
         </p:nvSpPr>
@@ -21189,7 +22085,7 @@
       </p:sp>
       <p:sp>
         <p:nvSpPr>
-          <p:cNvPr id="26" name="Text 24"/>
+          <p:cNvPr id="29" name="Text 27"/>
           <p:cNvSpPr/>
           <p:nvPr/>
         </p:nvSpPr>
@@ -21228,7 +22124,7 @@
       </p:sp>
       <p:sp>
         <p:nvSpPr>
-          <p:cNvPr id="27" name="Text 25"/>
+          <p:cNvPr id="30" name="Text 28"/>
           <p:cNvSpPr/>
           <p:nvPr/>
         </p:nvSpPr>
@@ -21267,7 +22163,7 @@
       </p:sp>
       <p:sp>
         <p:nvSpPr>
-          <p:cNvPr id="28" name="Shape 26"/>
+          <p:cNvPr id="31" name="Shape 29"/>
           <p:cNvSpPr/>
           <p:nvPr/>
         </p:nvSpPr>
@@ -21294,7 +22190,7 @@
       </p:sp>
       <p:sp>
         <p:nvSpPr>
-          <p:cNvPr id="29" name="Text 27"/>
+          <p:cNvPr id="32" name="Text 30"/>
           <p:cNvSpPr/>
           <p:nvPr/>
         </p:nvSpPr>
@@ -21325,7 +22221,7 @@
                 <a:ea typeface="Trebuchet MS" pitchFamily="34" charset="-122"/>
                 <a:cs typeface="Trebuchet MS" pitchFamily="34" charset="-120"/>
               </a:rPr>
-              <a:t>por</a:t>
+              <a:t>port</a:t>
             </a:r>
             <a:endParaRPr lang="en-US" sz="1400" dirty="0"/>
           </a:p>
@@ -21333,7 +22229,7 @@
       </p:sp>
       <p:sp>
         <p:nvSpPr>
-          <p:cNvPr id="30" name="Text 28"/>
+          <p:cNvPr id="33" name="Text 31"/>
           <p:cNvSpPr/>
           <p:nvPr/>
         </p:nvSpPr>
@@ -21372,7 +22268,7 @@
       </p:sp>
       <p:sp>
         <p:nvSpPr>
-          <p:cNvPr id="31" name="Shape 29"/>
+          <p:cNvPr id="34" name="Shape 32"/>
           <p:cNvSpPr/>
           <p:nvPr/>
         </p:nvSpPr>
@@ -21399,7 +22295,7 @@
       </p:sp>
       <p:sp>
         <p:nvSpPr>
-          <p:cNvPr id="32" name="Text 30"/>
+          <p:cNvPr id="35" name="Text 33"/>
           <p:cNvSpPr/>
           <p:nvPr/>
         </p:nvSpPr>
@@ -21430,7 +22326,7 @@
                 <a:ea typeface="Trebuchet MS" pitchFamily="34" charset="-122"/>
                 <a:cs typeface="Trebuchet MS" pitchFamily="34" charset="-120"/>
               </a:rPr>
-              <a:t>ting</a:t>
+              <a:t>ing</a:t>
             </a:r>
             <a:endParaRPr lang="en-US" sz="1400" dirty="0"/>
           </a:p>
@@ -21438,7 +22334,7 @@
       </p:sp>
       <p:sp>
         <p:nvSpPr>
-          <p:cNvPr id="33" name="Shape 31"/>
+          <p:cNvPr id="36" name="Shape 34"/>
           <p:cNvSpPr/>
           <p:nvPr/>
         </p:nvSpPr>
@@ -21465,7 +22361,7 @@
       </p:sp>
       <p:sp>
         <p:nvSpPr>
-          <p:cNvPr id="34" name="Text 32"/>
+          <p:cNvPr id="37" name="Text 35"/>
           <p:cNvSpPr/>
           <p:nvPr/>
         </p:nvSpPr>
@@ -21504,7 +22400,7 @@
       </p:sp>
       <p:sp>
         <p:nvSpPr>
-          <p:cNvPr id="35" name="Shape 33"/>
+          <p:cNvPr id="38" name="Shape 36"/>
           <p:cNvSpPr/>
           <p:nvPr/>
         </p:nvSpPr>
@@ -21531,7 +22427,7 @@
       </p:sp>
       <p:sp>
         <p:nvSpPr>
-          <p:cNvPr id="36" name="Text 34"/>
+          <p:cNvPr id="39" name="Text 37"/>
           <p:cNvSpPr/>
           <p:nvPr/>
         </p:nvSpPr>
@@ -22073,7 +22969,7 @@
         </p:nvSpPr>
         <p:spPr>
           <a:xfrm>
-            <a:off x="2938272" y="2258568"/>
+            <a:off x="2221992" y="2258568"/>
             <a:ext cx="1828800" cy="292608"/>
           </a:xfrm>
           <a:prstGeom prst="rect">
@@ -22082,11 +22978,11 @@
             </a:avLst>
           </a:prstGeom>
           <a:solidFill>
-            <a:srgbClr val="CCFBF1"/>
+            <a:srgbClr val="DDD6FE"/>
           </a:solidFill>
           <a:ln w="19050">
             <a:solidFill>
-              <a:srgbClr val="0D9488"/>
+              <a:srgbClr val="7C3AED"/>
             </a:solidFill>
             <a:prstDash val="solid"/>
           </a:ln>
@@ -22107,7 +23003,7 @@
         </p:nvSpPr>
         <p:spPr>
           <a:xfrm>
-            <a:off x="2938272" y="2258568"/>
+            <a:off x="2221992" y="2258568"/>
             <a:ext cx="1828800" cy="292608"/>
           </a:xfrm>
           <a:prstGeom prst="rect">
@@ -22126,13 +23022,13 @@
             <a:r>
               <a:rPr lang="en-US" sz="1300" b="1" dirty="0">
                 <a:solidFill>
-                  <a:srgbClr val="0F766E"/>
+                  <a:srgbClr val="4C1D95"/>
                 </a:solidFill>
                 <a:latin typeface="Trebuchet MS" pitchFamily="34" charset="0"/>
                 <a:ea typeface="Trebuchet MS" pitchFamily="34" charset="-122"/>
                 <a:cs typeface="Trebuchet MS" pitchFamily="34" charset="-120"/>
               </a:rPr>
-              <a:t>report</a:t>
+              <a:t>re</a:t>
             </a:r>
             <a:endParaRPr lang="en-US" sz="1300" dirty="0"/>
           </a:p>
@@ -22146,7 +23042,7 @@
         </p:nvSpPr>
         <p:spPr>
           <a:xfrm>
-            <a:off x="2938272" y="2569464"/>
+            <a:off x="2221992" y="2569464"/>
             <a:ext cx="1828800" cy="201168"/>
           </a:xfrm>
           <a:prstGeom prst="rect">
@@ -22171,7 +23067,7 @@
                 <a:ea typeface="Calibri" pitchFamily="34" charset="-122"/>
                 <a:cs typeface="Calibri" pitchFamily="34" charset="-120"/>
               </a:rPr>
-              <a:t>to carry back, to tell</a:t>
+              <a:t>again, back</a:t>
             </a:r>
             <a:endParaRPr lang="en-US" sz="850" dirty="0"/>
           </a:p>
@@ -22185,7 +23081,7 @@
         </p:nvSpPr>
         <p:spPr>
           <a:xfrm>
-            <a:off x="5803392" y="2258568"/>
+            <a:off x="4370832" y="2258568"/>
             <a:ext cx="1828800" cy="292608"/>
           </a:xfrm>
           <a:prstGeom prst="rect">
@@ -22219,7 +23115,7 @@
         </p:nvSpPr>
         <p:spPr>
           <a:xfrm>
-            <a:off x="5803392" y="2258568"/>
+            <a:off x="4370832" y="2258568"/>
             <a:ext cx="1828800" cy="292608"/>
           </a:xfrm>
           <a:prstGeom prst="rect">
@@ -22244,7 +23140,7 @@
                 <a:ea typeface="Trebuchet MS" pitchFamily="34" charset="-122"/>
                 <a:cs typeface="Trebuchet MS" pitchFamily="34" charset="-120"/>
               </a:rPr>
-              <a:t>ing</a:t>
+              <a:t>port</a:t>
             </a:r>
             <a:endParaRPr lang="en-US" sz="1300" dirty="0"/>
           </a:p>
@@ -22258,7 +23154,7 @@
         </p:nvSpPr>
         <p:spPr>
           <a:xfrm>
-            <a:off x="5803392" y="2569464"/>
+            <a:off x="4370832" y="2569464"/>
             <a:ext cx="1828800" cy="201168"/>
           </a:xfrm>
           <a:prstGeom prst="rect">
@@ -22283,7 +23179,7 @@
                 <a:ea typeface="Calibri" pitchFamily="34" charset="-122"/>
                 <a:cs typeface="Calibri" pitchFamily="34" charset="-120"/>
               </a:rPr>
-              <a:t>action happening now</a:t>
+              <a:t>carry, bring</a:t>
             </a:r>
             <a:endParaRPr lang="en-US" sz="850" dirty="0"/>
           </a:p>
@@ -22292,6 +23188,118 @@
       <p:sp>
         <p:nvSpPr>
           <p:cNvPr id="22" name="Shape 20"/>
+          <p:cNvSpPr/>
+          <p:nvPr/>
+        </p:nvSpPr>
+        <p:spPr>
+          <a:xfrm>
+            <a:off x="6519672" y="2258568"/>
+            <a:ext cx="1828800" cy="292608"/>
+          </a:xfrm>
+          <a:prstGeom prst="rect">
+            <a:avLst>
+              <a:gd name="adj" fmla="val 25000"/>
+            </a:avLst>
+          </a:prstGeom>
+          <a:solidFill>
+            <a:srgbClr val="FCE7F3"/>
+          </a:solidFill>
+          <a:ln w="19050">
+            <a:solidFill>
+              <a:srgbClr val="DB2777"/>
+            </a:solidFill>
+            <a:prstDash val="solid"/>
+          </a:ln>
+          <a:effectLst>
+            <a:outerShdw sx="100000" sy="100000" kx="0" ky="0" algn="bl" rotWithShape="0" blurRad="101600" dist="38100" dir="8100000">
+              <a:srgbClr val="000000">
+                <a:alpha val="12000"/>
+              </a:srgbClr>
+            </a:outerShdw>
+          </a:effectLst>
+        </p:spPr>
+      </p:sp>
+      <p:sp>
+        <p:nvSpPr>
+          <p:cNvPr id="23" name="Text 21"/>
+          <p:cNvSpPr/>
+          <p:nvPr/>
+        </p:nvSpPr>
+        <p:spPr>
+          <a:xfrm>
+            <a:off x="6519672" y="2258568"/>
+            <a:ext cx="1828800" cy="292608"/>
+          </a:xfrm>
+          <a:prstGeom prst="rect">
+            <a:avLst/>
+          </a:prstGeom>
+          <a:noFill/>
+          <a:ln/>
+        </p:spPr>
+        <p:txBody>
+          <a:bodyPr wrap="square" lIns="0" tIns="0" rIns="0" bIns="0" rtlCol="0" anchor="ctr"/>
+          <a:lstStyle/>
+          <a:p>
+            <a:pPr algn="ctr" indent="0" marL="0">
+              <a:buNone/>
+            </a:pPr>
+            <a:r>
+              <a:rPr lang="en-US" sz="1300" b="1" dirty="0">
+                <a:solidFill>
+                  <a:srgbClr val="9D174D"/>
+                </a:solidFill>
+                <a:latin typeface="Trebuchet MS" pitchFamily="34" charset="0"/>
+                <a:ea typeface="Trebuchet MS" pitchFamily="34" charset="-122"/>
+                <a:cs typeface="Trebuchet MS" pitchFamily="34" charset="-120"/>
+              </a:rPr>
+              <a:t>ing</a:t>
+            </a:r>
+            <a:endParaRPr lang="en-US" sz="1300" dirty="0"/>
+          </a:p>
+        </p:txBody>
+      </p:sp>
+      <p:sp>
+        <p:nvSpPr>
+          <p:cNvPr id="24" name="Text 22"/>
+          <p:cNvSpPr/>
+          <p:nvPr/>
+        </p:nvSpPr>
+        <p:spPr>
+          <a:xfrm>
+            <a:off x="6519672" y="2569464"/>
+            <a:ext cx="1828800" cy="201168"/>
+          </a:xfrm>
+          <a:prstGeom prst="rect">
+            <a:avLst/>
+          </a:prstGeom>
+          <a:noFill/>
+          <a:ln/>
+        </p:spPr>
+        <p:txBody>
+          <a:bodyPr wrap="square" lIns="0" tIns="0" rIns="0" bIns="0" rtlCol="0" anchor="t"/>
+          <a:lstStyle/>
+          <a:p>
+            <a:pPr algn="ctr" indent="0" marL="0">
+              <a:buNone/>
+            </a:pPr>
+            <a:r>
+              <a:rPr lang="en-US" sz="850" dirty="0">
+                <a:solidFill>
+                  <a:srgbClr val="475569"/>
+                </a:solidFill>
+                <a:latin typeface="Calibri" pitchFamily="34" charset="0"/>
+                <a:ea typeface="Calibri" pitchFamily="34" charset="-122"/>
+                <a:cs typeface="Calibri" pitchFamily="34" charset="-120"/>
+              </a:rPr>
+              <a:t>ongoing action</a:t>
+            </a:r>
+            <a:endParaRPr lang="en-US" sz="850" dirty="0"/>
+          </a:p>
+        </p:txBody>
+      </p:sp>
+      <p:sp>
+        <p:nvSpPr>
+          <p:cNvPr id="25" name="Shape 23"/>
           <p:cNvSpPr/>
           <p:nvPr/>
         </p:nvSpPr>
@@ -22318,7 +23326,7 @@
       </p:sp>
       <p:sp>
         <p:nvSpPr>
-          <p:cNvPr id="23" name="Text 21"/>
+          <p:cNvPr id="26" name="Text 24"/>
           <p:cNvSpPr/>
           <p:nvPr/>
         </p:nvSpPr>
@@ -22357,7 +23365,7 @@
       </p:sp>
       <p:sp>
         <p:nvSpPr>
-          <p:cNvPr id="24" name="Shape 22"/>
+          <p:cNvPr id="27" name="Shape 25"/>
           <p:cNvSpPr/>
           <p:nvPr/>
         </p:nvSpPr>
@@ -22384,7 +23392,7 @@
       </p:sp>
       <p:sp>
         <p:nvSpPr>
-          <p:cNvPr id="25" name="Shape 23"/>
+          <p:cNvPr id="28" name="Shape 26"/>
           <p:cNvSpPr/>
           <p:nvPr/>
         </p:nvSpPr>
@@ -22411,7 +23419,7 @@
       </p:sp>
       <p:sp>
         <p:nvSpPr>
-          <p:cNvPr id="26" name="Text 24"/>
+          <p:cNvPr id="29" name="Text 27"/>
           <p:cNvSpPr/>
           <p:nvPr/>
         </p:nvSpPr>
@@ -22450,7 +23458,7 @@
       </p:sp>
       <p:sp>
         <p:nvSpPr>
-          <p:cNvPr id="27" name="Text 25"/>
+          <p:cNvPr id="30" name="Text 28"/>
           <p:cNvSpPr/>
           <p:nvPr/>
         </p:nvSpPr>
@@ -22489,7 +23497,7 @@
       </p:sp>
       <p:sp>
         <p:nvSpPr>
-          <p:cNvPr id="28" name="Shape 26"/>
+          <p:cNvPr id="31" name="Shape 29"/>
           <p:cNvSpPr/>
           <p:nvPr/>
         </p:nvSpPr>
@@ -22516,7 +23524,7 @@
       </p:sp>
       <p:sp>
         <p:nvSpPr>
-          <p:cNvPr id="29" name="Text 27"/>
+          <p:cNvPr id="32" name="Text 30"/>
           <p:cNvSpPr/>
           <p:nvPr/>
         </p:nvSpPr>
@@ -22547,7 +23555,7 @@
                 <a:ea typeface="Trebuchet MS" pitchFamily="34" charset="-122"/>
                 <a:cs typeface="Trebuchet MS" pitchFamily="34" charset="-120"/>
               </a:rPr>
-              <a:t>por</a:t>
+              <a:t>port</a:t>
             </a:r>
             <a:endParaRPr lang="en-US" sz="1400" dirty="0"/>
           </a:p>
@@ -22555,7 +23563,7 @@
       </p:sp>
       <p:sp>
         <p:nvSpPr>
-          <p:cNvPr id="30" name="Text 28"/>
+          <p:cNvPr id="33" name="Text 31"/>
           <p:cNvSpPr/>
           <p:nvPr/>
         </p:nvSpPr>
@@ -22594,7 +23602,7 @@
       </p:sp>
       <p:sp>
         <p:nvSpPr>
-          <p:cNvPr id="31" name="Shape 29"/>
+          <p:cNvPr id="34" name="Shape 32"/>
           <p:cNvSpPr/>
           <p:nvPr/>
         </p:nvSpPr>
@@ -22621,7 +23629,7 @@
       </p:sp>
       <p:sp>
         <p:nvSpPr>
-          <p:cNvPr id="32" name="Text 30"/>
+          <p:cNvPr id="35" name="Text 33"/>
           <p:cNvSpPr/>
           <p:nvPr/>
         </p:nvSpPr>
@@ -22652,7 +23660,7 @@
                 <a:ea typeface="Trebuchet MS" pitchFamily="34" charset="-122"/>
                 <a:cs typeface="Trebuchet MS" pitchFamily="34" charset="-120"/>
               </a:rPr>
-              <a:t>ting</a:t>
+              <a:t>ing</a:t>
             </a:r>
             <a:endParaRPr lang="en-US" sz="1400" dirty="0"/>
           </a:p>
@@ -22660,7 +23668,7 @@
       </p:sp>
       <p:sp>
         <p:nvSpPr>
-          <p:cNvPr id="33" name="Shape 31"/>
+          <p:cNvPr id="36" name="Shape 34"/>
           <p:cNvSpPr/>
           <p:nvPr/>
         </p:nvSpPr>
@@ -22687,7 +23695,7 @@
       </p:sp>
       <p:sp>
         <p:nvSpPr>
-          <p:cNvPr id="34" name="Text 32"/>
+          <p:cNvPr id="37" name="Text 35"/>
           <p:cNvSpPr/>
           <p:nvPr/>
         </p:nvSpPr>
@@ -22726,7 +23734,7 @@
       </p:sp>
       <p:sp>
         <p:nvSpPr>
-          <p:cNvPr id="35" name="Shape 33"/>
+          <p:cNvPr id="38" name="Shape 36"/>
           <p:cNvSpPr/>
           <p:nvPr/>
         </p:nvSpPr>
@@ -22753,13 +23761,13 @@
       </p:sp>
       <p:sp>
         <p:nvSpPr>
-          <p:cNvPr id="36" name="Shape 34"/>
-          <p:cNvSpPr/>
-          <p:nvPr/>
-        </p:nvSpPr>
-        <p:spPr>
-          <a:xfrm>
-            <a:off x="2254649" y="4169664"/>
+          <p:cNvPr id="39" name="Shape 37"/>
+          <p:cNvSpPr/>
+          <p:nvPr/>
+        </p:nvSpPr>
+        <p:spPr>
+          <a:xfrm>
+            <a:off x="2124837" y="4169664"/>
             <a:ext cx="685800" cy="475488"/>
           </a:xfrm>
           <a:prstGeom prst="rect">
@@ -22780,13 +23788,13 @@
       </p:sp>
       <p:sp>
         <p:nvSpPr>
-          <p:cNvPr id="37" name="Text 35"/>
-          <p:cNvSpPr/>
-          <p:nvPr/>
-        </p:nvSpPr>
-        <p:spPr>
-          <a:xfrm>
-            <a:off x="2254649" y="4169664"/>
+          <p:cNvPr id="40" name="Text 38"/>
+          <p:cNvSpPr/>
+          <p:nvPr/>
+        </p:nvSpPr>
+        <p:spPr>
+          <a:xfrm>
+            <a:off x="2124837" y="4169664"/>
             <a:ext cx="685800" cy="475488"/>
           </a:xfrm>
           <a:prstGeom prst="rect">
@@ -22819,13 +23827,13 @@
       </p:sp>
       <p:sp>
         <p:nvSpPr>
-          <p:cNvPr id="38" name="Shape 36"/>
-          <p:cNvSpPr/>
-          <p:nvPr/>
-        </p:nvSpPr>
-        <p:spPr>
-          <a:xfrm>
-            <a:off x="3293146" y="4169664"/>
+          <p:cNvPr id="41" name="Shape 39"/>
+          <p:cNvSpPr/>
+          <p:nvPr/>
+        </p:nvSpPr>
+        <p:spPr>
+          <a:xfrm>
+            <a:off x="3033522" y="4169664"/>
             <a:ext cx="685800" cy="475488"/>
           </a:xfrm>
           <a:prstGeom prst="rect">
@@ -22846,13 +23854,13 @@
       </p:sp>
       <p:sp>
         <p:nvSpPr>
-          <p:cNvPr id="39" name="Text 37"/>
-          <p:cNvSpPr/>
-          <p:nvPr/>
-        </p:nvSpPr>
-        <p:spPr>
-          <a:xfrm>
-            <a:off x="3293146" y="4169664"/>
+          <p:cNvPr id="42" name="Text 40"/>
+          <p:cNvSpPr/>
+          <p:nvPr/>
+        </p:nvSpPr>
+        <p:spPr>
+          <a:xfrm>
+            <a:off x="3033522" y="4169664"/>
             <a:ext cx="685800" cy="475488"/>
           </a:xfrm>
           <a:prstGeom prst="rect">
@@ -22885,13 +23893,13 @@
       </p:sp>
       <p:sp>
         <p:nvSpPr>
-          <p:cNvPr id="40" name="Shape 38"/>
-          <p:cNvSpPr/>
-          <p:nvPr/>
-        </p:nvSpPr>
-        <p:spPr>
-          <a:xfrm>
-            <a:off x="4331643" y="4169664"/>
+          <p:cNvPr id="43" name="Shape 41"/>
+          <p:cNvSpPr/>
+          <p:nvPr/>
+        </p:nvSpPr>
+        <p:spPr>
+          <a:xfrm>
+            <a:off x="3942207" y="4169664"/>
             <a:ext cx="685800" cy="475488"/>
           </a:xfrm>
           <a:prstGeom prst="rect">
@@ -22912,13 +23920,13 @@
       </p:sp>
       <p:sp>
         <p:nvSpPr>
-          <p:cNvPr id="41" name="Text 39"/>
-          <p:cNvSpPr/>
-          <p:nvPr/>
-        </p:nvSpPr>
-        <p:spPr>
-          <a:xfrm>
-            <a:off x="4331643" y="4169664"/>
+          <p:cNvPr id="44" name="Text 42"/>
+          <p:cNvSpPr/>
+          <p:nvPr/>
+        </p:nvSpPr>
+        <p:spPr>
+          <a:xfrm>
+            <a:off x="3942207" y="4169664"/>
             <a:ext cx="685800" cy="475488"/>
           </a:xfrm>
           <a:prstGeom prst="rect">
@@ -22951,13 +23959,13 @@
       </p:sp>
       <p:sp>
         <p:nvSpPr>
-          <p:cNvPr id="42" name="Shape 40"/>
-          <p:cNvSpPr/>
-          <p:nvPr/>
-        </p:nvSpPr>
-        <p:spPr>
-          <a:xfrm>
-            <a:off x="5370141" y="4169664"/>
+          <p:cNvPr id="45" name="Shape 43"/>
+          <p:cNvSpPr/>
+          <p:nvPr/>
+        </p:nvSpPr>
+        <p:spPr>
+          <a:xfrm>
+            <a:off x="4850892" y="4169664"/>
             <a:ext cx="685800" cy="475488"/>
           </a:xfrm>
           <a:prstGeom prst="rect">
@@ -22978,13 +23986,13 @@
       </p:sp>
       <p:sp>
         <p:nvSpPr>
-          <p:cNvPr id="43" name="Text 41"/>
-          <p:cNvSpPr/>
-          <p:nvPr/>
-        </p:nvSpPr>
-        <p:spPr>
-          <a:xfrm>
-            <a:off x="5370141" y="4169664"/>
+          <p:cNvPr id="46" name="Text 44"/>
+          <p:cNvSpPr/>
+          <p:nvPr/>
+        </p:nvSpPr>
+        <p:spPr>
+          <a:xfrm>
+            <a:off x="4850892" y="4169664"/>
             <a:ext cx="685800" cy="475488"/>
           </a:xfrm>
           <a:prstGeom prst="rect">
@@ -23017,13 +24025,13 @@
       </p:sp>
       <p:sp>
         <p:nvSpPr>
-          <p:cNvPr id="44" name="Shape 42"/>
-          <p:cNvSpPr/>
-          <p:nvPr/>
-        </p:nvSpPr>
-        <p:spPr>
-          <a:xfrm>
-            <a:off x="6408638" y="4169664"/>
+          <p:cNvPr id="47" name="Shape 45"/>
+          <p:cNvSpPr/>
+          <p:nvPr/>
+        </p:nvSpPr>
+        <p:spPr>
+          <a:xfrm>
+            <a:off x="5759577" y="4169664"/>
             <a:ext cx="685800" cy="475488"/>
           </a:xfrm>
           <a:prstGeom prst="rect">
@@ -23044,13 +24052,13 @@
       </p:sp>
       <p:sp>
         <p:nvSpPr>
-          <p:cNvPr id="45" name="Text 43"/>
-          <p:cNvSpPr/>
-          <p:nvPr/>
-        </p:nvSpPr>
-        <p:spPr>
-          <a:xfrm>
-            <a:off x="6408638" y="4169664"/>
+          <p:cNvPr id="48" name="Text 46"/>
+          <p:cNvSpPr/>
+          <p:nvPr/>
+        </p:nvSpPr>
+        <p:spPr>
+          <a:xfrm>
+            <a:off x="5759577" y="4169664"/>
             <a:ext cx="685800" cy="475488"/>
           </a:xfrm>
           <a:prstGeom prst="rect">
@@ -23083,13 +24091,13 @@
       </p:sp>
       <p:sp>
         <p:nvSpPr>
-          <p:cNvPr id="46" name="Shape 44"/>
-          <p:cNvSpPr/>
-          <p:nvPr/>
-        </p:nvSpPr>
-        <p:spPr>
-          <a:xfrm>
-            <a:off x="7447135" y="4169664"/>
+          <p:cNvPr id="49" name="Shape 47"/>
+          <p:cNvSpPr/>
+          <p:nvPr/>
+        </p:nvSpPr>
+        <p:spPr>
+          <a:xfrm>
+            <a:off x="6668262" y="4169664"/>
             <a:ext cx="685800" cy="475488"/>
           </a:xfrm>
           <a:prstGeom prst="rect">
@@ -23110,13 +24118,13 @@
       </p:sp>
       <p:sp>
         <p:nvSpPr>
-          <p:cNvPr id="47" name="Text 45"/>
-          <p:cNvSpPr/>
-          <p:nvPr/>
-        </p:nvSpPr>
-        <p:spPr>
-          <a:xfrm>
-            <a:off x="7447135" y="4169664"/>
+          <p:cNvPr id="50" name="Text 48"/>
+          <p:cNvSpPr/>
+          <p:nvPr/>
+        </p:nvSpPr>
+        <p:spPr>
+          <a:xfrm>
+            <a:off x="6668262" y="4169664"/>
             <a:ext cx="685800" cy="475488"/>
           </a:xfrm>
           <a:prstGeom prst="rect">
@@ -23141,7 +24149,73 @@
                 <a:ea typeface="Trebuchet MS" pitchFamily="34" charset="-122"/>
                 <a:cs typeface="Trebuchet MS" pitchFamily="34" charset="-120"/>
               </a:rPr>
-              <a:t>ing</a:t>
+              <a:t>i</a:t>
+            </a:r>
+            <a:endParaRPr lang="en-US" sz="900" dirty="0"/>
+          </a:p>
+        </p:txBody>
+      </p:sp>
+      <p:sp>
+        <p:nvSpPr>
+          <p:cNvPr id="51" name="Shape 49"/>
+          <p:cNvSpPr/>
+          <p:nvPr/>
+        </p:nvSpPr>
+        <p:spPr>
+          <a:xfrm>
+            <a:off x="7576947" y="4169664"/>
+            <a:ext cx="685800" cy="475488"/>
+          </a:xfrm>
+          <a:prstGeom prst="rect">
+            <a:avLst>
+              <a:gd name="adj" fmla="val 7692"/>
+            </a:avLst>
+          </a:prstGeom>
+          <a:solidFill>
+            <a:srgbClr val="FFFFFF"/>
+          </a:solidFill>
+          <a:ln w="12700">
+            <a:solidFill>
+              <a:srgbClr val="DB2777"/>
+            </a:solidFill>
+            <a:prstDash val="solid"/>
+          </a:ln>
+        </p:spPr>
+      </p:sp>
+      <p:sp>
+        <p:nvSpPr>
+          <p:cNvPr id="52" name="Text 50"/>
+          <p:cNvSpPr/>
+          <p:nvPr/>
+        </p:nvSpPr>
+        <p:spPr>
+          <a:xfrm>
+            <a:off x="7576947" y="4169664"/>
+            <a:ext cx="685800" cy="475488"/>
+          </a:xfrm>
+          <a:prstGeom prst="rect">
+            <a:avLst/>
+          </a:prstGeom>
+          <a:noFill/>
+          <a:ln/>
+        </p:spPr>
+        <p:txBody>
+          <a:bodyPr wrap="square" lIns="0" tIns="0" rIns="0" bIns="0" rtlCol="0" anchor="ctr"/>
+          <a:lstStyle/>
+          <a:p>
+            <a:pPr algn="ctr" indent="0" marL="0">
+              <a:buNone/>
+            </a:pPr>
+            <a:r>
+              <a:rPr lang="en-US" sz="900" b="1" dirty="0">
+                <a:solidFill>
+                  <a:srgbClr val="9D174D"/>
+                </a:solidFill>
+                <a:latin typeface="Trebuchet MS" pitchFamily="34" charset="0"/>
+                <a:ea typeface="Trebuchet MS" pitchFamily="34" charset="-122"/>
+                <a:cs typeface="Trebuchet MS" pitchFamily="34" charset="-120"/>
+              </a:rPr>
+              <a:t>ng</a:t>
             </a:r>
             <a:endParaRPr lang="en-US" sz="900" dirty="0"/>
           </a:p>
@@ -23572,7 +24646,7 @@
                 <a:ea typeface="Trebuchet MS" pitchFamily="34" charset="-122"/>
                 <a:cs typeface="Trebuchet MS" pitchFamily="34" charset="-120"/>
               </a:rPr>
-              <a:t>unreported</a:t>
+              <a:t>misreport</a:t>
             </a:r>
             <a:endParaRPr lang="en-US" sz="2800" dirty="0"/>
           </a:p>
@@ -24399,7 +25473,7 @@
                 <a:ea typeface="Trebuchet MS" pitchFamily="34" charset="-122"/>
                 <a:cs typeface="Trebuchet MS" pitchFamily="34" charset="-120"/>
               </a:rPr>
-              <a:t>unreported</a:t>
+              <a:t>misreport</a:t>
             </a:r>
             <a:endParaRPr lang="en-US" sz="2800" dirty="0"/>
           </a:p>
@@ -24538,7 +25612,7 @@
                 <a:ea typeface="Trebuchet MS" pitchFamily="34" charset="-122"/>
                 <a:cs typeface="Trebuchet MS" pitchFamily="34" charset="-120"/>
               </a:rPr>
-              <a:t>un</a:t>
+              <a:t>mis</a:t>
             </a:r>
             <a:endParaRPr lang="en-US" sz="1300" dirty="0"/>
           </a:p>
@@ -24577,7 +25651,7 @@
                 <a:ea typeface="Calibri" pitchFamily="34" charset="-122"/>
                 <a:cs typeface="Calibri" pitchFamily="34" charset="-120"/>
               </a:rPr>
-              <a:t>not</a:t>
+              <a:t>wrongly, badly</a:t>
             </a:r>
             <a:endParaRPr lang="en-US" sz="850" dirty="0"/>
           </a:p>
@@ -24600,11 +25674,11 @@
             </a:avLst>
           </a:prstGeom>
           <a:solidFill>
-            <a:srgbClr val="CCFBF1"/>
+            <a:srgbClr val="DDD6FE"/>
           </a:solidFill>
           <a:ln w="19050">
             <a:solidFill>
-              <a:srgbClr val="0D9488"/>
+              <a:srgbClr val="7C3AED"/>
             </a:solidFill>
             <a:prstDash val="solid"/>
           </a:ln>
@@ -24644,13 +25718,13 @@
             <a:r>
               <a:rPr lang="en-US" sz="1300" b="1" dirty="0">
                 <a:solidFill>
-                  <a:srgbClr val="0F766E"/>
+                  <a:srgbClr val="4C1D95"/>
                 </a:solidFill>
                 <a:latin typeface="Trebuchet MS" pitchFamily="34" charset="0"/>
                 <a:ea typeface="Trebuchet MS" pitchFamily="34" charset="-122"/>
                 <a:cs typeface="Trebuchet MS" pitchFamily="34" charset="-120"/>
               </a:rPr>
-              <a:t>report</a:t>
+              <a:t>re</a:t>
             </a:r>
             <a:endParaRPr lang="en-US" sz="1300" dirty="0"/>
           </a:p>
@@ -24689,7 +25763,7 @@
                 <a:ea typeface="Calibri" pitchFamily="34" charset="-122"/>
                 <a:cs typeface="Calibri" pitchFamily="34" charset="-120"/>
               </a:rPr>
-              <a:t>to carry back, to tell</a:t>
+              <a:t>again, back</a:t>
             </a:r>
             <a:endParaRPr lang="en-US" sz="850" dirty="0"/>
           </a:p>
@@ -24762,7 +25836,7 @@
                 <a:ea typeface="Trebuchet MS" pitchFamily="34" charset="-122"/>
                 <a:cs typeface="Trebuchet MS" pitchFamily="34" charset="-120"/>
               </a:rPr>
-              <a:t>ed</a:t>
+              <a:t>port</a:t>
             </a:r>
             <a:endParaRPr lang="en-US" sz="1300" dirty="0"/>
           </a:p>
@@ -24801,7 +25875,7 @@
                 <a:ea typeface="Calibri" pitchFamily="34" charset="-122"/>
                 <a:cs typeface="Calibri" pitchFamily="34" charset="-120"/>
               </a:rPr>
-              <a:t>happened in the past</a:t>
+              <a:t>carry, bring</a:t>
             </a:r>
             <a:endParaRPr lang="en-US" sz="850" dirty="0"/>
           </a:p>
@@ -26215,7 +27289,7 @@
                 <a:ea typeface="Trebuchet MS" pitchFamily="34" charset="-122"/>
                 <a:cs typeface="Trebuchet MS" pitchFamily="34" charset="-120"/>
               </a:rPr>
-              <a:t>unreported</a:t>
+              <a:t>misreport</a:t>
             </a:r>
             <a:endParaRPr lang="en-US" sz="2800" dirty="0"/>
           </a:p>
@@ -26354,7 +27428,7 @@
                 <a:ea typeface="Trebuchet MS" pitchFamily="34" charset="-122"/>
                 <a:cs typeface="Trebuchet MS" pitchFamily="34" charset="-120"/>
               </a:rPr>
-              <a:t>un</a:t>
+              <a:t>mis</a:t>
             </a:r>
             <a:endParaRPr lang="en-US" sz="1300" dirty="0"/>
           </a:p>
@@ -26393,7 +27467,7 @@
                 <a:ea typeface="Calibri" pitchFamily="34" charset="-122"/>
                 <a:cs typeface="Calibri" pitchFamily="34" charset="-120"/>
               </a:rPr>
-              <a:t>not</a:t>
+              <a:t>wrongly, badly</a:t>
             </a:r>
             <a:endParaRPr lang="en-US" sz="850" dirty="0"/>
           </a:p>
@@ -26416,11 +27490,11 @@
             </a:avLst>
           </a:prstGeom>
           <a:solidFill>
-            <a:srgbClr val="CCFBF1"/>
+            <a:srgbClr val="DDD6FE"/>
           </a:solidFill>
           <a:ln w="19050">
             <a:solidFill>
-              <a:srgbClr val="0D9488"/>
+              <a:srgbClr val="7C3AED"/>
             </a:solidFill>
             <a:prstDash val="solid"/>
           </a:ln>
@@ -26460,13 +27534,13 @@
             <a:r>
               <a:rPr lang="en-US" sz="1300" b="1" dirty="0">
                 <a:solidFill>
-                  <a:srgbClr val="0F766E"/>
+                  <a:srgbClr val="4C1D95"/>
                 </a:solidFill>
                 <a:latin typeface="Trebuchet MS" pitchFamily="34" charset="0"/>
                 <a:ea typeface="Trebuchet MS" pitchFamily="34" charset="-122"/>
                 <a:cs typeface="Trebuchet MS" pitchFamily="34" charset="-120"/>
               </a:rPr>
-              <a:t>report</a:t>
+              <a:t>re</a:t>
             </a:r>
             <a:endParaRPr lang="en-US" sz="1300" dirty="0"/>
           </a:p>
@@ -26505,7 +27579,7 @@
                 <a:ea typeface="Calibri" pitchFamily="34" charset="-122"/>
                 <a:cs typeface="Calibri" pitchFamily="34" charset="-120"/>
               </a:rPr>
-              <a:t>to carry back, to tell</a:t>
+              <a:t>again, back</a:t>
             </a:r>
             <a:endParaRPr lang="en-US" sz="850" dirty="0"/>
           </a:p>
@@ -26578,7 +27652,7 @@
                 <a:ea typeface="Trebuchet MS" pitchFamily="34" charset="-122"/>
                 <a:cs typeface="Trebuchet MS" pitchFamily="34" charset="-120"/>
               </a:rPr>
-              <a:t>ed</a:t>
+              <a:t>port</a:t>
             </a:r>
             <a:endParaRPr lang="en-US" sz="1300" dirty="0"/>
           </a:p>
@@ -26617,7 +27691,7 @@
                 <a:ea typeface="Calibri" pitchFamily="34" charset="-122"/>
                 <a:cs typeface="Calibri" pitchFamily="34" charset="-120"/>
               </a:rPr>
-              <a:t>happened in the past</a:t>
+              <a:t>carry, bring</a:t>
             </a:r>
             <a:endParaRPr lang="en-US" sz="850" dirty="0"/>
           </a:p>
@@ -26724,8 +27798,8 @@
         </p:nvSpPr>
         <p:spPr>
           <a:xfrm>
-            <a:off x="1975104" y="3364992"/>
-            <a:ext cx="1554480" cy="475488"/>
+            <a:off x="2313432" y="3364992"/>
+            <a:ext cx="1645920" cy="475488"/>
           </a:xfrm>
           <a:prstGeom prst="rect">
             <a:avLst>
@@ -26751,8 +27825,8 @@
         </p:nvSpPr>
         <p:spPr>
           <a:xfrm>
-            <a:off x="1975104" y="3364992"/>
-            <a:ext cx="1554480" cy="475488"/>
+            <a:off x="2313432" y="3364992"/>
+            <a:ext cx="1645920" cy="475488"/>
           </a:xfrm>
           <a:prstGeom prst="rect">
             <a:avLst/>
@@ -26776,7 +27850,7 @@
                 <a:ea typeface="Trebuchet MS" pitchFamily="34" charset="-122"/>
                 <a:cs typeface="Trebuchet MS" pitchFamily="34" charset="-120"/>
               </a:rPr>
-              <a:t>un</a:t>
+              <a:t>mis</a:t>
             </a:r>
             <a:endParaRPr lang="en-US" sz="1400" dirty="0"/>
           </a:p>
@@ -26790,8 +27864,8 @@
         </p:nvSpPr>
         <p:spPr>
           <a:xfrm>
-            <a:off x="3529584" y="3364992"/>
-            <a:ext cx="73152" cy="475488"/>
+            <a:off x="3959352" y="3364992"/>
+            <a:ext cx="411480" cy="475488"/>
           </a:xfrm>
           <a:prstGeom prst="rect">
             <a:avLst/>
@@ -26829,8 +27903,8 @@
         </p:nvSpPr>
         <p:spPr>
           <a:xfrm>
-            <a:off x="3602736" y="3364992"/>
-            <a:ext cx="1554480" cy="475488"/>
+            <a:off x="4370832" y="3364992"/>
+            <a:ext cx="1645920" cy="475488"/>
           </a:xfrm>
           <a:prstGeom prst="rect">
             <a:avLst>
@@ -26856,8 +27930,8 @@
         </p:nvSpPr>
         <p:spPr>
           <a:xfrm>
-            <a:off x="3602736" y="3364992"/>
-            <a:ext cx="1554480" cy="475488"/>
+            <a:off x="4370832" y="3364992"/>
+            <a:ext cx="1645920" cy="475488"/>
           </a:xfrm>
           <a:prstGeom prst="rect">
             <a:avLst/>
@@ -26895,8 +27969,8 @@
         </p:nvSpPr>
         <p:spPr>
           <a:xfrm>
-            <a:off x="5157216" y="3364992"/>
-            <a:ext cx="73152" cy="475488"/>
+            <a:off x="6016752" y="3364992"/>
+            <a:ext cx="411480" cy="475488"/>
           </a:xfrm>
           <a:prstGeom prst="rect">
             <a:avLst/>
@@ -26934,8 +28008,8 @@
         </p:nvSpPr>
         <p:spPr>
           <a:xfrm>
-            <a:off x="5230368" y="3364992"/>
-            <a:ext cx="1554480" cy="475488"/>
+            <a:off x="6428232" y="3364992"/>
+            <a:ext cx="1645920" cy="475488"/>
           </a:xfrm>
           <a:prstGeom prst="rect">
             <a:avLst>
@@ -26961,8 +28035,8 @@
         </p:nvSpPr>
         <p:spPr>
           <a:xfrm>
-            <a:off x="5230368" y="3364992"/>
-            <a:ext cx="1554480" cy="475488"/>
+            <a:off x="6428232" y="3364992"/>
+            <a:ext cx="1645920" cy="475488"/>
           </a:xfrm>
           <a:prstGeom prst="rect">
             <a:avLst/>
@@ -26986,7 +28060,7 @@
                 <a:ea typeface="Trebuchet MS" pitchFamily="34" charset="-122"/>
                 <a:cs typeface="Trebuchet MS" pitchFamily="34" charset="-120"/>
               </a:rPr>
-              <a:t>por</a:t>
+              <a:t>port</a:t>
             </a:r>
             <a:endParaRPr lang="en-US" sz="1400" dirty="0"/>
           </a:p>
@@ -26994,119 +28068,80 @@
       </p:sp>
       <p:sp>
         <p:nvSpPr>
-          <p:cNvPr id="36" name="Text 34"/>
-          <p:cNvSpPr/>
-          <p:nvPr/>
-        </p:nvSpPr>
-        <p:spPr>
-          <a:xfrm>
-            <a:off x="6784848" y="3364992"/>
-            <a:ext cx="73152" cy="475488"/>
-          </a:xfrm>
-          <a:prstGeom prst="rect">
-            <a:avLst/>
-          </a:prstGeom>
-          <a:noFill/>
-          <a:ln/>
-        </p:spPr>
-        <p:txBody>
-          <a:bodyPr wrap="square" lIns="0" tIns="0" rIns="0" bIns="0" rtlCol="0" anchor="ctr"/>
-          <a:lstStyle/>
-          <a:p>
-            <a:pPr algn="ctr" indent="0" marL="0">
-              <a:buNone/>
-            </a:pPr>
-            <a:r>
-              <a:rPr lang="en-US" sz="1600" b="1" dirty="0">
-                <a:solidFill>
-                  <a:srgbClr val="0D9488"/>
+          <p:cNvPr id="36" name="Shape 34"/>
+          <p:cNvSpPr/>
+          <p:nvPr/>
+        </p:nvSpPr>
+        <p:spPr>
+          <a:xfrm>
+            <a:off x="365760" y="4096512"/>
+            <a:ext cx="1371600" cy="804672"/>
+          </a:xfrm>
+          <a:prstGeom prst="rect">
+            <a:avLst>
+              <a:gd name="adj" fmla="val 6818"/>
+            </a:avLst>
+          </a:prstGeom>
+          <a:solidFill>
+            <a:srgbClr val="E2E8F0"/>
+          </a:solidFill>
+          <a:ln w="12700">
+            <a:solidFill>
+              <a:srgbClr val="E2E8F0"/>
+            </a:solidFill>
+            <a:prstDash val="solid"/>
+          </a:ln>
+        </p:spPr>
+      </p:sp>
+      <p:sp>
+        <p:nvSpPr>
+          <p:cNvPr id="37" name="Text 35"/>
+          <p:cNvSpPr/>
+          <p:nvPr/>
+        </p:nvSpPr>
+        <p:spPr>
+          <a:xfrm>
+            <a:off x="365760" y="4096512"/>
+            <a:ext cx="1371600" cy="804672"/>
+          </a:xfrm>
+          <a:prstGeom prst="rect">
+            <a:avLst/>
+          </a:prstGeom>
+          <a:noFill/>
+          <a:ln/>
+        </p:spPr>
+        <p:txBody>
+          <a:bodyPr wrap="square" lIns="0" tIns="0" rIns="0" bIns="0" rtlCol="0" anchor="ctr"/>
+          <a:lstStyle/>
+          <a:p>
+            <a:pPr algn="ctr" indent="0" marL="0">
+              <a:buNone/>
+            </a:pPr>
+            <a:r>
+              <a:rPr lang="en-US" sz="1100" b="1" dirty="0">
+                <a:solidFill>
+                  <a:srgbClr val="475569"/>
                 </a:solidFill>
                 <a:latin typeface="Trebuchet MS" pitchFamily="34" charset="0"/>
                 <a:ea typeface="Trebuchet MS" pitchFamily="34" charset="-122"/>
                 <a:cs typeface="Trebuchet MS" pitchFamily="34" charset="-120"/>
               </a:rPr>
-              <a:t>·</a:t>
-            </a:r>
-            <a:endParaRPr lang="en-US" sz="1600" dirty="0"/>
-          </a:p>
-        </p:txBody>
-      </p:sp>
-      <p:sp>
-        <p:nvSpPr>
-          <p:cNvPr id="37" name="Shape 35"/>
-          <p:cNvSpPr/>
-          <p:nvPr/>
-        </p:nvSpPr>
-        <p:spPr>
-          <a:xfrm>
-            <a:off x="6858000" y="3364992"/>
-            <a:ext cx="1554480" cy="475488"/>
-          </a:xfrm>
-          <a:prstGeom prst="rect">
-            <a:avLst>
-              <a:gd name="adj" fmla="val 9615"/>
-            </a:avLst>
-          </a:prstGeom>
-          <a:solidFill>
-            <a:srgbClr val="FFFFFF"/>
-          </a:solidFill>
-          <a:ln w="12700">
-            <a:solidFill>
-              <a:srgbClr val="0D9488"/>
-            </a:solidFill>
-            <a:prstDash val="solid"/>
-          </a:ln>
-        </p:spPr>
-      </p:sp>
-      <p:sp>
-        <p:nvSpPr>
-          <p:cNvPr id="38" name="Text 36"/>
-          <p:cNvSpPr/>
-          <p:nvPr/>
-        </p:nvSpPr>
-        <p:spPr>
-          <a:xfrm>
-            <a:off x="6858000" y="3364992"/>
-            <a:ext cx="1554480" cy="475488"/>
-          </a:xfrm>
-          <a:prstGeom prst="rect">
-            <a:avLst/>
-          </a:prstGeom>
-          <a:noFill/>
-          <a:ln/>
-        </p:spPr>
-        <p:txBody>
-          <a:bodyPr wrap="square" lIns="0" tIns="0" rIns="0" bIns="0" rtlCol="0" anchor="ctr"/>
-          <a:lstStyle/>
-          <a:p>
-            <a:pPr algn="ctr" indent="0" marL="0">
-              <a:buNone/>
-            </a:pPr>
-            <a:r>
-              <a:rPr lang="en-US" sz="1400" b="1" dirty="0">
-                <a:solidFill>
-                  <a:srgbClr val="0D9488"/>
-                </a:solidFill>
-                <a:latin typeface="Trebuchet MS" pitchFamily="34" charset="0"/>
-                <a:ea typeface="Trebuchet MS" pitchFamily="34" charset="-122"/>
-                <a:cs typeface="Trebuchet MS" pitchFamily="34" charset="-120"/>
-              </a:rPr>
-              <a:t>ted</a:t>
-            </a:r>
-            <a:endParaRPr lang="en-US" sz="1400" dirty="0"/>
-          </a:p>
-        </p:txBody>
-      </p:sp>
-      <p:sp>
-        <p:nvSpPr>
-          <p:cNvPr id="39" name="Shape 37"/>
-          <p:cNvSpPr/>
-          <p:nvPr/>
-        </p:nvSpPr>
-        <p:spPr>
-          <a:xfrm>
-            <a:off x="365760" y="4096512"/>
-            <a:ext cx="1371600" cy="804672"/>
+              <a:t>Phonemes</a:t>
+            </a:r>
+            <a:endParaRPr lang="en-US" sz="1100" dirty="0"/>
+          </a:p>
+        </p:txBody>
+      </p:sp>
+      <p:sp>
+        <p:nvSpPr>
+          <p:cNvPr id="38" name="Shape 36"/>
+          <p:cNvSpPr/>
+          <p:nvPr/>
+        </p:nvSpPr>
+        <p:spPr>
+          <a:xfrm>
+            <a:off x="1874520" y="4096512"/>
+            <a:ext cx="6903720" cy="804672"/>
           </a:xfrm>
           <a:prstGeom prst="rect">
             <a:avLst>
@@ -27114,85 +28149,19 @@
             </a:avLst>
           </a:prstGeom>
           <a:solidFill>
-            <a:srgbClr val="E2E8F0"/>
+            <a:srgbClr val="F8FAFC"/>
           </a:solidFill>
           <a:ln w="12700">
             <a:solidFill>
               <a:srgbClr val="E2E8F0"/>
             </a:solidFill>
-            <a:prstDash val="solid"/>
-          </a:ln>
-        </p:spPr>
-      </p:sp>
-      <p:sp>
-        <p:nvSpPr>
-          <p:cNvPr id="40" name="Text 38"/>
-          <p:cNvSpPr/>
-          <p:nvPr/>
-        </p:nvSpPr>
-        <p:spPr>
-          <a:xfrm>
-            <a:off x="365760" y="4096512"/>
-            <a:ext cx="1371600" cy="804672"/>
-          </a:xfrm>
-          <a:prstGeom prst="rect">
-            <a:avLst/>
-          </a:prstGeom>
-          <a:noFill/>
-          <a:ln/>
-        </p:spPr>
-        <p:txBody>
-          <a:bodyPr wrap="square" lIns="0" tIns="0" rIns="0" bIns="0" rtlCol="0" anchor="ctr"/>
-          <a:lstStyle/>
-          <a:p>
-            <a:pPr algn="ctr" indent="0" marL="0">
-              <a:buNone/>
-            </a:pPr>
-            <a:r>
-              <a:rPr lang="en-US" sz="1100" b="1" dirty="0">
-                <a:solidFill>
-                  <a:srgbClr val="475569"/>
-                </a:solidFill>
-                <a:latin typeface="Trebuchet MS" pitchFamily="34" charset="0"/>
-                <a:ea typeface="Trebuchet MS" pitchFamily="34" charset="-122"/>
-                <a:cs typeface="Trebuchet MS" pitchFamily="34" charset="-120"/>
-              </a:rPr>
-              <a:t>Phonemes</a:t>
-            </a:r>
-            <a:endParaRPr lang="en-US" sz="1100" dirty="0"/>
-          </a:p>
-        </p:txBody>
-      </p:sp>
-      <p:sp>
-        <p:nvSpPr>
-          <p:cNvPr id="41" name="Shape 39"/>
-          <p:cNvSpPr/>
-          <p:nvPr/>
-        </p:nvSpPr>
-        <p:spPr>
-          <a:xfrm>
-            <a:off x="1874520" y="4096512"/>
-            <a:ext cx="6903720" cy="804672"/>
-          </a:xfrm>
-          <a:prstGeom prst="rect">
-            <a:avLst>
-              <a:gd name="adj" fmla="val 6818"/>
-            </a:avLst>
-          </a:prstGeom>
-          <a:solidFill>
-            <a:srgbClr val="F8FAFC"/>
-          </a:solidFill>
-          <a:ln w="12700">
-            <a:solidFill>
-              <a:srgbClr val="E2E8F0"/>
-            </a:solidFill>
             <a:prstDash val="dash"/>
           </a:ln>
         </p:spPr>
       </p:sp>
       <p:sp>
         <p:nvSpPr>
-          <p:cNvPr id="42" name="Text 40"/>
+          <p:cNvPr id="39" name="Text 37"/>
           <p:cNvSpPr/>
           <p:nvPr/>
         </p:nvSpPr>
@@ -27654,7 +28623,7 @@
                 <a:ea typeface="Trebuchet MS" pitchFamily="34" charset="-122"/>
                 <a:cs typeface="Trebuchet MS" pitchFamily="34" charset="-120"/>
               </a:rPr>
-              <a:t>unreported</a:t>
+              <a:t>misreport</a:t>
             </a:r>
             <a:endParaRPr lang="en-US" sz="2800" dirty="0"/>
           </a:p>
@@ -27793,7 +28762,7 @@
                 <a:ea typeface="Trebuchet MS" pitchFamily="34" charset="-122"/>
                 <a:cs typeface="Trebuchet MS" pitchFamily="34" charset="-120"/>
               </a:rPr>
-              <a:t>un</a:t>
+              <a:t>mis</a:t>
             </a:r>
             <a:endParaRPr lang="en-US" sz="1300" dirty="0"/>
           </a:p>
@@ -27832,7 +28801,7 @@
                 <a:ea typeface="Calibri" pitchFamily="34" charset="-122"/>
                 <a:cs typeface="Calibri" pitchFamily="34" charset="-120"/>
               </a:rPr>
-              <a:t>not</a:t>
+              <a:t>wrongly, badly</a:t>
             </a:r>
             <a:endParaRPr lang="en-US" sz="850" dirty="0"/>
           </a:p>
@@ -27855,11 +28824,11 @@
             </a:avLst>
           </a:prstGeom>
           <a:solidFill>
-            <a:srgbClr val="CCFBF1"/>
+            <a:srgbClr val="DDD6FE"/>
           </a:solidFill>
           <a:ln w="19050">
             <a:solidFill>
-              <a:srgbClr val="0D9488"/>
+              <a:srgbClr val="7C3AED"/>
             </a:solidFill>
             <a:prstDash val="solid"/>
           </a:ln>
@@ -27899,13 +28868,13 @@
             <a:r>
               <a:rPr lang="en-US" sz="1300" b="1" dirty="0">
                 <a:solidFill>
-                  <a:srgbClr val="0F766E"/>
+                  <a:srgbClr val="4C1D95"/>
                 </a:solidFill>
                 <a:latin typeface="Trebuchet MS" pitchFamily="34" charset="0"/>
                 <a:ea typeface="Trebuchet MS" pitchFamily="34" charset="-122"/>
                 <a:cs typeface="Trebuchet MS" pitchFamily="34" charset="-120"/>
               </a:rPr>
-              <a:t>report</a:t>
+              <a:t>re</a:t>
             </a:r>
             <a:endParaRPr lang="en-US" sz="1300" dirty="0"/>
           </a:p>
@@ -27944,7 +28913,7 @@
                 <a:ea typeface="Calibri" pitchFamily="34" charset="-122"/>
                 <a:cs typeface="Calibri" pitchFamily="34" charset="-120"/>
               </a:rPr>
-              <a:t>to carry back, to tell</a:t>
+              <a:t>again, back</a:t>
             </a:r>
             <a:endParaRPr lang="en-US" sz="850" dirty="0"/>
           </a:p>
@@ -28017,7 +28986,7 @@
                 <a:ea typeface="Trebuchet MS" pitchFamily="34" charset="-122"/>
                 <a:cs typeface="Trebuchet MS" pitchFamily="34" charset="-120"/>
               </a:rPr>
-              <a:t>ed</a:t>
+              <a:t>port</a:t>
             </a:r>
             <a:endParaRPr lang="en-US" sz="1300" dirty="0"/>
           </a:p>
@@ -28056,7 +29025,7 @@
                 <a:ea typeface="Calibri" pitchFamily="34" charset="-122"/>
                 <a:cs typeface="Calibri" pitchFamily="34" charset="-120"/>
               </a:rPr>
-              <a:t>happened in the past</a:t>
+              <a:t>carry, bring</a:t>
             </a:r>
             <a:endParaRPr lang="en-US" sz="850" dirty="0"/>
           </a:p>
@@ -28163,8 +29132,8 @@
         </p:nvSpPr>
         <p:spPr>
           <a:xfrm>
-            <a:off x="1975104" y="3364992"/>
-            <a:ext cx="1554480" cy="475488"/>
+            <a:off x="2313432" y="3364992"/>
+            <a:ext cx="1645920" cy="475488"/>
           </a:xfrm>
           <a:prstGeom prst="rect">
             <a:avLst>
@@ -28190,8 +29159,8 @@
         </p:nvSpPr>
         <p:spPr>
           <a:xfrm>
-            <a:off x="1975104" y="3364992"/>
-            <a:ext cx="1554480" cy="475488"/>
+            <a:off x="2313432" y="3364992"/>
+            <a:ext cx="1645920" cy="475488"/>
           </a:xfrm>
           <a:prstGeom prst="rect">
             <a:avLst/>
@@ -28215,7 +29184,7 @@
                 <a:ea typeface="Trebuchet MS" pitchFamily="34" charset="-122"/>
                 <a:cs typeface="Trebuchet MS" pitchFamily="34" charset="-120"/>
               </a:rPr>
-              <a:t>un</a:t>
+              <a:t>mis</a:t>
             </a:r>
             <a:endParaRPr lang="en-US" sz="1400" dirty="0"/>
           </a:p>
@@ -28229,8 +29198,8 @@
         </p:nvSpPr>
         <p:spPr>
           <a:xfrm>
-            <a:off x="3529584" y="3364992"/>
-            <a:ext cx="73152" cy="475488"/>
+            <a:off x="3959352" y="3364992"/>
+            <a:ext cx="411480" cy="475488"/>
           </a:xfrm>
           <a:prstGeom prst="rect">
             <a:avLst/>
@@ -28268,8 +29237,8 @@
         </p:nvSpPr>
         <p:spPr>
           <a:xfrm>
-            <a:off x="3602736" y="3364992"/>
-            <a:ext cx="1554480" cy="475488"/>
+            <a:off x="4370832" y="3364992"/>
+            <a:ext cx="1645920" cy="475488"/>
           </a:xfrm>
           <a:prstGeom prst="rect">
             <a:avLst>
@@ -28295,8 +29264,8 @@
         </p:nvSpPr>
         <p:spPr>
           <a:xfrm>
-            <a:off x="3602736" y="3364992"/>
-            <a:ext cx="1554480" cy="475488"/>
+            <a:off x="4370832" y="3364992"/>
+            <a:ext cx="1645920" cy="475488"/>
           </a:xfrm>
           <a:prstGeom prst="rect">
             <a:avLst/>
@@ -28334,8 +29303,8 @@
         </p:nvSpPr>
         <p:spPr>
           <a:xfrm>
-            <a:off x="5157216" y="3364992"/>
-            <a:ext cx="73152" cy="475488"/>
+            <a:off x="6016752" y="3364992"/>
+            <a:ext cx="411480" cy="475488"/>
           </a:xfrm>
           <a:prstGeom prst="rect">
             <a:avLst/>
@@ -28373,8 +29342,8 @@
         </p:nvSpPr>
         <p:spPr>
           <a:xfrm>
-            <a:off x="5230368" y="3364992"/>
-            <a:ext cx="1554480" cy="475488"/>
+            <a:off x="6428232" y="3364992"/>
+            <a:ext cx="1645920" cy="475488"/>
           </a:xfrm>
           <a:prstGeom prst="rect">
             <a:avLst>
@@ -28400,8 +29369,8 @@
         </p:nvSpPr>
         <p:spPr>
           <a:xfrm>
-            <a:off x="5230368" y="3364992"/>
-            <a:ext cx="1554480" cy="475488"/>
+            <a:off x="6428232" y="3364992"/>
+            <a:ext cx="1645920" cy="475488"/>
           </a:xfrm>
           <a:prstGeom prst="rect">
             <a:avLst/>
@@ -28425,7 +29394,7 @@
                 <a:ea typeface="Trebuchet MS" pitchFamily="34" charset="-122"/>
                 <a:cs typeface="Trebuchet MS" pitchFamily="34" charset="-120"/>
               </a:rPr>
-              <a:t>por</a:t>
+              <a:t>port</a:t>
             </a:r>
             <a:endParaRPr lang="en-US" sz="1400" dirty="0"/>
           </a:p>
@@ -28433,211 +29402,238 @@
       </p:sp>
       <p:sp>
         <p:nvSpPr>
-          <p:cNvPr id="36" name="Text 34"/>
-          <p:cNvSpPr/>
-          <p:nvPr/>
-        </p:nvSpPr>
-        <p:spPr>
-          <a:xfrm>
-            <a:off x="6784848" y="3364992"/>
-            <a:ext cx="73152" cy="475488"/>
-          </a:xfrm>
-          <a:prstGeom prst="rect">
-            <a:avLst/>
-          </a:prstGeom>
-          <a:noFill/>
-          <a:ln/>
-        </p:spPr>
-        <p:txBody>
-          <a:bodyPr wrap="square" lIns="0" tIns="0" rIns="0" bIns="0" rtlCol="0" anchor="ctr"/>
-          <a:lstStyle/>
-          <a:p>
-            <a:pPr algn="ctr" indent="0" marL="0">
-              <a:buNone/>
-            </a:pPr>
-            <a:r>
-              <a:rPr lang="en-US" sz="1600" b="1" dirty="0">
-                <a:solidFill>
-                  <a:srgbClr val="0D9488"/>
+          <p:cNvPr id="36" name="Shape 34"/>
+          <p:cNvSpPr/>
+          <p:nvPr/>
+        </p:nvSpPr>
+        <p:spPr>
+          <a:xfrm>
+            <a:off x="365760" y="4096512"/>
+            <a:ext cx="1371600" cy="804672"/>
+          </a:xfrm>
+          <a:prstGeom prst="rect">
+            <a:avLst>
+              <a:gd name="adj" fmla="val 6818"/>
+            </a:avLst>
+          </a:prstGeom>
+          <a:solidFill>
+            <a:srgbClr val="E2E8F0"/>
+          </a:solidFill>
+          <a:ln w="12700">
+            <a:solidFill>
+              <a:srgbClr val="E2E8F0"/>
+            </a:solidFill>
+            <a:prstDash val="solid"/>
+          </a:ln>
+        </p:spPr>
+      </p:sp>
+      <p:sp>
+        <p:nvSpPr>
+          <p:cNvPr id="37" name="Text 35"/>
+          <p:cNvSpPr/>
+          <p:nvPr/>
+        </p:nvSpPr>
+        <p:spPr>
+          <a:xfrm>
+            <a:off x="365760" y="4096512"/>
+            <a:ext cx="1371600" cy="804672"/>
+          </a:xfrm>
+          <a:prstGeom prst="rect">
+            <a:avLst/>
+          </a:prstGeom>
+          <a:noFill/>
+          <a:ln/>
+        </p:spPr>
+        <p:txBody>
+          <a:bodyPr wrap="square" lIns="0" tIns="0" rIns="0" bIns="0" rtlCol="0" anchor="ctr"/>
+          <a:lstStyle/>
+          <a:p>
+            <a:pPr algn="ctr" indent="0" marL="0">
+              <a:buNone/>
+            </a:pPr>
+            <a:r>
+              <a:rPr lang="en-US" sz="1100" b="1" dirty="0">
+                <a:solidFill>
+                  <a:srgbClr val="475569"/>
                 </a:solidFill>
                 <a:latin typeface="Trebuchet MS" pitchFamily="34" charset="0"/>
                 <a:ea typeface="Trebuchet MS" pitchFamily="34" charset="-122"/>
                 <a:cs typeface="Trebuchet MS" pitchFamily="34" charset="-120"/>
               </a:rPr>
-              <a:t>·</a:t>
-            </a:r>
-            <a:endParaRPr lang="en-US" sz="1600" dirty="0"/>
-          </a:p>
-        </p:txBody>
-      </p:sp>
-      <p:sp>
-        <p:nvSpPr>
-          <p:cNvPr id="37" name="Shape 35"/>
-          <p:cNvSpPr/>
-          <p:nvPr/>
-        </p:nvSpPr>
-        <p:spPr>
-          <a:xfrm>
-            <a:off x="6858000" y="3364992"/>
-            <a:ext cx="1554480" cy="475488"/>
+              <a:t>Phonemes</a:t>
+            </a:r>
+            <a:endParaRPr lang="en-US" sz="1100" dirty="0"/>
+          </a:p>
+        </p:txBody>
+      </p:sp>
+      <p:sp>
+        <p:nvSpPr>
+          <p:cNvPr id="38" name="Shape 36"/>
+          <p:cNvSpPr/>
+          <p:nvPr/>
+        </p:nvSpPr>
+        <p:spPr>
+          <a:xfrm>
+            <a:off x="1874520" y="4096512"/>
+            <a:ext cx="6903720" cy="658368"/>
           </a:xfrm>
           <a:prstGeom prst="rect">
             <a:avLst>
-              <a:gd name="adj" fmla="val 9615"/>
+              <a:gd name="adj" fmla="val 8333"/>
             </a:avLst>
           </a:prstGeom>
           <a:solidFill>
+            <a:srgbClr val="FCE7F3"/>
+          </a:solidFill>
+          <a:ln w="12700">
+            <a:solidFill>
+              <a:srgbClr val="DB2777"/>
+            </a:solidFill>
+            <a:prstDash val="solid"/>
+          </a:ln>
+        </p:spPr>
+      </p:sp>
+      <p:sp>
+        <p:nvSpPr>
+          <p:cNvPr id="39" name="Shape 37"/>
+          <p:cNvSpPr/>
+          <p:nvPr/>
+        </p:nvSpPr>
+        <p:spPr>
+          <a:xfrm>
+            <a:off x="2023872" y="4169664"/>
+            <a:ext cx="685800" cy="475488"/>
+          </a:xfrm>
+          <a:prstGeom prst="rect">
+            <a:avLst>
+              <a:gd name="adj" fmla="val 7692"/>
+            </a:avLst>
+          </a:prstGeom>
+          <a:solidFill>
             <a:srgbClr val="FFFFFF"/>
           </a:solidFill>
           <a:ln w="12700">
             <a:solidFill>
-              <a:srgbClr val="0D9488"/>
-            </a:solidFill>
-            <a:prstDash val="solid"/>
-          </a:ln>
-        </p:spPr>
-      </p:sp>
-      <p:sp>
-        <p:nvSpPr>
-          <p:cNvPr id="38" name="Text 36"/>
-          <p:cNvSpPr/>
-          <p:nvPr/>
-        </p:nvSpPr>
-        <p:spPr>
-          <a:xfrm>
-            <a:off x="6858000" y="3364992"/>
-            <a:ext cx="1554480" cy="475488"/>
-          </a:xfrm>
-          <a:prstGeom prst="rect">
-            <a:avLst/>
-          </a:prstGeom>
-          <a:noFill/>
-          <a:ln/>
-        </p:spPr>
-        <p:txBody>
-          <a:bodyPr wrap="square" lIns="0" tIns="0" rIns="0" bIns="0" rtlCol="0" anchor="ctr"/>
-          <a:lstStyle/>
-          <a:p>
-            <a:pPr algn="ctr" indent="0" marL="0">
-              <a:buNone/>
-            </a:pPr>
-            <a:r>
-              <a:rPr lang="en-US" sz="1400" b="1" dirty="0">
-                <a:solidFill>
-                  <a:srgbClr val="0D9488"/>
+              <a:srgbClr val="DB2777"/>
+            </a:solidFill>
+            <a:prstDash val="solid"/>
+          </a:ln>
+        </p:spPr>
+      </p:sp>
+      <p:sp>
+        <p:nvSpPr>
+          <p:cNvPr id="40" name="Text 38"/>
+          <p:cNvSpPr/>
+          <p:nvPr/>
+        </p:nvSpPr>
+        <p:spPr>
+          <a:xfrm>
+            <a:off x="2023872" y="4169664"/>
+            <a:ext cx="685800" cy="475488"/>
+          </a:xfrm>
+          <a:prstGeom prst="rect">
+            <a:avLst/>
+          </a:prstGeom>
+          <a:noFill/>
+          <a:ln/>
+        </p:spPr>
+        <p:txBody>
+          <a:bodyPr wrap="square" lIns="0" tIns="0" rIns="0" bIns="0" rtlCol="0" anchor="ctr"/>
+          <a:lstStyle/>
+          <a:p>
+            <a:pPr algn="ctr" indent="0" marL="0">
+              <a:buNone/>
+            </a:pPr>
+            <a:r>
+              <a:rPr lang="en-US" sz="900" b="1" dirty="0">
+                <a:solidFill>
+                  <a:srgbClr val="9D174D"/>
                 </a:solidFill>
                 <a:latin typeface="Trebuchet MS" pitchFamily="34" charset="0"/>
                 <a:ea typeface="Trebuchet MS" pitchFamily="34" charset="-122"/>
                 <a:cs typeface="Trebuchet MS" pitchFamily="34" charset="-120"/>
               </a:rPr>
-              <a:t>ted</a:t>
-            </a:r>
-            <a:endParaRPr lang="en-US" sz="1400" dirty="0"/>
-          </a:p>
-        </p:txBody>
-      </p:sp>
-      <p:sp>
-        <p:nvSpPr>
-          <p:cNvPr id="39" name="Shape 37"/>
-          <p:cNvSpPr/>
-          <p:nvPr/>
-        </p:nvSpPr>
-        <p:spPr>
-          <a:xfrm>
-            <a:off x="365760" y="4096512"/>
-            <a:ext cx="1371600" cy="804672"/>
+              <a:t>m</a:t>
+            </a:r>
+            <a:endParaRPr lang="en-US" sz="900" dirty="0"/>
+          </a:p>
+        </p:txBody>
+      </p:sp>
+      <p:sp>
+        <p:nvSpPr>
+          <p:cNvPr id="41" name="Shape 39"/>
+          <p:cNvSpPr/>
+          <p:nvPr/>
+        </p:nvSpPr>
+        <p:spPr>
+          <a:xfrm>
+            <a:off x="2831592" y="4169664"/>
+            <a:ext cx="685800" cy="475488"/>
           </a:xfrm>
           <a:prstGeom prst="rect">
             <a:avLst>
-              <a:gd name="adj" fmla="val 6818"/>
+              <a:gd name="adj" fmla="val 7692"/>
             </a:avLst>
           </a:prstGeom>
           <a:solidFill>
-            <a:srgbClr val="E2E8F0"/>
-          </a:solidFill>
-          <a:ln w="12700">
-            <a:solidFill>
-              <a:srgbClr val="E2E8F0"/>
-            </a:solidFill>
-            <a:prstDash val="solid"/>
-          </a:ln>
-        </p:spPr>
-      </p:sp>
-      <p:sp>
-        <p:nvSpPr>
-          <p:cNvPr id="40" name="Text 38"/>
-          <p:cNvSpPr/>
-          <p:nvPr/>
-        </p:nvSpPr>
-        <p:spPr>
-          <a:xfrm>
-            <a:off x="365760" y="4096512"/>
-            <a:ext cx="1371600" cy="804672"/>
-          </a:xfrm>
-          <a:prstGeom prst="rect">
-            <a:avLst/>
-          </a:prstGeom>
-          <a:noFill/>
-          <a:ln/>
-        </p:spPr>
-        <p:txBody>
-          <a:bodyPr wrap="square" lIns="0" tIns="0" rIns="0" bIns="0" rtlCol="0" anchor="ctr"/>
-          <a:lstStyle/>
-          <a:p>
-            <a:pPr algn="ctr" indent="0" marL="0">
-              <a:buNone/>
-            </a:pPr>
-            <a:r>
-              <a:rPr lang="en-US" sz="1100" b="1" dirty="0">
-                <a:solidFill>
-                  <a:srgbClr val="475569"/>
+            <a:srgbClr val="FFFFFF"/>
+          </a:solidFill>
+          <a:ln w="12700">
+            <a:solidFill>
+              <a:srgbClr val="DB2777"/>
+            </a:solidFill>
+            <a:prstDash val="solid"/>
+          </a:ln>
+        </p:spPr>
+      </p:sp>
+      <p:sp>
+        <p:nvSpPr>
+          <p:cNvPr id="42" name="Text 40"/>
+          <p:cNvSpPr/>
+          <p:nvPr/>
+        </p:nvSpPr>
+        <p:spPr>
+          <a:xfrm>
+            <a:off x="2831592" y="4169664"/>
+            <a:ext cx="685800" cy="475488"/>
+          </a:xfrm>
+          <a:prstGeom prst="rect">
+            <a:avLst/>
+          </a:prstGeom>
+          <a:noFill/>
+          <a:ln/>
+        </p:spPr>
+        <p:txBody>
+          <a:bodyPr wrap="square" lIns="0" tIns="0" rIns="0" bIns="0" rtlCol="0" anchor="ctr"/>
+          <a:lstStyle/>
+          <a:p>
+            <a:pPr algn="ctr" indent="0" marL="0">
+              <a:buNone/>
+            </a:pPr>
+            <a:r>
+              <a:rPr lang="en-US" sz="900" b="1" dirty="0">
+                <a:solidFill>
+                  <a:srgbClr val="9D174D"/>
                 </a:solidFill>
                 <a:latin typeface="Trebuchet MS" pitchFamily="34" charset="0"/>
                 <a:ea typeface="Trebuchet MS" pitchFamily="34" charset="-122"/>
                 <a:cs typeface="Trebuchet MS" pitchFamily="34" charset="-120"/>
               </a:rPr>
-              <a:t>Phonemes</a:t>
-            </a:r>
-            <a:endParaRPr lang="en-US" sz="1100" dirty="0"/>
-          </a:p>
-        </p:txBody>
-      </p:sp>
-      <p:sp>
-        <p:nvSpPr>
-          <p:cNvPr id="41" name="Shape 39"/>
-          <p:cNvSpPr/>
-          <p:nvPr/>
-        </p:nvSpPr>
-        <p:spPr>
-          <a:xfrm>
-            <a:off x="1874520" y="4096512"/>
-            <a:ext cx="6903720" cy="658368"/>
-          </a:xfrm>
-          <a:prstGeom prst="rect">
-            <a:avLst>
-              <a:gd name="adj" fmla="val 8333"/>
-            </a:avLst>
-          </a:prstGeom>
-          <a:solidFill>
-            <a:srgbClr val="FCE7F3"/>
-          </a:solidFill>
-          <a:ln w="12700">
-            <a:solidFill>
-              <a:srgbClr val="DB2777"/>
-            </a:solidFill>
-            <a:prstDash val="solid"/>
-          </a:ln>
-        </p:spPr>
-      </p:sp>
-      <p:sp>
-        <p:nvSpPr>
-          <p:cNvPr id="42" name="Shape 40"/>
-          <p:cNvSpPr/>
-          <p:nvPr/>
-        </p:nvSpPr>
-        <p:spPr>
-          <a:xfrm>
-            <a:off x="2023872" y="4169664"/>
+              <a:t>i</a:t>
+            </a:r>
+            <a:endParaRPr lang="en-US" sz="900" dirty="0"/>
+          </a:p>
+        </p:txBody>
+      </p:sp>
+      <p:sp>
+        <p:nvSpPr>
+          <p:cNvPr id="43" name="Shape 41"/>
+          <p:cNvSpPr/>
+          <p:nvPr/>
+        </p:nvSpPr>
+        <p:spPr>
+          <a:xfrm>
+            <a:off x="3639312" y="4169664"/>
             <a:ext cx="685800" cy="475488"/>
           </a:xfrm>
           <a:prstGeom prst="rect">
@@ -28658,13 +29654,13 @@
       </p:sp>
       <p:sp>
         <p:nvSpPr>
-          <p:cNvPr id="43" name="Text 41"/>
-          <p:cNvSpPr/>
-          <p:nvPr/>
-        </p:nvSpPr>
-        <p:spPr>
-          <a:xfrm>
-            <a:off x="2023872" y="4169664"/>
+          <p:cNvPr id="44" name="Text 42"/>
+          <p:cNvSpPr/>
+          <p:nvPr/>
+        </p:nvSpPr>
+        <p:spPr>
+          <a:xfrm>
+            <a:off x="3639312" y="4169664"/>
             <a:ext cx="685800" cy="475488"/>
           </a:xfrm>
           <a:prstGeom prst="rect">
@@ -28689,7 +29685,7 @@
                 <a:ea typeface="Trebuchet MS" pitchFamily="34" charset="-122"/>
                 <a:cs typeface="Trebuchet MS" pitchFamily="34" charset="-120"/>
               </a:rPr>
-              <a:t>u</a:t>
+              <a:t>s</a:t>
             </a:r>
             <a:endParaRPr lang="en-US" sz="900" dirty="0"/>
           </a:p>
@@ -28697,13 +29693,13 @@
       </p:sp>
       <p:sp>
         <p:nvSpPr>
-          <p:cNvPr id="44" name="Shape 42"/>
-          <p:cNvSpPr/>
-          <p:nvPr/>
-        </p:nvSpPr>
-        <p:spPr>
-          <a:xfrm>
-            <a:off x="2831592" y="4169664"/>
+          <p:cNvPr id="45" name="Shape 43"/>
+          <p:cNvSpPr/>
+          <p:nvPr/>
+        </p:nvSpPr>
+        <p:spPr>
+          <a:xfrm>
+            <a:off x="4447032" y="4169664"/>
             <a:ext cx="685800" cy="475488"/>
           </a:xfrm>
           <a:prstGeom prst="rect">
@@ -28724,13 +29720,13 @@
       </p:sp>
       <p:sp>
         <p:nvSpPr>
-          <p:cNvPr id="45" name="Text 43"/>
-          <p:cNvSpPr/>
-          <p:nvPr/>
-        </p:nvSpPr>
-        <p:spPr>
-          <a:xfrm>
-            <a:off x="2831592" y="4169664"/>
+          <p:cNvPr id="46" name="Text 44"/>
+          <p:cNvSpPr/>
+          <p:nvPr/>
+        </p:nvSpPr>
+        <p:spPr>
+          <a:xfrm>
+            <a:off x="4447032" y="4169664"/>
             <a:ext cx="685800" cy="475488"/>
           </a:xfrm>
           <a:prstGeom prst="rect">
@@ -28755,7 +29751,7 @@
                 <a:ea typeface="Trebuchet MS" pitchFamily="34" charset="-122"/>
                 <a:cs typeface="Trebuchet MS" pitchFamily="34" charset="-120"/>
               </a:rPr>
-              <a:t>n</a:t>
+              <a:t>r</a:t>
             </a:r>
             <a:endParaRPr lang="en-US" sz="900" dirty="0"/>
           </a:p>
@@ -28763,13 +29759,13 @@
       </p:sp>
       <p:sp>
         <p:nvSpPr>
-          <p:cNvPr id="46" name="Shape 44"/>
-          <p:cNvSpPr/>
-          <p:nvPr/>
-        </p:nvSpPr>
-        <p:spPr>
-          <a:xfrm>
-            <a:off x="3639312" y="4169664"/>
+          <p:cNvPr id="47" name="Shape 45"/>
+          <p:cNvSpPr/>
+          <p:nvPr/>
+        </p:nvSpPr>
+        <p:spPr>
+          <a:xfrm>
+            <a:off x="5254752" y="4169664"/>
             <a:ext cx="685800" cy="475488"/>
           </a:xfrm>
           <a:prstGeom prst="rect">
@@ -28790,13 +29786,13 @@
       </p:sp>
       <p:sp>
         <p:nvSpPr>
-          <p:cNvPr id="47" name="Text 45"/>
-          <p:cNvSpPr/>
-          <p:nvPr/>
-        </p:nvSpPr>
-        <p:spPr>
-          <a:xfrm>
-            <a:off x="3639312" y="4169664"/>
+          <p:cNvPr id="48" name="Text 46"/>
+          <p:cNvSpPr/>
+          <p:nvPr/>
+        </p:nvSpPr>
+        <p:spPr>
+          <a:xfrm>
+            <a:off x="5254752" y="4169664"/>
             <a:ext cx="685800" cy="475488"/>
           </a:xfrm>
           <a:prstGeom prst="rect">
@@ -28821,7 +29817,7 @@
                 <a:ea typeface="Trebuchet MS" pitchFamily="34" charset="-122"/>
                 <a:cs typeface="Trebuchet MS" pitchFamily="34" charset="-120"/>
               </a:rPr>
-              <a:t>r</a:t>
+              <a:t>e</a:t>
             </a:r>
             <a:endParaRPr lang="en-US" sz="900" dirty="0"/>
           </a:p>
@@ -28829,13 +29825,13 @@
       </p:sp>
       <p:sp>
         <p:nvSpPr>
-          <p:cNvPr id="48" name="Shape 46"/>
-          <p:cNvSpPr/>
-          <p:nvPr/>
-        </p:nvSpPr>
-        <p:spPr>
-          <a:xfrm>
-            <a:off x="4447032" y="4169664"/>
+          <p:cNvPr id="49" name="Shape 47"/>
+          <p:cNvSpPr/>
+          <p:nvPr/>
+        </p:nvSpPr>
+        <p:spPr>
+          <a:xfrm>
+            <a:off x="6062472" y="4169664"/>
             <a:ext cx="685800" cy="475488"/>
           </a:xfrm>
           <a:prstGeom prst="rect">
@@ -28856,13 +29852,13 @@
       </p:sp>
       <p:sp>
         <p:nvSpPr>
-          <p:cNvPr id="49" name="Text 47"/>
-          <p:cNvSpPr/>
-          <p:nvPr/>
-        </p:nvSpPr>
-        <p:spPr>
-          <a:xfrm>
-            <a:off x="4447032" y="4169664"/>
+          <p:cNvPr id="50" name="Text 48"/>
+          <p:cNvSpPr/>
+          <p:nvPr/>
+        </p:nvSpPr>
+        <p:spPr>
+          <a:xfrm>
+            <a:off x="6062472" y="4169664"/>
             <a:ext cx="685800" cy="475488"/>
           </a:xfrm>
           <a:prstGeom prst="rect">
@@ -28887,7 +29883,7 @@
                 <a:ea typeface="Trebuchet MS" pitchFamily="34" charset="-122"/>
                 <a:cs typeface="Trebuchet MS" pitchFamily="34" charset="-120"/>
               </a:rPr>
-              <a:t>e</a:t>
+              <a:t>p</a:t>
             </a:r>
             <a:endParaRPr lang="en-US" sz="900" dirty="0"/>
           </a:p>
@@ -28895,13 +29891,13 @@
       </p:sp>
       <p:sp>
         <p:nvSpPr>
-          <p:cNvPr id="50" name="Shape 48"/>
-          <p:cNvSpPr/>
-          <p:nvPr/>
-        </p:nvSpPr>
-        <p:spPr>
-          <a:xfrm>
-            <a:off x="5254752" y="4169664"/>
+          <p:cNvPr id="51" name="Shape 49"/>
+          <p:cNvSpPr/>
+          <p:nvPr/>
+        </p:nvSpPr>
+        <p:spPr>
+          <a:xfrm>
+            <a:off x="6870192" y="4169664"/>
             <a:ext cx="685800" cy="475488"/>
           </a:xfrm>
           <a:prstGeom prst="rect">
@@ -28922,13 +29918,13 @@
       </p:sp>
       <p:sp>
         <p:nvSpPr>
-          <p:cNvPr id="51" name="Text 49"/>
-          <p:cNvSpPr/>
-          <p:nvPr/>
-        </p:nvSpPr>
-        <p:spPr>
-          <a:xfrm>
-            <a:off x="5254752" y="4169664"/>
+          <p:cNvPr id="52" name="Text 50"/>
+          <p:cNvSpPr/>
+          <p:nvPr/>
+        </p:nvSpPr>
+        <p:spPr>
+          <a:xfrm>
+            <a:off x="6870192" y="4169664"/>
             <a:ext cx="685800" cy="475488"/>
           </a:xfrm>
           <a:prstGeom prst="rect">
@@ -28953,7 +29949,7 @@
                 <a:ea typeface="Trebuchet MS" pitchFamily="34" charset="-122"/>
                 <a:cs typeface="Trebuchet MS" pitchFamily="34" charset="-120"/>
               </a:rPr>
-              <a:t>p</a:t>
+              <a:t>or</a:t>
             </a:r>
             <a:endParaRPr lang="en-US" sz="900" dirty="0"/>
           </a:p>
@@ -28961,13 +29957,13 @@
       </p:sp>
       <p:sp>
         <p:nvSpPr>
-          <p:cNvPr id="52" name="Shape 50"/>
-          <p:cNvSpPr/>
-          <p:nvPr/>
-        </p:nvSpPr>
-        <p:spPr>
-          <a:xfrm>
-            <a:off x="6062472" y="4169664"/>
+          <p:cNvPr id="53" name="Shape 51"/>
+          <p:cNvSpPr/>
+          <p:nvPr/>
+        </p:nvSpPr>
+        <p:spPr>
+          <a:xfrm>
+            <a:off x="7677912" y="4169664"/>
             <a:ext cx="685800" cy="475488"/>
           </a:xfrm>
           <a:prstGeom prst="rect">
@@ -28988,13 +29984,13 @@
       </p:sp>
       <p:sp>
         <p:nvSpPr>
-          <p:cNvPr id="53" name="Text 51"/>
-          <p:cNvSpPr/>
-          <p:nvPr/>
-        </p:nvSpPr>
-        <p:spPr>
-          <a:xfrm>
-            <a:off x="6062472" y="4169664"/>
+          <p:cNvPr id="54" name="Text 52"/>
+          <p:cNvSpPr/>
+          <p:nvPr/>
+        </p:nvSpPr>
+        <p:spPr>
+          <a:xfrm>
+            <a:off x="7677912" y="4169664"/>
             <a:ext cx="685800" cy="475488"/>
           </a:xfrm>
           <a:prstGeom prst="rect">
@@ -29019,139 +30015,7 @@
                 <a:ea typeface="Trebuchet MS" pitchFamily="34" charset="-122"/>
                 <a:cs typeface="Trebuchet MS" pitchFamily="34" charset="-120"/>
               </a:rPr>
-              <a:t>or</a:t>
-            </a:r>
-            <a:endParaRPr lang="en-US" sz="900" dirty="0"/>
-          </a:p>
-        </p:txBody>
-      </p:sp>
-      <p:sp>
-        <p:nvSpPr>
-          <p:cNvPr id="54" name="Shape 52"/>
-          <p:cNvSpPr/>
-          <p:nvPr/>
-        </p:nvSpPr>
-        <p:spPr>
-          <a:xfrm>
-            <a:off x="6870192" y="4169664"/>
-            <a:ext cx="685800" cy="475488"/>
-          </a:xfrm>
-          <a:prstGeom prst="rect">
-            <a:avLst>
-              <a:gd name="adj" fmla="val 7692"/>
-            </a:avLst>
-          </a:prstGeom>
-          <a:solidFill>
-            <a:srgbClr val="FFFFFF"/>
-          </a:solidFill>
-          <a:ln w="12700">
-            <a:solidFill>
-              <a:srgbClr val="DB2777"/>
-            </a:solidFill>
-            <a:prstDash val="solid"/>
-          </a:ln>
-        </p:spPr>
-      </p:sp>
-      <p:sp>
-        <p:nvSpPr>
-          <p:cNvPr id="55" name="Text 53"/>
-          <p:cNvSpPr/>
-          <p:nvPr/>
-        </p:nvSpPr>
-        <p:spPr>
-          <a:xfrm>
-            <a:off x="6870192" y="4169664"/>
-            <a:ext cx="685800" cy="475488"/>
-          </a:xfrm>
-          <a:prstGeom prst="rect">
-            <a:avLst/>
-          </a:prstGeom>
-          <a:noFill/>
-          <a:ln/>
-        </p:spPr>
-        <p:txBody>
-          <a:bodyPr wrap="square" lIns="0" tIns="0" rIns="0" bIns="0" rtlCol="0" anchor="ctr"/>
-          <a:lstStyle/>
-          <a:p>
-            <a:pPr algn="ctr" indent="0" marL="0">
-              <a:buNone/>
-            </a:pPr>
-            <a:r>
-              <a:rPr lang="en-US" sz="900" b="1" dirty="0">
-                <a:solidFill>
-                  <a:srgbClr val="9D174D"/>
-                </a:solidFill>
-                <a:latin typeface="Trebuchet MS" pitchFamily="34" charset="0"/>
-                <a:ea typeface="Trebuchet MS" pitchFamily="34" charset="-122"/>
-                <a:cs typeface="Trebuchet MS" pitchFamily="34" charset="-120"/>
-              </a:rPr>
               <a:t>t</a:t>
-            </a:r>
-            <a:endParaRPr lang="en-US" sz="900" dirty="0"/>
-          </a:p>
-        </p:txBody>
-      </p:sp>
-      <p:sp>
-        <p:nvSpPr>
-          <p:cNvPr id="56" name="Shape 54"/>
-          <p:cNvSpPr/>
-          <p:nvPr/>
-        </p:nvSpPr>
-        <p:spPr>
-          <a:xfrm>
-            <a:off x="7677912" y="4169664"/>
-            <a:ext cx="685800" cy="475488"/>
-          </a:xfrm>
-          <a:prstGeom prst="rect">
-            <a:avLst>
-              <a:gd name="adj" fmla="val 7692"/>
-            </a:avLst>
-          </a:prstGeom>
-          <a:solidFill>
-            <a:srgbClr val="FFFFFF"/>
-          </a:solidFill>
-          <a:ln w="12700">
-            <a:solidFill>
-              <a:srgbClr val="DB2777"/>
-            </a:solidFill>
-            <a:prstDash val="solid"/>
-          </a:ln>
-        </p:spPr>
-      </p:sp>
-      <p:sp>
-        <p:nvSpPr>
-          <p:cNvPr id="57" name="Text 55"/>
-          <p:cNvSpPr/>
-          <p:nvPr/>
-        </p:nvSpPr>
-        <p:spPr>
-          <a:xfrm>
-            <a:off x="7677912" y="4169664"/>
-            <a:ext cx="685800" cy="475488"/>
-          </a:xfrm>
-          <a:prstGeom prst="rect">
-            <a:avLst/>
-          </a:prstGeom>
-          <a:noFill/>
-          <a:ln/>
-        </p:spPr>
-        <p:txBody>
-          <a:bodyPr wrap="square" lIns="0" tIns="0" rIns="0" bIns="0" rtlCol="0" anchor="ctr"/>
-          <a:lstStyle/>
-          <a:p>
-            <a:pPr algn="ctr" indent="0" marL="0">
-              <a:buNone/>
-            </a:pPr>
-            <a:r>
-              <a:rPr lang="en-US" sz="900" b="1" dirty="0">
-                <a:solidFill>
-                  <a:srgbClr val="9D174D"/>
-                </a:solidFill>
-                <a:latin typeface="Trebuchet MS" pitchFamily="34" charset="0"/>
-                <a:ea typeface="Trebuchet MS" pitchFamily="34" charset="-122"/>
-                <a:cs typeface="Trebuchet MS" pitchFamily="34" charset="-120"/>
-              </a:rPr>
-              <a:t>ed</a:t>
             </a:r>
             <a:endParaRPr lang="en-US" sz="900" dirty="0"/>
           </a:p>
@@ -29582,7 +30446,7 @@
                 <a:ea typeface="Trebuchet MS" pitchFamily="34" charset="-122"/>
                 <a:cs typeface="Trebuchet MS" pitchFamily="34" charset="-120"/>
               </a:rPr>
-              <a:t>report</a:t>
+              <a:t>self-reported</a:t>
             </a:r>
             <a:endParaRPr lang="en-US" sz="2800" dirty="0"/>
           </a:p>
@@ -30409,7 +31273,7 @@
                 <a:ea typeface="Trebuchet MS" pitchFamily="34" charset="-122"/>
                 <a:cs typeface="Trebuchet MS" pitchFamily="34" charset="-120"/>
               </a:rPr>
-              <a:t>report</a:t>
+              <a:t>self-reported</a:t>
             </a:r>
             <a:endParaRPr lang="en-US" sz="2800" dirty="0"/>
           </a:p>
@@ -30489,8 +31353,8 @@
         </p:nvSpPr>
         <p:spPr>
           <a:xfrm>
-            <a:off x="4370832" y="2258568"/>
-            <a:ext cx="1828800" cy="292608"/>
+            <a:off x="1989734" y="2258568"/>
+            <a:ext cx="1581912" cy="292608"/>
           </a:xfrm>
           <a:prstGeom prst="rect">
             <a:avLst>
@@ -30498,11 +31362,11 @@
             </a:avLst>
           </a:prstGeom>
           <a:solidFill>
-            <a:srgbClr val="CCFBF1"/>
+            <a:srgbClr val="DDD6FE"/>
           </a:solidFill>
           <a:ln w="19050">
             <a:solidFill>
-              <a:srgbClr val="0D9488"/>
+              <a:srgbClr val="7C3AED"/>
             </a:solidFill>
             <a:prstDash val="solid"/>
           </a:ln>
@@ -30523,8 +31387,8 @@
         </p:nvSpPr>
         <p:spPr>
           <a:xfrm>
-            <a:off x="4370832" y="2258568"/>
-            <a:ext cx="1828800" cy="292608"/>
+            <a:off x="1989734" y="2258568"/>
+            <a:ext cx="1581912" cy="292608"/>
           </a:xfrm>
           <a:prstGeom prst="rect">
             <a:avLst/>
@@ -30542,13 +31406,13 @@
             <a:r>
               <a:rPr lang="en-US" sz="1300" b="1" dirty="0">
                 <a:solidFill>
-                  <a:srgbClr val="0F766E"/>
+                  <a:srgbClr val="4C1D95"/>
                 </a:solidFill>
                 <a:latin typeface="Trebuchet MS" pitchFamily="34" charset="0"/>
                 <a:ea typeface="Trebuchet MS" pitchFamily="34" charset="-122"/>
                 <a:cs typeface="Trebuchet MS" pitchFamily="34" charset="-120"/>
               </a:rPr>
-              <a:t>report</a:t>
+              <a:t>self</a:t>
             </a:r>
             <a:endParaRPr lang="en-US" sz="1300" dirty="0"/>
           </a:p>
@@ -30562,8 +31426,8 @@
         </p:nvSpPr>
         <p:spPr>
           <a:xfrm>
-            <a:off x="4370832" y="2569464"/>
-            <a:ext cx="1828800" cy="201168"/>
+            <a:off x="1989734" y="2569464"/>
+            <a:ext cx="1581912" cy="201168"/>
           </a:xfrm>
           <a:prstGeom prst="rect">
             <a:avLst/>
@@ -30587,7 +31451,7 @@
                 <a:ea typeface="Calibri" pitchFamily="34" charset="-122"/>
                 <a:cs typeface="Calibri" pitchFamily="34" charset="-120"/>
               </a:rPr>
-              <a:t>to carry back, to tell</a:t>
+              <a:t>by oneself</a:t>
             </a:r>
             <a:endParaRPr lang="en-US" sz="850" dirty="0"/>
           </a:p>
@@ -30596,6 +31460,342 @@
       <p:sp>
         <p:nvSpPr>
           <p:cNvPr id="19" name="Shape 17"/>
+          <p:cNvSpPr/>
+          <p:nvPr/>
+        </p:nvSpPr>
+        <p:spPr>
+          <a:xfrm>
+            <a:off x="3659429" y="2258568"/>
+            <a:ext cx="1581912" cy="292608"/>
+          </a:xfrm>
+          <a:prstGeom prst="rect">
+            <a:avLst>
+              <a:gd name="adj" fmla="val 25000"/>
+            </a:avLst>
+          </a:prstGeom>
+          <a:solidFill>
+            <a:srgbClr val="DDD6FE"/>
+          </a:solidFill>
+          <a:ln w="19050">
+            <a:solidFill>
+              <a:srgbClr val="7C3AED"/>
+            </a:solidFill>
+            <a:prstDash val="solid"/>
+          </a:ln>
+          <a:effectLst>
+            <a:outerShdw sx="100000" sy="100000" kx="0" ky="0" algn="bl" rotWithShape="0" blurRad="101600" dist="38100" dir="8100000">
+              <a:srgbClr val="000000">
+                <a:alpha val="12000"/>
+              </a:srgbClr>
+            </a:outerShdw>
+          </a:effectLst>
+        </p:spPr>
+      </p:sp>
+      <p:sp>
+        <p:nvSpPr>
+          <p:cNvPr id="20" name="Text 18"/>
+          <p:cNvSpPr/>
+          <p:nvPr/>
+        </p:nvSpPr>
+        <p:spPr>
+          <a:xfrm>
+            <a:off x="3659429" y="2258568"/>
+            <a:ext cx="1581912" cy="292608"/>
+          </a:xfrm>
+          <a:prstGeom prst="rect">
+            <a:avLst/>
+          </a:prstGeom>
+          <a:noFill/>
+          <a:ln/>
+        </p:spPr>
+        <p:txBody>
+          <a:bodyPr wrap="square" lIns="0" tIns="0" rIns="0" bIns="0" rtlCol="0" anchor="ctr"/>
+          <a:lstStyle/>
+          <a:p>
+            <a:pPr algn="ctr" indent="0" marL="0">
+              <a:buNone/>
+            </a:pPr>
+            <a:r>
+              <a:rPr lang="en-US" sz="1300" b="1" dirty="0">
+                <a:solidFill>
+                  <a:srgbClr val="4C1D95"/>
+                </a:solidFill>
+                <a:latin typeface="Trebuchet MS" pitchFamily="34" charset="0"/>
+                <a:ea typeface="Trebuchet MS" pitchFamily="34" charset="-122"/>
+                <a:cs typeface="Trebuchet MS" pitchFamily="34" charset="-120"/>
+              </a:rPr>
+              <a:t>re</a:t>
+            </a:r>
+            <a:endParaRPr lang="en-US" sz="1300" dirty="0"/>
+          </a:p>
+        </p:txBody>
+      </p:sp>
+      <p:sp>
+        <p:nvSpPr>
+          <p:cNvPr id="21" name="Text 19"/>
+          <p:cNvSpPr/>
+          <p:nvPr/>
+        </p:nvSpPr>
+        <p:spPr>
+          <a:xfrm>
+            <a:off x="3659429" y="2569464"/>
+            <a:ext cx="1581912" cy="201168"/>
+          </a:xfrm>
+          <a:prstGeom prst="rect">
+            <a:avLst/>
+          </a:prstGeom>
+          <a:noFill/>
+          <a:ln/>
+        </p:spPr>
+        <p:txBody>
+          <a:bodyPr wrap="square" lIns="0" tIns="0" rIns="0" bIns="0" rtlCol="0" anchor="t"/>
+          <a:lstStyle/>
+          <a:p>
+            <a:pPr algn="ctr" indent="0" marL="0">
+              <a:buNone/>
+            </a:pPr>
+            <a:r>
+              <a:rPr lang="en-US" sz="850" dirty="0">
+                <a:solidFill>
+                  <a:srgbClr val="475569"/>
+                </a:solidFill>
+                <a:latin typeface="Calibri" pitchFamily="34" charset="0"/>
+                <a:ea typeface="Calibri" pitchFamily="34" charset="-122"/>
+                <a:cs typeface="Calibri" pitchFamily="34" charset="-120"/>
+              </a:rPr>
+              <a:t>again, back</a:t>
+            </a:r>
+            <a:endParaRPr lang="en-US" sz="850" dirty="0"/>
+          </a:p>
+        </p:txBody>
+      </p:sp>
+      <p:sp>
+        <p:nvSpPr>
+          <p:cNvPr id="22" name="Shape 20"/>
+          <p:cNvSpPr/>
+          <p:nvPr/>
+        </p:nvSpPr>
+        <p:spPr>
+          <a:xfrm>
+            <a:off x="5329123" y="2258568"/>
+            <a:ext cx="1581912" cy="292608"/>
+          </a:xfrm>
+          <a:prstGeom prst="rect">
+            <a:avLst>
+              <a:gd name="adj" fmla="val 25000"/>
+            </a:avLst>
+          </a:prstGeom>
+          <a:solidFill>
+            <a:srgbClr val="FCE7F3"/>
+          </a:solidFill>
+          <a:ln w="19050">
+            <a:solidFill>
+              <a:srgbClr val="DB2777"/>
+            </a:solidFill>
+            <a:prstDash val="solid"/>
+          </a:ln>
+          <a:effectLst>
+            <a:outerShdw sx="100000" sy="100000" kx="0" ky="0" algn="bl" rotWithShape="0" blurRad="101600" dist="38100" dir="8100000">
+              <a:srgbClr val="000000">
+                <a:alpha val="12000"/>
+              </a:srgbClr>
+            </a:outerShdw>
+          </a:effectLst>
+        </p:spPr>
+      </p:sp>
+      <p:sp>
+        <p:nvSpPr>
+          <p:cNvPr id="23" name="Text 21"/>
+          <p:cNvSpPr/>
+          <p:nvPr/>
+        </p:nvSpPr>
+        <p:spPr>
+          <a:xfrm>
+            <a:off x="5329123" y="2258568"/>
+            <a:ext cx="1581912" cy="292608"/>
+          </a:xfrm>
+          <a:prstGeom prst="rect">
+            <a:avLst/>
+          </a:prstGeom>
+          <a:noFill/>
+          <a:ln/>
+        </p:spPr>
+        <p:txBody>
+          <a:bodyPr wrap="square" lIns="0" tIns="0" rIns="0" bIns="0" rtlCol="0" anchor="ctr"/>
+          <a:lstStyle/>
+          <a:p>
+            <a:pPr algn="ctr" indent="0" marL="0">
+              <a:buNone/>
+            </a:pPr>
+            <a:r>
+              <a:rPr lang="en-US" sz="1300" b="1" dirty="0">
+                <a:solidFill>
+                  <a:srgbClr val="9D174D"/>
+                </a:solidFill>
+                <a:latin typeface="Trebuchet MS" pitchFamily="34" charset="0"/>
+                <a:ea typeface="Trebuchet MS" pitchFamily="34" charset="-122"/>
+                <a:cs typeface="Trebuchet MS" pitchFamily="34" charset="-120"/>
+              </a:rPr>
+              <a:t>port</a:t>
+            </a:r>
+            <a:endParaRPr lang="en-US" sz="1300" dirty="0"/>
+          </a:p>
+        </p:txBody>
+      </p:sp>
+      <p:sp>
+        <p:nvSpPr>
+          <p:cNvPr id="24" name="Text 22"/>
+          <p:cNvSpPr/>
+          <p:nvPr/>
+        </p:nvSpPr>
+        <p:spPr>
+          <a:xfrm>
+            <a:off x="5329123" y="2569464"/>
+            <a:ext cx="1581912" cy="201168"/>
+          </a:xfrm>
+          <a:prstGeom prst="rect">
+            <a:avLst/>
+          </a:prstGeom>
+          <a:noFill/>
+          <a:ln/>
+        </p:spPr>
+        <p:txBody>
+          <a:bodyPr wrap="square" lIns="0" tIns="0" rIns="0" bIns="0" rtlCol="0" anchor="t"/>
+          <a:lstStyle/>
+          <a:p>
+            <a:pPr algn="ctr" indent="0" marL="0">
+              <a:buNone/>
+            </a:pPr>
+            <a:r>
+              <a:rPr lang="en-US" sz="850" dirty="0">
+                <a:solidFill>
+                  <a:srgbClr val="475569"/>
+                </a:solidFill>
+                <a:latin typeface="Calibri" pitchFamily="34" charset="0"/>
+                <a:ea typeface="Calibri" pitchFamily="34" charset="-122"/>
+                <a:cs typeface="Calibri" pitchFamily="34" charset="-120"/>
+              </a:rPr>
+              <a:t>carry, bring</a:t>
+            </a:r>
+            <a:endParaRPr lang="en-US" sz="850" dirty="0"/>
+          </a:p>
+        </p:txBody>
+      </p:sp>
+      <p:sp>
+        <p:nvSpPr>
+          <p:cNvPr id="25" name="Shape 23"/>
+          <p:cNvSpPr/>
+          <p:nvPr/>
+        </p:nvSpPr>
+        <p:spPr>
+          <a:xfrm>
+            <a:off x="6998818" y="2258568"/>
+            <a:ext cx="1581912" cy="292608"/>
+          </a:xfrm>
+          <a:prstGeom prst="rect">
+            <a:avLst>
+              <a:gd name="adj" fmla="val 25000"/>
+            </a:avLst>
+          </a:prstGeom>
+          <a:solidFill>
+            <a:srgbClr val="FCE7F3"/>
+          </a:solidFill>
+          <a:ln w="19050">
+            <a:solidFill>
+              <a:srgbClr val="DB2777"/>
+            </a:solidFill>
+            <a:prstDash val="solid"/>
+          </a:ln>
+          <a:effectLst>
+            <a:outerShdw sx="100000" sy="100000" kx="0" ky="0" algn="bl" rotWithShape="0" blurRad="101600" dist="38100" dir="8100000">
+              <a:srgbClr val="000000">
+                <a:alpha val="12000"/>
+              </a:srgbClr>
+            </a:outerShdw>
+          </a:effectLst>
+        </p:spPr>
+      </p:sp>
+      <p:sp>
+        <p:nvSpPr>
+          <p:cNvPr id="26" name="Text 24"/>
+          <p:cNvSpPr/>
+          <p:nvPr/>
+        </p:nvSpPr>
+        <p:spPr>
+          <a:xfrm>
+            <a:off x="6998818" y="2258568"/>
+            <a:ext cx="1581912" cy="292608"/>
+          </a:xfrm>
+          <a:prstGeom prst="rect">
+            <a:avLst/>
+          </a:prstGeom>
+          <a:noFill/>
+          <a:ln/>
+        </p:spPr>
+        <p:txBody>
+          <a:bodyPr wrap="square" lIns="0" tIns="0" rIns="0" bIns="0" rtlCol="0" anchor="ctr"/>
+          <a:lstStyle/>
+          <a:p>
+            <a:pPr algn="ctr" indent="0" marL="0">
+              <a:buNone/>
+            </a:pPr>
+            <a:r>
+              <a:rPr lang="en-US" sz="1300" b="1" dirty="0">
+                <a:solidFill>
+                  <a:srgbClr val="9D174D"/>
+                </a:solidFill>
+                <a:latin typeface="Trebuchet MS" pitchFamily="34" charset="0"/>
+                <a:ea typeface="Trebuchet MS" pitchFamily="34" charset="-122"/>
+                <a:cs typeface="Trebuchet MS" pitchFamily="34" charset="-120"/>
+              </a:rPr>
+              <a:t>ed</a:t>
+            </a:r>
+            <a:endParaRPr lang="en-US" sz="1300" dirty="0"/>
+          </a:p>
+        </p:txBody>
+      </p:sp>
+      <p:sp>
+        <p:nvSpPr>
+          <p:cNvPr id="27" name="Text 25"/>
+          <p:cNvSpPr/>
+          <p:nvPr/>
+        </p:nvSpPr>
+        <p:spPr>
+          <a:xfrm>
+            <a:off x="6998818" y="2569464"/>
+            <a:ext cx="1581912" cy="201168"/>
+          </a:xfrm>
+          <a:prstGeom prst="rect">
+            <a:avLst/>
+          </a:prstGeom>
+          <a:noFill/>
+          <a:ln/>
+        </p:spPr>
+        <p:txBody>
+          <a:bodyPr wrap="square" lIns="0" tIns="0" rIns="0" bIns="0" rtlCol="0" anchor="t"/>
+          <a:lstStyle/>
+          <a:p>
+            <a:pPr algn="ctr" indent="0" marL="0">
+              <a:buNone/>
+            </a:pPr>
+            <a:r>
+              <a:rPr lang="en-US" sz="850" dirty="0">
+                <a:solidFill>
+                  <a:srgbClr val="475569"/>
+                </a:solidFill>
+                <a:latin typeface="Calibri" pitchFamily="34" charset="0"/>
+                <a:ea typeface="Calibri" pitchFamily="34" charset="-122"/>
+                <a:cs typeface="Calibri" pitchFamily="34" charset="-120"/>
+              </a:rPr>
+              <a:t>in the past</a:t>
+            </a:r>
+            <a:endParaRPr lang="en-US" sz="850" dirty="0"/>
+          </a:p>
+        </p:txBody>
+      </p:sp>
+      <p:sp>
+        <p:nvSpPr>
+          <p:cNvPr id="28" name="Shape 26"/>
           <p:cNvSpPr/>
           <p:nvPr/>
         </p:nvSpPr>
@@ -30622,7 +31822,7 @@
       </p:sp>
       <p:sp>
         <p:nvSpPr>
-          <p:cNvPr id="20" name="Text 18"/>
+          <p:cNvPr id="29" name="Text 27"/>
           <p:cNvSpPr/>
           <p:nvPr/>
         </p:nvSpPr>
@@ -30661,7 +31861,7 @@
       </p:sp>
       <p:sp>
         <p:nvSpPr>
-          <p:cNvPr id="21" name="Shape 19"/>
+          <p:cNvPr id="30" name="Shape 28"/>
           <p:cNvSpPr/>
           <p:nvPr/>
         </p:nvSpPr>
@@ -30688,7 +31888,7 @@
       </p:sp>
       <p:sp>
         <p:nvSpPr>
-          <p:cNvPr id="22" name="Text 20"/>
+          <p:cNvPr id="31" name="Text 29"/>
           <p:cNvSpPr/>
           <p:nvPr/>
         </p:nvSpPr>
@@ -30727,7 +31927,7 @@
       </p:sp>
       <p:sp>
         <p:nvSpPr>
-          <p:cNvPr id="23" name="Shape 21"/>
+          <p:cNvPr id="32" name="Shape 30"/>
           <p:cNvSpPr/>
           <p:nvPr/>
         </p:nvSpPr>
@@ -30754,7 +31954,7 @@
       </p:sp>
       <p:sp>
         <p:nvSpPr>
-          <p:cNvPr id="24" name="Text 22"/>
+          <p:cNvPr id="33" name="Text 31"/>
           <p:cNvSpPr/>
           <p:nvPr/>
         </p:nvSpPr>
@@ -30793,7 +31993,7 @@
       </p:sp>
       <p:sp>
         <p:nvSpPr>
-          <p:cNvPr id="25" name="Shape 23"/>
+          <p:cNvPr id="34" name="Shape 32"/>
           <p:cNvSpPr/>
           <p:nvPr/>
         </p:nvSpPr>
@@ -30820,7 +32020,7 @@
       </p:sp>
       <p:sp>
         <p:nvSpPr>
-          <p:cNvPr id="26" name="Text 24"/>
+          <p:cNvPr id="35" name="Text 33"/>
           <p:cNvSpPr/>
           <p:nvPr/>
         </p:nvSpPr>
@@ -31282,7 +32482,7 @@
                 <a:ea typeface="Trebuchet MS" pitchFamily="34" charset="-122"/>
                 <a:cs typeface="Trebuchet MS" pitchFamily="34" charset="-120"/>
               </a:rPr>
-              <a:t>report</a:t>
+              <a:t>self-reported</a:t>
             </a:r>
             <a:endParaRPr lang="en-US" sz="2800" dirty="0"/>
           </a:p>
@@ -31362,8 +32562,8 @@
         </p:nvSpPr>
         <p:spPr>
           <a:xfrm>
-            <a:off x="4370832" y="2258568"/>
-            <a:ext cx="1828800" cy="292608"/>
+            <a:off x="1989734" y="2258568"/>
+            <a:ext cx="1581912" cy="292608"/>
           </a:xfrm>
           <a:prstGeom prst="rect">
             <a:avLst>
@@ -31371,11 +32571,11 @@
             </a:avLst>
           </a:prstGeom>
           <a:solidFill>
-            <a:srgbClr val="CCFBF1"/>
+            <a:srgbClr val="DDD6FE"/>
           </a:solidFill>
           <a:ln w="19050">
             <a:solidFill>
-              <a:srgbClr val="0D9488"/>
+              <a:srgbClr val="7C3AED"/>
             </a:solidFill>
             <a:prstDash val="solid"/>
           </a:ln>
@@ -31396,8 +32596,8 @@
         </p:nvSpPr>
         <p:spPr>
           <a:xfrm>
-            <a:off x="4370832" y="2258568"/>
-            <a:ext cx="1828800" cy="292608"/>
+            <a:off x="1989734" y="2258568"/>
+            <a:ext cx="1581912" cy="292608"/>
           </a:xfrm>
           <a:prstGeom prst="rect">
             <a:avLst/>
@@ -31415,13 +32615,13 @@
             <a:r>
               <a:rPr lang="en-US" sz="1300" b="1" dirty="0">
                 <a:solidFill>
-                  <a:srgbClr val="0F766E"/>
+                  <a:srgbClr val="4C1D95"/>
                 </a:solidFill>
                 <a:latin typeface="Trebuchet MS" pitchFamily="34" charset="0"/>
                 <a:ea typeface="Trebuchet MS" pitchFamily="34" charset="-122"/>
                 <a:cs typeface="Trebuchet MS" pitchFamily="34" charset="-120"/>
               </a:rPr>
-              <a:t>report</a:t>
+              <a:t>self</a:t>
             </a:r>
             <a:endParaRPr lang="en-US" sz="1300" dirty="0"/>
           </a:p>
@@ -31435,8 +32635,8 @@
         </p:nvSpPr>
         <p:spPr>
           <a:xfrm>
-            <a:off x="4370832" y="2569464"/>
-            <a:ext cx="1828800" cy="201168"/>
+            <a:off x="1989734" y="2569464"/>
+            <a:ext cx="1581912" cy="201168"/>
           </a:xfrm>
           <a:prstGeom prst="rect">
             <a:avLst/>
@@ -31460,7 +32660,7 @@
                 <a:ea typeface="Calibri" pitchFamily="34" charset="-122"/>
                 <a:cs typeface="Calibri" pitchFamily="34" charset="-120"/>
               </a:rPr>
-              <a:t>to carry back, to tell</a:t>
+              <a:t>by oneself</a:t>
             </a:r>
             <a:endParaRPr lang="en-US" sz="850" dirty="0"/>
           </a:p>
@@ -31469,6 +32669,342 @@
       <p:sp>
         <p:nvSpPr>
           <p:cNvPr id="19" name="Shape 17"/>
+          <p:cNvSpPr/>
+          <p:nvPr/>
+        </p:nvSpPr>
+        <p:spPr>
+          <a:xfrm>
+            <a:off x="3659429" y="2258568"/>
+            <a:ext cx="1581912" cy="292608"/>
+          </a:xfrm>
+          <a:prstGeom prst="rect">
+            <a:avLst>
+              <a:gd name="adj" fmla="val 25000"/>
+            </a:avLst>
+          </a:prstGeom>
+          <a:solidFill>
+            <a:srgbClr val="DDD6FE"/>
+          </a:solidFill>
+          <a:ln w="19050">
+            <a:solidFill>
+              <a:srgbClr val="7C3AED"/>
+            </a:solidFill>
+            <a:prstDash val="solid"/>
+          </a:ln>
+          <a:effectLst>
+            <a:outerShdw sx="100000" sy="100000" kx="0" ky="0" algn="bl" rotWithShape="0" blurRad="101600" dist="38100" dir="8100000">
+              <a:srgbClr val="000000">
+                <a:alpha val="12000"/>
+              </a:srgbClr>
+            </a:outerShdw>
+          </a:effectLst>
+        </p:spPr>
+      </p:sp>
+      <p:sp>
+        <p:nvSpPr>
+          <p:cNvPr id="20" name="Text 18"/>
+          <p:cNvSpPr/>
+          <p:nvPr/>
+        </p:nvSpPr>
+        <p:spPr>
+          <a:xfrm>
+            <a:off x="3659429" y="2258568"/>
+            <a:ext cx="1581912" cy="292608"/>
+          </a:xfrm>
+          <a:prstGeom prst="rect">
+            <a:avLst/>
+          </a:prstGeom>
+          <a:noFill/>
+          <a:ln/>
+        </p:spPr>
+        <p:txBody>
+          <a:bodyPr wrap="square" lIns="0" tIns="0" rIns="0" bIns="0" rtlCol="0" anchor="ctr"/>
+          <a:lstStyle/>
+          <a:p>
+            <a:pPr algn="ctr" indent="0" marL="0">
+              <a:buNone/>
+            </a:pPr>
+            <a:r>
+              <a:rPr lang="en-US" sz="1300" b="1" dirty="0">
+                <a:solidFill>
+                  <a:srgbClr val="4C1D95"/>
+                </a:solidFill>
+                <a:latin typeface="Trebuchet MS" pitchFamily="34" charset="0"/>
+                <a:ea typeface="Trebuchet MS" pitchFamily="34" charset="-122"/>
+                <a:cs typeface="Trebuchet MS" pitchFamily="34" charset="-120"/>
+              </a:rPr>
+              <a:t>re</a:t>
+            </a:r>
+            <a:endParaRPr lang="en-US" sz="1300" dirty="0"/>
+          </a:p>
+        </p:txBody>
+      </p:sp>
+      <p:sp>
+        <p:nvSpPr>
+          <p:cNvPr id="21" name="Text 19"/>
+          <p:cNvSpPr/>
+          <p:nvPr/>
+        </p:nvSpPr>
+        <p:spPr>
+          <a:xfrm>
+            <a:off x="3659429" y="2569464"/>
+            <a:ext cx="1581912" cy="201168"/>
+          </a:xfrm>
+          <a:prstGeom prst="rect">
+            <a:avLst/>
+          </a:prstGeom>
+          <a:noFill/>
+          <a:ln/>
+        </p:spPr>
+        <p:txBody>
+          <a:bodyPr wrap="square" lIns="0" tIns="0" rIns="0" bIns="0" rtlCol="0" anchor="t"/>
+          <a:lstStyle/>
+          <a:p>
+            <a:pPr algn="ctr" indent="0" marL="0">
+              <a:buNone/>
+            </a:pPr>
+            <a:r>
+              <a:rPr lang="en-US" sz="850" dirty="0">
+                <a:solidFill>
+                  <a:srgbClr val="475569"/>
+                </a:solidFill>
+                <a:latin typeface="Calibri" pitchFamily="34" charset="0"/>
+                <a:ea typeface="Calibri" pitchFamily="34" charset="-122"/>
+                <a:cs typeface="Calibri" pitchFamily="34" charset="-120"/>
+              </a:rPr>
+              <a:t>again, back</a:t>
+            </a:r>
+            <a:endParaRPr lang="en-US" sz="850" dirty="0"/>
+          </a:p>
+        </p:txBody>
+      </p:sp>
+      <p:sp>
+        <p:nvSpPr>
+          <p:cNvPr id="22" name="Shape 20"/>
+          <p:cNvSpPr/>
+          <p:nvPr/>
+        </p:nvSpPr>
+        <p:spPr>
+          <a:xfrm>
+            <a:off x="5329123" y="2258568"/>
+            <a:ext cx="1581912" cy="292608"/>
+          </a:xfrm>
+          <a:prstGeom prst="rect">
+            <a:avLst>
+              <a:gd name="adj" fmla="val 25000"/>
+            </a:avLst>
+          </a:prstGeom>
+          <a:solidFill>
+            <a:srgbClr val="FCE7F3"/>
+          </a:solidFill>
+          <a:ln w="19050">
+            <a:solidFill>
+              <a:srgbClr val="DB2777"/>
+            </a:solidFill>
+            <a:prstDash val="solid"/>
+          </a:ln>
+          <a:effectLst>
+            <a:outerShdw sx="100000" sy="100000" kx="0" ky="0" algn="bl" rotWithShape="0" blurRad="101600" dist="38100" dir="8100000">
+              <a:srgbClr val="000000">
+                <a:alpha val="12000"/>
+              </a:srgbClr>
+            </a:outerShdw>
+          </a:effectLst>
+        </p:spPr>
+      </p:sp>
+      <p:sp>
+        <p:nvSpPr>
+          <p:cNvPr id="23" name="Text 21"/>
+          <p:cNvSpPr/>
+          <p:nvPr/>
+        </p:nvSpPr>
+        <p:spPr>
+          <a:xfrm>
+            <a:off x="5329123" y="2258568"/>
+            <a:ext cx="1581912" cy="292608"/>
+          </a:xfrm>
+          <a:prstGeom prst="rect">
+            <a:avLst/>
+          </a:prstGeom>
+          <a:noFill/>
+          <a:ln/>
+        </p:spPr>
+        <p:txBody>
+          <a:bodyPr wrap="square" lIns="0" tIns="0" rIns="0" bIns="0" rtlCol="0" anchor="ctr"/>
+          <a:lstStyle/>
+          <a:p>
+            <a:pPr algn="ctr" indent="0" marL="0">
+              <a:buNone/>
+            </a:pPr>
+            <a:r>
+              <a:rPr lang="en-US" sz="1300" b="1" dirty="0">
+                <a:solidFill>
+                  <a:srgbClr val="9D174D"/>
+                </a:solidFill>
+                <a:latin typeface="Trebuchet MS" pitchFamily="34" charset="0"/>
+                <a:ea typeface="Trebuchet MS" pitchFamily="34" charset="-122"/>
+                <a:cs typeface="Trebuchet MS" pitchFamily="34" charset="-120"/>
+              </a:rPr>
+              <a:t>port</a:t>
+            </a:r>
+            <a:endParaRPr lang="en-US" sz="1300" dirty="0"/>
+          </a:p>
+        </p:txBody>
+      </p:sp>
+      <p:sp>
+        <p:nvSpPr>
+          <p:cNvPr id="24" name="Text 22"/>
+          <p:cNvSpPr/>
+          <p:nvPr/>
+        </p:nvSpPr>
+        <p:spPr>
+          <a:xfrm>
+            <a:off x="5329123" y="2569464"/>
+            <a:ext cx="1581912" cy="201168"/>
+          </a:xfrm>
+          <a:prstGeom prst="rect">
+            <a:avLst/>
+          </a:prstGeom>
+          <a:noFill/>
+          <a:ln/>
+        </p:spPr>
+        <p:txBody>
+          <a:bodyPr wrap="square" lIns="0" tIns="0" rIns="0" bIns="0" rtlCol="0" anchor="t"/>
+          <a:lstStyle/>
+          <a:p>
+            <a:pPr algn="ctr" indent="0" marL="0">
+              <a:buNone/>
+            </a:pPr>
+            <a:r>
+              <a:rPr lang="en-US" sz="850" dirty="0">
+                <a:solidFill>
+                  <a:srgbClr val="475569"/>
+                </a:solidFill>
+                <a:latin typeface="Calibri" pitchFamily="34" charset="0"/>
+                <a:ea typeface="Calibri" pitchFamily="34" charset="-122"/>
+                <a:cs typeface="Calibri" pitchFamily="34" charset="-120"/>
+              </a:rPr>
+              <a:t>carry, bring</a:t>
+            </a:r>
+            <a:endParaRPr lang="en-US" sz="850" dirty="0"/>
+          </a:p>
+        </p:txBody>
+      </p:sp>
+      <p:sp>
+        <p:nvSpPr>
+          <p:cNvPr id="25" name="Shape 23"/>
+          <p:cNvSpPr/>
+          <p:nvPr/>
+        </p:nvSpPr>
+        <p:spPr>
+          <a:xfrm>
+            <a:off x="6998818" y="2258568"/>
+            <a:ext cx="1581912" cy="292608"/>
+          </a:xfrm>
+          <a:prstGeom prst="rect">
+            <a:avLst>
+              <a:gd name="adj" fmla="val 25000"/>
+            </a:avLst>
+          </a:prstGeom>
+          <a:solidFill>
+            <a:srgbClr val="FCE7F3"/>
+          </a:solidFill>
+          <a:ln w="19050">
+            <a:solidFill>
+              <a:srgbClr val="DB2777"/>
+            </a:solidFill>
+            <a:prstDash val="solid"/>
+          </a:ln>
+          <a:effectLst>
+            <a:outerShdw sx="100000" sy="100000" kx="0" ky="0" algn="bl" rotWithShape="0" blurRad="101600" dist="38100" dir="8100000">
+              <a:srgbClr val="000000">
+                <a:alpha val="12000"/>
+              </a:srgbClr>
+            </a:outerShdw>
+          </a:effectLst>
+        </p:spPr>
+      </p:sp>
+      <p:sp>
+        <p:nvSpPr>
+          <p:cNvPr id="26" name="Text 24"/>
+          <p:cNvSpPr/>
+          <p:nvPr/>
+        </p:nvSpPr>
+        <p:spPr>
+          <a:xfrm>
+            <a:off x="6998818" y="2258568"/>
+            <a:ext cx="1581912" cy="292608"/>
+          </a:xfrm>
+          <a:prstGeom prst="rect">
+            <a:avLst/>
+          </a:prstGeom>
+          <a:noFill/>
+          <a:ln/>
+        </p:spPr>
+        <p:txBody>
+          <a:bodyPr wrap="square" lIns="0" tIns="0" rIns="0" bIns="0" rtlCol="0" anchor="ctr"/>
+          <a:lstStyle/>
+          <a:p>
+            <a:pPr algn="ctr" indent="0" marL="0">
+              <a:buNone/>
+            </a:pPr>
+            <a:r>
+              <a:rPr lang="en-US" sz="1300" b="1" dirty="0">
+                <a:solidFill>
+                  <a:srgbClr val="9D174D"/>
+                </a:solidFill>
+                <a:latin typeface="Trebuchet MS" pitchFamily="34" charset="0"/>
+                <a:ea typeface="Trebuchet MS" pitchFamily="34" charset="-122"/>
+                <a:cs typeface="Trebuchet MS" pitchFamily="34" charset="-120"/>
+              </a:rPr>
+              <a:t>ed</a:t>
+            </a:r>
+            <a:endParaRPr lang="en-US" sz="1300" dirty="0"/>
+          </a:p>
+        </p:txBody>
+      </p:sp>
+      <p:sp>
+        <p:nvSpPr>
+          <p:cNvPr id="27" name="Text 25"/>
+          <p:cNvSpPr/>
+          <p:nvPr/>
+        </p:nvSpPr>
+        <p:spPr>
+          <a:xfrm>
+            <a:off x="6998818" y="2569464"/>
+            <a:ext cx="1581912" cy="201168"/>
+          </a:xfrm>
+          <a:prstGeom prst="rect">
+            <a:avLst/>
+          </a:prstGeom>
+          <a:noFill/>
+          <a:ln/>
+        </p:spPr>
+        <p:txBody>
+          <a:bodyPr wrap="square" lIns="0" tIns="0" rIns="0" bIns="0" rtlCol="0" anchor="t"/>
+          <a:lstStyle/>
+          <a:p>
+            <a:pPr algn="ctr" indent="0" marL="0">
+              <a:buNone/>
+            </a:pPr>
+            <a:r>
+              <a:rPr lang="en-US" sz="850" dirty="0">
+                <a:solidFill>
+                  <a:srgbClr val="475569"/>
+                </a:solidFill>
+                <a:latin typeface="Calibri" pitchFamily="34" charset="0"/>
+                <a:ea typeface="Calibri" pitchFamily="34" charset="-122"/>
+                <a:cs typeface="Calibri" pitchFamily="34" charset="-120"/>
+              </a:rPr>
+              <a:t>in the past</a:t>
+            </a:r>
+            <a:endParaRPr lang="en-US" sz="850" dirty="0"/>
+          </a:p>
+        </p:txBody>
+      </p:sp>
+      <p:sp>
+        <p:nvSpPr>
+          <p:cNvPr id="28" name="Shape 26"/>
           <p:cNvSpPr/>
           <p:nvPr/>
         </p:nvSpPr>
@@ -31495,7 +33031,7 @@
       </p:sp>
       <p:sp>
         <p:nvSpPr>
-          <p:cNvPr id="20" name="Text 18"/>
+          <p:cNvPr id="29" name="Text 27"/>
           <p:cNvSpPr/>
           <p:nvPr/>
         </p:nvSpPr>
@@ -31534,7 +33070,7 @@
       </p:sp>
       <p:sp>
         <p:nvSpPr>
-          <p:cNvPr id="21" name="Shape 19"/>
+          <p:cNvPr id="30" name="Shape 28"/>
           <p:cNvSpPr/>
           <p:nvPr/>
         </p:nvSpPr>
@@ -31561,13 +33097,13 @@
       </p:sp>
       <p:sp>
         <p:nvSpPr>
-          <p:cNvPr id="22" name="Shape 20"/>
-          <p:cNvSpPr/>
-          <p:nvPr/>
-        </p:nvSpPr>
-        <p:spPr>
-          <a:xfrm>
-            <a:off x="2999232" y="3364992"/>
+          <p:cNvPr id="31" name="Shape 29"/>
+          <p:cNvSpPr/>
+          <p:nvPr/>
+        </p:nvSpPr>
+        <p:spPr>
+          <a:xfrm>
+            <a:off x="2313432" y="3364992"/>
             <a:ext cx="1645920" cy="475488"/>
           </a:xfrm>
           <a:prstGeom prst="rect">
@@ -31588,13 +33124,13 @@
       </p:sp>
       <p:sp>
         <p:nvSpPr>
-          <p:cNvPr id="23" name="Text 21"/>
-          <p:cNvSpPr/>
-          <p:nvPr/>
-        </p:nvSpPr>
-        <p:spPr>
-          <a:xfrm>
-            <a:off x="2999232" y="3364992"/>
+          <p:cNvPr id="32" name="Text 30"/>
+          <p:cNvSpPr/>
+          <p:nvPr/>
+        </p:nvSpPr>
+        <p:spPr>
+          <a:xfrm>
+            <a:off x="2313432" y="3364992"/>
             <a:ext cx="1645920" cy="475488"/>
           </a:xfrm>
           <a:prstGeom prst="rect">
@@ -31619,7 +33155,7 @@
                 <a:ea typeface="Trebuchet MS" pitchFamily="34" charset="-122"/>
                 <a:cs typeface="Trebuchet MS" pitchFamily="34" charset="-120"/>
               </a:rPr>
-              <a:t>re</a:t>
+              <a:t>self-re</a:t>
             </a:r>
             <a:endParaRPr lang="en-US" sz="1400" dirty="0"/>
           </a:p>
@@ -31627,14 +33163,14 @@
       </p:sp>
       <p:sp>
         <p:nvSpPr>
-          <p:cNvPr id="24" name="Text 22"/>
-          <p:cNvSpPr/>
-          <p:nvPr/>
-        </p:nvSpPr>
-        <p:spPr>
-          <a:xfrm>
-            <a:off x="4645152" y="3364992"/>
-            <a:ext cx="1097280" cy="475488"/>
+          <p:cNvPr id="33" name="Text 31"/>
+          <p:cNvSpPr/>
+          <p:nvPr/>
+        </p:nvSpPr>
+        <p:spPr>
+          <a:xfrm>
+            <a:off x="3959352" y="3364992"/>
+            <a:ext cx="411480" cy="475488"/>
           </a:xfrm>
           <a:prstGeom prst="rect">
             <a:avLst/>
@@ -31666,13 +33202,13 @@
       </p:sp>
       <p:sp>
         <p:nvSpPr>
-          <p:cNvPr id="25" name="Shape 23"/>
-          <p:cNvSpPr/>
-          <p:nvPr/>
-        </p:nvSpPr>
-        <p:spPr>
-          <a:xfrm>
-            <a:off x="5742432" y="3364992"/>
+          <p:cNvPr id="34" name="Shape 32"/>
+          <p:cNvSpPr/>
+          <p:nvPr/>
+        </p:nvSpPr>
+        <p:spPr>
+          <a:xfrm>
+            <a:off x="4370832" y="3364992"/>
             <a:ext cx="1645920" cy="475488"/>
           </a:xfrm>
           <a:prstGeom prst="rect">
@@ -31693,13 +33229,13 @@
       </p:sp>
       <p:sp>
         <p:nvSpPr>
-          <p:cNvPr id="26" name="Text 24"/>
-          <p:cNvSpPr/>
-          <p:nvPr/>
-        </p:nvSpPr>
-        <p:spPr>
-          <a:xfrm>
-            <a:off x="5742432" y="3364992"/>
+          <p:cNvPr id="35" name="Text 33"/>
+          <p:cNvSpPr/>
+          <p:nvPr/>
+        </p:nvSpPr>
+        <p:spPr>
+          <a:xfrm>
+            <a:off x="4370832" y="3364992"/>
             <a:ext cx="1645920" cy="475488"/>
           </a:xfrm>
           <a:prstGeom prst="rect">
@@ -31732,7 +33268,112 @@
       </p:sp>
       <p:sp>
         <p:nvSpPr>
-          <p:cNvPr id="27" name="Shape 25"/>
+          <p:cNvPr id="36" name="Text 34"/>
+          <p:cNvSpPr/>
+          <p:nvPr/>
+        </p:nvSpPr>
+        <p:spPr>
+          <a:xfrm>
+            <a:off x="6016752" y="3364992"/>
+            <a:ext cx="411480" cy="475488"/>
+          </a:xfrm>
+          <a:prstGeom prst="rect">
+            <a:avLst/>
+          </a:prstGeom>
+          <a:noFill/>
+          <a:ln/>
+        </p:spPr>
+        <p:txBody>
+          <a:bodyPr wrap="square" lIns="0" tIns="0" rIns="0" bIns="0" rtlCol="0" anchor="ctr"/>
+          <a:lstStyle/>
+          <a:p>
+            <a:pPr algn="ctr" indent="0" marL="0">
+              <a:buNone/>
+            </a:pPr>
+            <a:r>
+              <a:rPr lang="en-US" sz="1600" b="1" dirty="0">
+                <a:solidFill>
+                  <a:srgbClr val="0D9488"/>
+                </a:solidFill>
+                <a:latin typeface="Trebuchet MS" pitchFamily="34" charset="0"/>
+                <a:ea typeface="Trebuchet MS" pitchFamily="34" charset="-122"/>
+                <a:cs typeface="Trebuchet MS" pitchFamily="34" charset="-120"/>
+              </a:rPr>
+              <a:t>·</a:t>
+            </a:r>
+            <a:endParaRPr lang="en-US" sz="1600" dirty="0"/>
+          </a:p>
+        </p:txBody>
+      </p:sp>
+      <p:sp>
+        <p:nvSpPr>
+          <p:cNvPr id="37" name="Shape 35"/>
+          <p:cNvSpPr/>
+          <p:nvPr/>
+        </p:nvSpPr>
+        <p:spPr>
+          <a:xfrm>
+            <a:off x="6428232" y="3364992"/>
+            <a:ext cx="1645920" cy="475488"/>
+          </a:xfrm>
+          <a:prstGeom prst="rect">
+            <a:avLst>
+              <a:gd name="adj" fmla="val 9615"/>
+            </a:avLst>
+          </a:prstGeom>
+          <a:solidFill>
+            <a:srgbClr val="FFFFFF"/>
+          </a:solidFill>
+          <a:ln w="12700">
+            <a:solidFill>
+              <a:srgbClr val="0D9488"/>
+            </a:solidFill>
+            <a:prstDash val="solid"/>
+          </a:ln>
+        </p:spPr>
+      </p:sp>
+      <p:sp>
+        <p:nvSpPr>
+          <p:cNvPr id="38" name="Text 36"/>
+          <p:cNvSpPr/>
+          <p:nvPr/>
+        </p:nvSpPr>
+        <p:spPr>
+          <a:xfrm>
+            <a:off x="6428232" y="3364992"/>
+            <a:ext cx="1645920" cy="475488"/>
+          </a:xfrm>
+          <a:prstGeom prst="rect">
+            <a:avLst/>
+          </a:prstGeom>
+          <a:noFill/>
+          <a:ln/>
+        </p:spPr>
+        <p:txBody>
+          <a:bodyPr wrap="square" lIns="0" tIns="0" rIns="0" bIns="0" rtlCol="0" anchor="ctr"/>
+          <a:lstStyle/>
+          <a:p>
+            <a:pPr algn="ctr" indent="0" marL="0">
+              <a:buNone/>
+            </a:pPr>
+            <a:r>
+              <a:rPr lang="en-US" sz="1400" b="1" dirty="0">
+                <a:solidFill>
+                  <a:srgbClr val="0D9488"/>
+                </a:solidFill>
+                <a:latin typeface="Trebuchet MS" pitchFamily="34" charset="0"/>
+                <a:ea typeface="Trebuchet MS" pitchFamily="34" charset="-122"/>
+                <a:cs typeface="Trebuchet MS" pitchFamily="34" charset="-120"/>
+              </a:rPr>
+              <a:t>ed</a:t>
+            </a:r>
+            <a:endParaRPr lang="en-US" sz="1400" dirty="0"/>
+          </a:p>
+        </p:txBody>
+      </p:sp>
+      <p:sp>
+        <p:nvSpPr>
+          <p:cNvPr id="39" name="Shape 37"/>
           <p:cNvSpPr/>
           <p:nvPr/>
         </p:nvSpPr>
@@ -31759,7 +33400,7 @@
       </p:sp>
       <p:sp>
         <p:nvSpPr>
-          <p:cNvPr id="28" name="Text 26"/>
+          <p:cNvPr id="40" name="Text 38"/>
           <p:cNvSpPr/>
           <p:nvPr/>
         </p:nvSpPr>
@@ -31798,7 +33439,7 @@
       </p:sp>
       <p:sp>
         <p:nvSpPr>
-          <p:cNvPr id="29" name="Shape 27"/>
+          <p:cNvPr id="41" name="Shape 39"/>
           <p:cNvSpPr/>
           <p:nvPr/>
         </p:nvSpPr>
@@ -31825,7 +33466,7 @@
       </p:sp>
       <p:sp>
         <p:nvSpPr>
-          <p:cNvPr id="30" name="Text 28"/>
+          <p:cNvPr id="42" name="Text 40"/>
           <p:cNvSpPr/>
           <p:nvPr/>
         </p:nvSpPr>
@@ -32287,7 +33928,7 @@
                 <a:ea typeface="Trebuchet MS" pitchFamily="34" charset="-122"/>
                 <a:cs typeface="Trebuchet MS" pitchFamily="34" charset="-120"/>
               </a:rPr>
-              <a:t>report</a:t>
+              <a:t>self-reported</a:t>
             </a:r>
             <a:endParaRPr lang="en-US" sz="2800" dirty="0"/>
           </a:p>
@@ -32367,8 +34008,8 @@
         </p:nvSpPr>
         <p:spPr>
           <a:xfrm>
-            <a:off x="4370832" y="2258568"/>
-            <a:ext cx="1828800" cy="292608"/>
+            <a:off x="1989734" y="2258568"/>
+            <a:ext cx="1581912" cy="292608"/>
           </a:xfrm>
           <a:prstGeom prst="rect">
             <a:avLst>
@@ -32376,11 +34017,11 @@
             </a:avLst>
           </a:prstGeom>
           <a:solidFill>
-            <a:srgbClr val="CCFBF1"/>
+            <a:srgbClr val="DDD6FE"/>
           </a:solidFill>
           <a:ln w="19050">
             <a:solidFill>
-              <a:srgbClr val="0D9488"/>
+              <a:srgbClr val="7C3AED"/>
             </a:solidFill>
             <a:prstDash val="solid"/>
           </a:ln>
@@ -32401,8 +34042,8 @@
         </p:nvSpPr>
         <p:spPr>
           <a:xfrm>
-            <a:off x="4370832" y="2258568"/>
-            <a:ext cx="1828800" cy="292608"/>
+            <a:off x="1989734" y="2258568"/>
+            <a:ext cx="1581912" cy="292608"/>
           </a:xfrm>
           <a:prstGeom prst="rect">
             <a:avLst/>
@@ -32420,13 +34061,13 @@
             <a:r>
               <a:rPr lang="en-US" sz="1300" b="1" dirty="0">
                 <a:solidFill>
-                  <a:srgbClr val="0F766E"/>
+                  <a:srgbClr val="4C1D95"/>
                 </a:solidFill>
                 <a:latin typeface="Trebuchet MS" pitchFamily="34" charset="0"/>
                 <a:ea typeface="Trebuchet MS" pitchFamily="34" charset="-122"/>
                 <a:cs typeface="Trebuchet MS" pitchFamily="34" charset="-120"/>
               </a:rPr>
-              <a:t>report</a:t>
+              <a:t>self</a:t>
             </a:r>
             <a:endParaRPr lang="en-US" sz="1300" dirty="0"/>
           </a:p>
@@ -32440,8 +34081,8 @@
         </p:nvSpPr>
         <p:spPr>
           <a:xfrm>
-            <a:off x="4370832" y="2569464"/>
-            <a:ext cx="1828800" cy="201168"/>
+            <a:off x="1989734" y="2569464"/>
+            <a:ext cx="1581912" cy="201168"/>
           </a:xfrm>
           <a:prstGeom prst="rect">
             <a:avLst/>
@@ -32465,7 +34106,7 @@
                 <a:ea typeface="Calibri" pitchFamily="34" charset="-122"/>
                 <a:cs typeface="Calibri" pitchFamily="34" charset="-120"/>
               </a:rPr>
-              <a:t>to carry back, to tell</a:t>
+              <a:t>by oneself</a:t>
             </a:r>
             <a:endParaRPr lang="en-US" sz="850" dirty="0"/>
           </a:p>
@@ -32474,6 +34115,342 @@
       <p:sp>
         <p:nvSpPr>
           <p:cNvPr id="19" name="Shape 17"/>
+          <p:cNvSpPr/>
+          <p:nvPr/>
+        </p:nvSpPr>
+        <p:spPr>
+          <a:xfrm>
+            <a:off x="3659429" y="2258568"/>
+            <a:ext cx="1581912" cy="292608"/>
+          </a:xfrm>
+          <a:prstGeom prst="rect">
+            <a:avLst>
+              <a:gd name="adj" fmla="val 25000"/>
+            </a:avLst>
+          </a:prstGeom>
+          <a:solidFill>
+            <a:srgbClr val="DDD6FE"/>
+          </a:solidFill>
+          <a:ln w="19050">
+            <a:solidFill>
+              <a:srgbClr val="7C3AED"/>
+            </a:solidFill>
+            <a:prstDash val="solid"/>
+          </a:ln>
+          <a:effectLst>
+            <a:outerShdw sx="100000" sy="100000" kx="0" ky="0" algn="bl" rotWithShape="0" blurRad="101600" dist="38100" dir="8100000">
+              <a:srgbClr val="000000">
+                <a:alpha val="12000"/>
+              </a:srgbClr>
+            </a:outerShdw>
+          </a:effectLst>
+        </p:spPr>
+      </p:sp>
+      <p:sp>
+        <p:nvSpPr>
+          <p:cNvPr id="20" name="Text 18"/>
+          <p:cNvSpPr/>
+          <p:nvPr/>
+        </p:nvSpPr>
+        <p:spPr>
+          <a:xfrm>
+            <a:off x="3659429" y="2258568"/>
+            <a:ext cx="1581912" cy="292608"/>
+          </a:xfrm>
+          <a:prstGeom prst="rect">
+            <a:avLst/>
+          </a:prstGeom>
+          <a:noFill/>
+          <a:ln/>
+        </p:spPr>
+        <p:txBody>
+          <a:bodyPr wrap="square" lIns="0" tIns="0" rIns="0" bIns="0" rtlCol="0" anchor="ctr"/>
+          <a:lstStyle/>
+          <a:p>
+            <a:pPr algn="ctr" indent="0" marL="0">
+              <a:buNone/>
+            </a:pPr>
+            <a:r>
+              <a:rPr lang="en-US" sz="1300" b="1" dirty="0">
+                <a:solidFill>
+                  <a:srgbClr val="4C1D95"/>
+                </a:solidFill>
+                <a:latin typeface="Trebuchet MS" pitchFamily="34" charset="0"/>
+                <a:ea typeface="Trebuchet MS" pitchFamily="34" charset="-122"/>
+                <a:cs typeface="Trebuchet MS" pitchFamily="34" charset="-120"/>
+              </a:rPr>
+              <a:t>re</a:t>
+            </a:r>
+            <a:endParaRPr lang="en-US" sz="1300" dirty="0"/>
+          </a:p>
+        </p:txBody>
+      </p:sp>
+      <p:sp>
+        <p:nvSpPr>
+          <p:cNvPr id="21" name="Text 19"/>
+          <p:cNvSpPr/>
+          <p:nvPr/>
+        </p:nvSpPr>
+        <p:spPr>
+          <a:xfrm>
+            <a:off x="3659429" y="2569464"/>
+            <a:ext cx="1581912" cy="201168"/>
+          </a:xfrm>
+          <a:prstGeom prst="rect">
+            <a:avLst/>
+          </a:prstGeom>
+          <a:noFill/>
+          <a:ln/>
+        </p:spPr>
+        <p:txBody>
+          <a:bodyPr wrap="square" lIns="0" tIns="0" rIns="0" bIns="0" rtlCol="0" anchor="t"/>
+          <a:lstStyle/>
+          <a:p>
+            <a:pPr algn="ctr" indent="0" marL="0">
+              <a:buNone/>
+            </a:pPr>
+            <a:r>
+              <a:rPr lang="en-US" sz="850" dirty="0">
+                <a:solidFill>
+                  <a:srgbClr val="475569"/>
+                </a:solidFill>
+                <a:latin typeface="Calibri" pitchFamily="34" charset="0"/>
+                <a:ea typeface="Calibri" pitchFamily="34" charset="-122"/>
+                <a:cs typeface="Calibri" pitchFamily="34" charset="-120"/>
+              </a:rPr>
+              <a:t>again, back</a:t>
+            </a:r>
+            <a:endParaRPr lang="en-US" sz="850" dirty="0"/>
+          </a:p>
+        </p:txBody>
+      </p:sp>
+      <p:sp>
+        <p:nvSpPr>
+          <p:cNvPr id="22" name="Shape 20"/>
+          <p:cNvSpPr/>
+          <p:nvPr/>
+        </p:nvSpPr>
+        <p:spPr>
+          <a:xfrm>
+            <a:off x="5329123" y="2258568"/>
+            <a:ext cx="1581912" cy="292608"/>
+          </a:xfrm>
+          <a:prstGeom prst="rect">
+            <a:avLst>
+              <a:gd name="adj" fmla="val 25000"/>
+            </a:avLst>
+          </a:prstGeom>
+          <a:solidFill>
+            <a:srgbClr val="FCE7F3"/>
+          </a:solidFill>
+          <a:ln w="19050">
+            <a:solidFill>
+              <a:srgbClr val="DB2777"/>
+            </a:solidFill>
+            <a:prstDash val="solid"/>
+          </a:ln>
+          <a:effectLst>
+            <a:outerShdw sx="100000" sy="100000" kx="0" ky="0" algn="bl" rotWithShape="0" blurRad="101600" dist="38100" dir="8100000">
+              <a:srgbClr val="000000">
+                <a:alpha val="12000"/>
+              </a:srgbClr>
+            </a:outerShdw>
+          </a:effectLst>
+        </p:spPr>
+      </p:sp>
+      <p:sp>
+        <p:nvSpPr>
+          <p:cNvPr id="23" name="Text 21"/>
+          <p:cNvSpPr/>
+          <p:nvPr/>
+        </p:nvSpPr>
+        <p:spPr>
+          <a:xfrm>
+            <a:off x="5329123" y="2258568"/>
+            <a:ext cx="1581912" cy="292608"/>
+          </a:xfrm>
+          <a:prstGeom prst="rect">
+            <a:avLst/>
+          </a:prstGeom>
+          <a:noFill/>
+          <a:ln/>
+        </p:spPr>
+        <p:txBody>
+          <a:bodyPr wrap="square" lIns="0" tIns="0" rIns="0" bIns="0" rtlCol="0" anchor="ctr"/>
+          <a:lstStyle/>
+          <a:p>
+            <a:pPr algn="ctr" indent="0" marL="0">
+              <a:buNone/>
+            </a:pPr>
+            <a:r>
+              <a:rPr lang="en-US" sz="1300" b="1" dirty="0">
+                <a:solidFill>
+                  <a:srgbClr val="9D174D"/>
+                </a:solidFill>
+                <a:latin typeface="Trebuchet MS" pitchFamily="34" charset="0"/>
+                <a:ea typeface="Trebuchet MS" pitchFamily="34" charset="-122"/>
+                <a:cs typeface="Trebuchet MS" pitchFamily="34" charset="-120"/>
+              </a:rPr>
+              <a:t>port</a:t>
+            </a:r>
+            <a:endParaRPr lang="en-US" sz="1300" dirty="0"/>
+          </a:p>
+        </p:txBody>
+      </p:sp>
+      <p:sp>
+        <p:nvSpPr>
+          <p:cNvPr id="24" name="Text 22"/>
+          <p:cNvSpPr/>
+          <p:nvPr/>
+        </p:nvSpPr>
+        <p:spPr>
+          <a:xfrm>
+            <a:off x="5329123" y="2569464"/>
+            <a:ext cx="1581912" cy="201168"/>
+          </a:xfrm>
+          <a:prstGeom prst="rect">
+            <a:avLst/>
+          </a:prstGeom>
+          <a:noFill/>
+          <a:ln/>
+        </p:spPr>
+        <p:txBody>
+          <a:bodyPr wrap="square" lIns="0" tIns="0" rIns="0" bIns="0" rtlCol="0" anchor="t"/>
+          <a:lstStyle/>
+          <a:p>
+            <a:pPr algn="ctr" indent="0" marL="0">
+              <a:buNone/>
+            </a:pPr>
+            <a:r>
+              <a:rPr lang="en-US" sz="850" dirty="0">
+                <a:solidFill>
+                  <a:srgbClr val="475569"/>
+                </a:solidFill>
+                <a:latin typeface="Calibri" pitchFamily="34" charset="0"/>
+                <a:ea typeface="Calibri" pitchFamily="34" charset="-122"/>
+                <a:cs typeface="Calibri" pitchFamily="34" charset="-120"/>
+              </a:rPr>
+              <a:t>carry, bring</a:t>
+            </a:r>
+            <a:endParaRPr lang="en-US" sz="850" dirty="0"/>
+          </a:p>
+        </p:txBody>
+      </p:sp>
+      <p:sp>
+        <p:nvSpPr>
+          <p:cNvPr id="25" name="Shape 23"/>
+          <p:cNvSpPr/>
+          <p:nvPr/>
+        </p:nvSpPr>
+        <p:spPr>
+          <a:xfrm>
+            <a:off x="6998818" y="2258568"/>
+            <a:ext cx="1581912" cy="292608"/>
+          </a:xfrm>
+          <a:prstGeom prst="rect">
+            <a:avLst>
+              <a:gd name="adj" fmla="val 25000"/>
+            </a:avLst>
+          </a:prstGeom>
+          <a:solidFill>
+            <a:srgbClr val="FCE7F3"/>
+          </a:solidFill>
+          <a:ln w="19050">
+            <a:solidFill>
+              <a:srgbClr val="DB2777"/>
+            </a:solidFill>
+            <a:prstDash val="solid"/>
+          </a:ln>
+          <a:effectLst>
+            <a:outerShdw sx="100000" sy="100000" kx="0" ky="0" algn="bl" rotWithShape="0" blurRad="101600" dist="38100" dir="8100000">
+              <a:srgbClr val="000000">
+                <a:alpha val="12000"/>
+              </a:srgbClr>
+            </a:outerShdw>
+          </a:effectLst>
+        </p:spPr>
+      </p:sp>
+      <p:sp>
+        <p:nvSpPr>
+          <p:cNvPr id="26" name="Text 24"/>
+          <p:cNvSpPr/>
+          <p:nvPr/>
+        </p:nvSpPr>
+        <p:spPr>
+          <a:xfrm>
+            <a:off x="6998818" y="2258568"/>
+            <a:ext cx="1581912" cy="292608"/>
+          </a:xfrm>
+          <a:prstGeom prst="rect">
+            <a:avLst/>
+          </a:prstGeom>
+          <a:noFill/>
+          <a:ln/>
+        </p:spPr>
+        <p:txBody>
+          <a:bodyPr wrap="square" lIns="0" tIns="0" rIns="0" bIns="0" rtlCol="0" anchor="ctr"/>
+          <a:lstStyle/>
+          <a:p>
+            <a:pPr algn="ctr" indent="0" marL="0">
+              <a:buNone/>
+            </a:pPr>
+            <a:r>
+              <a:rPr lang="en-US" sz="1300" b="1" dirty="0">
+                <a:solidFill>
+                  <a:srgbClr val="9D174D"/>
+                </a:solidFill>
+                <a:latin typeface="Trebuchet MS" pitchFamily="34" charset="0"/>
+                <a:ea typeface="Trebuchet MS" pitchFamily="34" charset="-122"/>
+                <a:cs typeface="Trebuchet MS" pitchFamily="34" charset="-120"/>
+              </a:rPr>
+              <a:t>ed</a:t>
+            </a:r>
+            <a:endParaRPr lang="en-US" sz="1300" dirty="0"/>
+          </a:p>
+        </p:txBody>
+      </p:sp>
+      <p:sp>
+        <p:nvSpPr>
+          <p:cNvPr id="27" name="Text 25"/>
+          <p:cNvSpPr/>
+          <p:nvPr/>
+        </p:nvSpPr>
+        <p:spPr>
+          <a:xfrm>
+            <a:off x="6998818" y="2569464"/>
+            <a:ext cx="1581912" cy="201168"/>
+          </a:xfrm>
+          <a:prstGeom prst="rect">
+            <a:avLst/>
+          </a:prstGeom>
+          <a:noFill/>
+          <a:ln/>
+        </p:spPr>
+        <p:txBody>
+          <a:bodyPr wrap="square" lIns="0" tIns="0" rIns="0" bIns="0" rtlCol="0" anchor="t"/>
+          <a:lstStyle/>
+          <a:p>
+            <a:pPr algn="ctr" indent="0" marL="0">
+              <a:buNone/>
+            </a:pPr>
+            <a:r>
+              <a:rPr lang="en-US" sz="850" dirty="0">
+                <a:solidFill>
+                  <a:srgbClr val="475569"/>
+                </a:solidFill>
+                <a:latin typeface="Calibri" pitchFamily="34" charset="0"/>
+                <a:ea typeface="Calibri" pitchFamily="34" charset="-122"/>
+                <a:cs typeface="Calibri" pitchFamily="34" charset="-120"/>
+              </a:rPr>
+              <a:t>in the past</a:t>
+            </a:r>
+            <a:endParaRPr lang="en-US" sz="850" dirty="0"/>
+          </a:p>
+        </p:txBody>
+      </p:sp>
+      <p:sp>
+        <p:nvSpPr>
+          <p:cNvPr id="28" name="Shape 26"/>
           <p:cNvSpPr/>
           <p:nvPr/>
         </p:nvSpPr>
@@ -32500,7 +34477,7 @@
       </p:sp>
       <p:sp>
         <p:nvSpPr>
-          <p:cNvPr id="20" name="Text 18"/>
+          <p:cNvPr id="29" name="Text 27"/>
           <p:cNvSpPr/>
           <p:nvPr/>
         </p:nvSpPr>
@@ -32539,7 +34516,7 @@
       </p:sp>
       <p:sp>
         <p:nvSpPr>
-          <p:cNvPr id="21" name="Shape 19"/>
+          <p:cNvPr id="30" name="Shape 28"/>
           <p:cNvSpPr/>
           <p:nvPr/>
         </p:nvSpPr>
@@ -32566,13 +34543,13 @@
       </p:sp>
       <p:sp>
         <p:nvSpPr>
-          <p:cNvPr id="22" name="Shape 20"/>
-          <p:cNvSpPr/>
-          <p:nvPr/>
-        </p:nvSpPr>
-        <p:spPr>
-          <a:xfrm>
-            <a:off x="2999232" y="3364992"/>
+          <p:cNvPr id="31" name="Shape 29"/>
+          <p:cNvSpPr/>
+          <p:nvPr/>
+        </p:nvSpPr>
+        <p:spPr>
+          <a:xfrm>
+            <a:off x="2313432" y="3364992"/>
             <a:ext cx="1645920" cy="475488"/>
           </a:xfrm>
           <a:prstGeom prst="rect">
@@ -32593,13 +34570,13 @@
       </p:sp>
       <p:sp>
         <p:nvSpPr>
-          <p:cNvPr id="23" name="Text 21"/>
-          <p:cNvSpPr/>
-          <p:nvPr/>
-        </p:nvSpPr>
-        <p:spPr>
-          <a:xfrm>
-            <a:off x="2999232" y="3364992"/>
+          <p:cNvPr id="32" name="Text 30"/>
+          <p:cNvSpPr/>
+          <p:nvPr/>
+        </p:nvSpPr>
+        <p:spPr>
+          <a:xfrm>
+            <a:off x="2313432" y="3364992"/>
             <a:ext cx="1645920" cy="475488"/>
           </a:xfrm>
           <a:prstGeom prst="rect">
@@ -32624,7 +34601,7 @@
                 <a:ea typeface="Trebuchet MS" pitchFamily="34" charset="-122"/>
                 <a:cs typeface="Trebuchet MS" pitchFamily="34" charset="-120"/>
               </a:rPr>
-              <a:t>re</a:t>
+              <a:t>self-re</a:t>
             </a:r>
             <a:endParaRPr lang="en-US" sz="1400" dirty="0"/>
           </a:p>
@@ -32632,14 +34609,14 @@
       </p:sp>
       <p:sp>
         <p:nvSpPr>
-          <p:cNvPr id="24" name="Text 22"/>
-          <p:cNvSpPr/>
-          <p:nvPr/>
-        </p:nvSpPr>
-        <p:spPr>
-          <a:xfrm>
-            <a:off x="4645152" y="3364992"/>
-            <a:ext cx="1097280" cy="475488"/>
+          <p:cNvPr id="33" name="Text 31"/>
+          <p:cNvSpPr/>
+          <p:nvPr/>
+        </p:nvSpPr>
+        <p:spPr>
+          <a:xfrm>
+            <a:off x="3959352" y="3364992"/>
+            <a:ext cx="411480" cy="475488"/>
           </a:xfrm>
           <a:prstGeom prst="rect">
             <a:avLst/>
@@ -32671,13 +34648,13 @@
       </p:sp>
       <p:sp>
         <p:nvSpPr>
-          <p:cNvPr id="25" name="Shape 23"/>
-          <p:cNvSpPr/>
-          <p:nvPr/>
-        </p:nvSpPr>
-        <p:spPr>
-          <a:xfrm>
-            <a:off x="5742432" y="3364992"/>
+          <p:cNvPr id="34" name="Shape 32"/>
+          <p:cNvSpPr/>
+          <p:nvPr/>
+        </p:nvSpPr>
+        <p:spPr>
+          <a:xfrm>
+            <a:off x="4370832" y="3364992"/>
             <a:ext cx="1645920" cy="475488"/>
           </a:xfrm>
           <a:prstGeom prst="rect">
@@ -32698,13 +34675,13 @@
       </p:sp>
       <p:sp>
         <p:nvSpPr>
-          <p:cNvPr id="26" name="Text 24"/>
-          <p:cNvSpPr/>
-          <p:nvPr/>
-        </p:nvSpPr>
-        <p:spPr>
-          <a:xfrm>
-            <a:off x="5742432" y="3364992"/>
+          <p:cNvPr id="35" name="Text 33"/>
+          <p:cNvSpPr/>
+          <p:nvPr/>
+        </p:nvSpPr>
+        <p:spPr>
+          <a:xfrm>
+            <a:off x="4370832" y="3364992"/>
             <a:ext cx="1645920" cy="475488"/>
           </a:xfrm>
           <a:prstGeom prst="rect">
@@ -32737,7 +34714,112 @@
       </p:sp>
       <p:sp>
         <p:nvSpPr>
-          <p:cNvPr id="27" name="Shape 25"/>
+          <p:cNvPr id="36" name="Text 34"/>
+          <p:cNvSpPr/>
+          <p:nvPr/>
+        </p:nvSpPr>
+        <p:spPr>
+          <a:xfrm>
+            <a:off x="6016752" y="3364992"/>
+            <a:ext cx="411480" cy="475488"/>
+          </a:xfrm>
+          <a:prstGeom prst="rect">
+            <a:avLst/>
+          </a:prstGeom>
+          <a:noFill/>
+          <a:ln/>
+        </p:spPr>
+        <p:txBody>
+          <a:bodyPr wrap="square" lIns="0" tIns="0" rIns="0" bIns="0" rtlCol="0" anchor="ctr"/>
+          <a:lstStyle/>
+          <a:p>
+            <a:pPr algn="ctr" indent="0" marL="0">
+              <a:buNone/>
+            </a:pPr>
+            <a:r>
+              <a:rPr lang="en-US" sz="1600" b="1" dirty="0">
+                <a:solidFill>
+                  <a:srgbClr val="0D9488"/>
+                </a:solidFill>
+                <a:latin typeface="Trebuchet MS" pitchFamily="34" charset="0"/>
+                <a:ea typeface="Trebuchet MS" pitchFamily="34" charset="-122"/>
+                <a:cs typeface="Trebuchet MS" pitchFamily="34" charset="-120"/>
+              </a:rPr>
+              <a:t>·</a:t>
+            </a:r>
+            <a:endParaRPr lang="en-US" sz="1600" dirty="0"/>
+          </a:p>
+        </p:txBody>
+      </p:sp>
+      <p:sp>
+        <p:nvSpPr>
+          <p:cNvPr id="37" name="Shape 35"/>
+          <p:cNvSpPr/>
+          <p:nvPr/>
+        </p:nvSpPr>
+        <p:spPr>
+          <a:xfrm>
+            <a:off x="6428232" y="3364992"/>
+            <a:ext cx="1645920" cy="475488"/>
+          </a:xfrm>
+          <a:prstGeom prst="rect">
+            <a:avLst>
+              <a:gd name="adj" fmla="val 9615"/>
+            </a:avLst>
+          </a:prstGeom>
+          <a:solidFill>
+            <a:srgbClr val="FFFFFF"/>
+          </a:solidFill>
+          <a:ln w="12700">
+            <a:solidFill>
+              <a:srgbClr val="0D9488"/>
+            </a:solidFill>
+            <a:prstDash val="solid"/>
+          </a:ln>
+        </p:spPr>
+      </p:sp>
+      <p:sp>
+        <p:nvSpPr>
+          <p:cNvPr id="38" name="Text 36"/>
+          <p:cNvSpPr/>
+          <p:nvPr/>
+        </p:nvSpPr>
+        <p:spPr>
+          <a:xfrm>
+            <a:off x="6428232" y="3364992"/>
+            <a:ext cx="1645920" cy="475488"/>
+          </a:xfrm>
+          <a:prstGeom prst="rect">
+            <a:avLst/>
+          </a:prstGeom>
+          <a:noFill/>
+          <a:ln/>
+        </p:spPr>
+        <p:txBody>
+          <a:bodyPr wrap="square" lIns="0" tIns="0" rIns="0" bIns="0" rtlCol="0" anchor="ctr"/>
+          <a:lstStyle/>
+          <a:p>
+            <a:pPr algn="ctr" indent="0" marL="0">
+              <a:buNone/>
+            </a:pPr>
+            <a:r>
+              <a:rPr lang="en-US" sz="1400" b="1" dirty="0">
+                <a:solidFill>
+                  <a:srgbClr val="0D9488"/>
+                </a:solidFill>
+                <a:latin typeface="Trebuchet MS" pitchFamily="34" charset="0"/>
+                <a:ea typeface="Trebuchet MS" pitchFamily="34" charset="-122"/>
+                <a:cs typeface="Trebuchet MS" pitchFamily="34" charset="-120"/>
+              </a:rPr>
+              <a:t>ed</a:t>
+            </a:r>
+            <a:endParaRPr lang="en-US" sz="1400" dirty="0"/>
+          </a:p>
+        </p:txBody>
+      </p:sp>
+      <p:sp>
+        <p:nvSpPr>
+          <p:cNvPr id="39" name="Shape 37"/>
           <p:cNvSpPr/>
           <p:nvPr/>
         </p:nvSpPr>
@@ -32764,7 +34846,7 @@
       </p:sp>
       <p:sp>
         <p:nvSpPr>
-          <p:cNvPr id="28" name="Text 26"/>
+          <p:cNvPr id="40" name="Text 38"/>
           <p:cNvSpPr/>
           <p:nvPr/>
         </p:nvSpPr>
@@ -32803,7 +34885,7 @@
       </p:sp>
       <p:sp>
         <p:nvSpPr>
-          <p:cNvPr id="29" name="Shape 27"/>
+          <p:cNvPr id="41" name="Shape 39"/>
           <p:cNvSpPr/>
           <p:nvPr/>
         </p:nvSpPr>
@@ -32830,14 +34912,14 @@
       </p:sp>
       <p:sp>
         <p:nvSpPr>
-          <p:cNvPr id="30" name="Shape 28"/>
-          <p:cNvSpPr/>
-          <p:nvPr/>
-        </p:nvSpPr>
-        <p:spPr>
-          <a:xfrm>
-            <a:off x="2427732" y="4169664"/>
-            <a:ext cx="685800" cy="475488"/>
+          <p:cNvPr id="42" name="Shape 40"/>
+          <p:cNvSpPr/>
+          <p:nvPr/>
+        </p:nvSpPr>
+        <p:spPr>
+          <a:xfrm>
+            <a:off x="1952244" y="4169664"/>
+            <a:ext cx="543652" cy="475488"/>
           </a:xfrm>
           <a:prstGeom prst="rect">
             <a:avLst>
@@ -32857,14 +34939,14 @@
       </p:sp>
       <p:sp>
         <p:nvSpPr>
-          <p:cNvPr id="31" name="Text 29"/>
-          <p:cNvSpPr/>
-          <p:nvPr/>
-        </p:nvSpPr>
-        <p:spPr>
-          <a:xfrm>
-            <a:off x="2427732" y="4169664"/>
-            <a:ext cx="685800" cy="475488"/>
+          <p:cNvPr id="43" name="Text 41"/>
+          <p:cNvSpPr/>
+          <p:nvPr/>
+        </p:nvSpPr>
+        <p:spPr>
+          <a:xfrm>
+            <a:off x="1952244" y="4169664"/>
+            <a:ext cx="543652" cy="475488"/>
           </a:xfrm>
           <a:prstGeom prst="rect">
             <a:avLst/>
@@ -32888,7 +34970,7 @@
                 <a:ea typeface="Trebuchet MS" pitchFamily="34" charset="-122"/>
                 <a:cs typeface="Trebuchet MS" pitchFamily="34" charset="-120"/>
               </a:rPr>
-              <a:t>r</a:t>
+              <a:t>s</a:t>
             </a:r>
             <a:endParaRPr lang="en-US" sz="900" dirty="0"/>
           </a:p>
@@ -32896,14 +34978,14 @@
       </p:sp>
       <p:sp>
         <p:nvSpPr>
-          <p:cNvPr id="32" name="Shape 30"/>
-          <p:cNvSpPr/>
-          <p:nvPr/>
-        </p:nvSpPr>
-        <p:spPr>
-          <a:xfrm>
-            <a:off x="3639312" y="4169664"/>
-            <a:ext cx="685800" cy="475488"/>
+          <p:cNvPr id="44" name="Shape 42"/>
+          <p:cNvSpPr/>
+          <p:nvPr/>
+        </p:nvSpPr>
+        <p:spPr>
+          <a:xfrm>
+            <a:off x="2546188" y="4169664"/>
+            <a:ext cx="543652" cy="475488"/>
           </a:xfrm>
           <a:prstGeom prst="rect">
             <a:avLst>
@@ -32923,14 +35005,14 @@
       </p:sp>
       <p:sp>
         <p:nvSpPr>
-          <p:cNvPr id="33" name="Text 31"/>
-          <p:cNvSpPr/>
-          <p:nvPr/>
-        </p:nvSpPr>
-        <p:spPr>
-          <a:xfrm>
-            <a:off x="3639312" y="4169664"/>
-            <a:ext cx="685800" cy="475488"/>
+          <p:cNvPr id="45" name="Text 43"/>
+          <p:cNvSpPr/>
+          <p:nvPr/>
+        </p:nvSpPr>
+        <p:spPr>
+          <a:xfrm>
+            <a:off x="2546188" y="4169664"/>
+            <a:ext cx="543652" cy="475488"/>
           </a:xfrm>
           <a:prstGeom prst="rect">
             <a:avLst/>
@@ -32962,14 +35044,14 @@
       </p:sp>
       <p:sp>
         <p:nvSpPr>
-          <p:cNvPr id="34" name="Shape 32"/>
-          <p:cNvSpPr/>
-          <p:nvPr/>
-        </p:nvSpPr>
-        <p:spPr>
-          <a:xfrm>
-            <a:off x="4850892" y="4169664"/>
-            <a:ext cx="685800" cy="475488"/>
+          <p:cNvPr id="46" name="Shape 44"/>
+          <p:cNvSpPr/>
+          <p:nvPr/>
+        </p:nvSpPr>
+        <p:spPr>
+          <a:xfrm>
+            <a:off x="3140133" y="4169664"/>
+            <a:ext cx="543652" cy="475488"/>
           </a:xfrm>
           <a:prstGeom prst="rect">
             <a:avLst>
@@ -32989,14 +35071,14 @@
       </p:sp>
       <p:sp>
         <p:nvSpPr>
-          <p:cNvPr id="35" name="Text 33"/>
-          <p:cNvSpPr/>
-          <p:nvPr/>
-        </p:nvSpPr>
-        <p:spPr>
-          <a:xfrm>
-            <a:off x="4850892" y="4169664"/>
-            <a:ext cx="685800" cy="475488"/>
+          <p:cNvPr id="47" name="Text 45"/>
+          <p:cNvSpPr/>
+          <p:nvPr/>
+        </p:nvSpPr>
+        <p:spPr>
+          <a:xfrm>
+            <a:off x="3140133" y="4169664"/>
+            <a:ext cx="543652" cy="475488"/>
           </a:xfrm>
           <a:prstGeom prst="rect">
             <a:avLst/>
@@ -33020,7 +35102,7 @@
                 <a:ea typeface="Trebuchet MS" pitchFamily="34" charset="-122"/>
                 <a:cs typeface="Trebuchet MS" pitchFamily="34" charset="-120"/>
               </a:rPr>
-              <a:t>p</a:t>
+              <a:t>l</a:t>
             </a:r>
             <a:endParaRPr lang="en-US" sz="900" dirty="0"/>
           </a:p>
@@ -33028,14 +35110,14 @@
       </p:sp>
       <p:sp>
         <p:nvSpPr>
-          <p:cNvPr id="36" name="Shape 34"/>
-          <p:cNvSpPr/>
-          <p:nvPr/>
-        </p:nvSpPr>
-        <p:spPr>
-          <a:xfrm>
-            <a:off x="6062472" y="4169664"/>
-            <a:ext cx="685800" cy="475488"/>
+          <p:cNvPr id="48" name="Shape 46"/>
+          <p:cNvSpPr/>
+          <p:nvPr/>
+        </p:nvSpPr>
+        <p:spPr>
+          <a:xfrm>
+            <a:off x="3734077" y="4169664"/>
+            <a:ext cx="543652" cy="475488"/>
           </a:xfrm>
           <a:prstGeom prst="rect">
             <a:avLst>
@@ -33055,14 +35137,14 @@
       </p:sp>
       <p:sp>
         <p:nvSpPr>
-          <p:cNvPr id="37" name="Text 35"/>
-          <p:cNvSpPr/>
-          <p:nvPr/>
-        </p:nvSpPr>
-        <p:spPr>
-          <a:xfrm>
-            <a:off x="6062472" y="4169664"/>
-            <a:ext cx="685800" cy="475488"/>
+          <p:cNvPr id="49" name="Text 47"/>
+          <p:cNvSpPr/>
+          <p:nvPr/>
+        </p:nvSpPr>
+        <p:spPr>
+          <a:xfrm>
+            <a:off x="3734077" y="4169664"/>
+            <a:ext cx="543652" cy="475488"/>
           </a:xfrm>
           <a:prstGeom prst="rect">
             <a:avLst/>
@@ -33086,7 +35168,7 @@
                 <a:ea typeface="Trebuchet MS" pitchFamily="34" charset="-122"/>
                 <a:cs typeface="Trebuchet MS" pitchFamily="34" charset="-120"/>
               </a:rPr>
-              <a:t>or</a:t>
+              <a:t>f</a:t>
             </a:r>
             <a:endParaRPr lang="en-US" sz="900" dirty="0"/>
           </a:p>
@@ -33094,14 +35176,14 @@
       </p:sp>
       <p:sp>
         <p:nvSpPr>
-          <p:cNvPr id="38" name="Shape 36"/>
-          <p:cNvSpPr/>
-          <p:nvPr/>
-        </p:nvSpPr>
-        <p:spPr>
-          <a:xfrm>
-            <a:off x="7274052" y="4169664"/>
-            <a:ext cx="685800" cy="475488"/>
+          <p:cNvPr id="50" name="Shape 48"/>
+          <p:cNvSpPr/>
+          <p:nvPr/>
+        </p:nvSpPr>
+        <p:spPr>
+          <a:xfrm>
+            <a:off x="4328021" y="4169664"/>
+            <a:ext cx="543652" cy="475488"/>
           </a:xfrm>
           <a:prstGeom prst="rect">
             <a:avLst>
@@ -33121,14 +35203,14 @@
       </p:sp>
       <p:sp>
         <p:nvSpPr>
-          <p:cNvPr id="39" name="Text 37"/>
-          <p:cNvSpPr/>
-          <p:nvPr/>
-        </p:nvSpPr>
-        <p:spPr>
-          <a:xfrm>
-            <a:off x="7274052" y="4169664"/>
-            <a:ext cx="685800" cy="475488"/>
+          <p:cNvPr id="51" name="Text 49"/>
+          <p:cNvSpPr/>
+          <p:nvPr/>
+        </p:nvSpPr>
+        <p:spPr>
+          <a:xfrm>
+            <a:off x="4328021" y="4169664"/>
+            <a:ext cx="543652" cy="475488"/>
           </a:xfrm>
           <a:prstGeom prst="rect">
             <a:avLst/>
@@ -33152,7 +35234,403 @@
                 <a:ea typeface="Trebuchet MS" pitchFamily="34" charset="-122"/>
                 <a:cs typeface="Trebuchet MS" pitchFamily="34" charset="-120"/>
               </a:rPr>
+              <a:t>r</a:t>
+            </a:r>
+            <a:endParaRPr lang="en-US" sz="900" dirty="0"/>
+          </a:p>
+        </p:txBody>
+      </p:sp>
+      <p:sp>
+        <p:nvSpPr>
+          <p:cNvPr id="52" name="Shape 50"/>
+          <p:cNvSpPr/>
+          <p:nvPr/>
+        </p:nvSpPr>
+        <p:spPr>
+          <a:xfrm>
+            <a:off x="4921966" y="4169664"/>
+            <a:ext cx="543652" cy="475488"/>
+          </a:xfrm>
+          <a:prstGeom prst="rect">
+            <a:avLst>
+              <a:gd name="adj" fmla="val 7692"/>
+            </a:avLst>
+          </a:prstGeom>
+          <a:solidFill>
+            <a:srgbClr val="FFFFFF"/>
+          </a:solidFill>
+          <a:ln w="12700">
+            <a:solidFill>
+              <a:srgbClr val="DB2777"/>
+            </a:solidFill>
+            <a:prstDash val="solid"/>
+          </a:ln>
+        </p:spPr>
+      </p:sp>
+      <p:sp>
+        <p:nvSpPr>
+          <p:cNvPr id="53" name="Text 51"/>
+          <p:cNvSpPr/>
+          <p:nvPr/>
+        </p:nvSpPr>
+        <p:spPr>
+          <a:xfrm>
+            <a:off x="4921966" y="4169664"/>
+            <a:ext cx="543652" cy="475488"/>
+          </a:xfrm>
+          <a:prstGeom prst="rect">
+            <a:avLst/>
+          </a:prstGeom>
+          <a:noFill/>
+          <a:ln/>
+        </p:spPr>
+        <p:txBody>
+          <a:bodyPr wrap="square" lIns="0" tIns="0" rIns="0" bIns="0" rtlCol="0" anchor="ctr"/>
+          <a:lstStyle/>
+          <a:p>
+            <a:pPr algn="ctr" indent="0" marL="0">
+              <a:buNone/>
+            </a:pPr>
+            <a:r>
+              <a:rPr lang="en-US" sz="900" b="1" dirty="0">
+                <a:solidFill>
+                  <a:srgbClr val="9D174D"/>
+                </a:solidFill>
+                <a:latin typeface="Trebuchet MS" pitchFamily="34" charset="0"/>
+                <a:ea typeface="Trebuchet MS" pitchFamily="34" charset="-122"/>
+                <a:cs typeface="Trebuchet MS" pitchFamily="34" charset="-120"/>
+              </a:rPr>
+              <a:t>e</a:t>
+            </a:r>
+            <a:endParaRPr lang="en-US" sz="900" dirty="0"/>
+          </a:p>
+        </p:txBody>
+      </p:sp>
+      <p:sp>
+        <p:nvSpPr>
+          <p:cNvPr id="54" name="Shape 52"/>
+          <p:cNvSpPr/>
+          <p:nvPr/>
+        </p:nvSpPr>
+        <p:spPr>
+          <a:xfrm>
+            <a:off x="5515910" y="4169664"/>
+            <a:ext cx="543652" cy="475488"/>
+          </a:xfrm>
+          <a:prstGeom prst="rect">
+            <a:avLst>
+              <a:gd name="adj" fmla="val 7692"/>
+            </a:avLst>
+          </a:prstGeom>
+          <a:solidFill>
+            <a:srgbClr val="FFFFFF"/>
+          </a:solidFill>
+          <a:ln w="12700">
+            <a:solidFill>
+              <a:srgbClr val="DB2777"/>
+            </a:solidFill>
+            <a:prstDash val="solid"/>
+          </a:ln>
+        </p:spPr>
+      </p:sp>
+      <p:sp>
+        <p:nvSpPr>
+          <p:cNvPr id="55" name="Text 53"/>
+          <p:cNvSpPr/>
+          <p:nvPr/>
+        </p:nvSpPr>
+        <p:spPr>
+          <a:xfrm>
+            <a:off x="5515910" y="4169664"/>
+            <a:ext cx="543652" cy="475488"/>
+          </a:xfrm>
+          <a:prstGeom prst="rect">
+            <a:avLst/>
+          </a:prstGeom>
+          <a:noFill/>
+          <a:ln/>
+        </p:spPr>
+        <p:txBody>
+          <a:bodyPr wrap="square" lIns="0" tIns="0" rIns="0" bIns="0" rtlCol="0" anchor="ctr"/>
+          <a:lstStyle/>
+          <a:p>
+            <a:pPr algn="ctr" indent="0" marL="0">
+              <a:buNone/>
+            </a:pPr>
+            <a:r>
+              <a:rPr lang="en-US" sz="900" b="1" dirty="0">
+                <a:solidFill>
+                  <a:srgbClr val="9D174D"/>
+                </a:solidFill>
+                <a:latin typeface="Trebuchet MS" pitchFamily="34" charset="0"/>
+                <a:ea typeface="Trebuchet MS" pitchFamily="34" charset="-122"/>
+                <a:cs typeface="Trebuchet MS" pitchFamily="34" charset="-120"/>
+              </a:rPr>
+              <a:t>p</a:t>
+            </a:r>
+            <a:endParaRPr lang="en-US" sz="900" dirty="0"/>
+          </a:p>
+        </p:txBody>
+      </p:sp>
+      <p:sp>
+        <p:nvSpPr>
+          <p:cNvPr id="56" name="Shape 54"/>
+          <p:cNvSpPr/>
+          <p:nvPr/>
+        </p:nvSpPr>
+        <p:spPr>
+          <a:xfrm>
+            <a:off x="6109855" y="4169664"/>
+            <a:ext cx="543652" cy="475488"/>
+          </a:xfrm>
+          <a:prstGeom prst="rect">
+            <a:avLst>
+              <a:gd name="adj" fmla="val 7692"/>
+            </a:avLst>
+          </a:prstGeom>
+          <a:solidFill>
+            <a:srgbClr val="FFFFFF"/>
+          </a:solidFill>
+          <a:ln w="12700">
+            <a:solidFill>
+              <a:srgbClr val="DB2777"/>
+            </a:solidFill>
+            <a:prstDash val="solid"/>
+          </a:ln>
+        </p:spPr>
+      </p:sp>
+      <p:sp>
+        <p:nvSpPr>
+          <p:cNvPr id="57" name="Text 55"/>
+          <p:cNvSpPr/>
+          <p:nvPr/>
+        </p:nvSpPr>
+        <p:spPr>
+          <a:xfrm>
+            <a:off x="6109855" y="4169664"/>
+            <a:ext cx="543652" cy="475488"/>
+          </a:xfrm>
+          <a:prstGeom prst="rect">
+            <a:avLst/>
+          </a:prstGeom>
+          <a:noFill/>
+          <a:ln/>
+        </p:spPr>
+        <p:txBody>
+          <a:bodyPr wrap="square" lIns="0" tIns="0" rIns="0" bIns="0" rtlCol="0" anchor="ctr"/>
+          <a:lstStyle/>
+          <a:p>
+            <a:pPr algn="ctr" indent="0" marL="0">
+              <a:buNone/>
+            </a:pPr>
+            <a:r>
+              <a:rPr lang="en-US" sz="900" b="1" dirty="0">
+                <a:solidFill>
+                  <a:srgbClr val="9D174D"/>
+                </a:solidFill>
+                <a:latin typeface="Trebuchet MS" pitchFamily="34" charset="0"/>
+                <a:ea typeface="Trebuchet MS" pitchFamily="34" charset="-122"/>
+                <a:cs typeface="Trebuchet MS" pitchFamily="34" charset="-120"/>
+              </a:rPr>
+              <a:t>or</a:t>
+            </a:r>
+            <a:endParaRPr lang="en-US" sz="900" dirty="0"/>
+          </a:p>
+        </p:txBody>
+      </p:sp>
+      <p:sp>
+        <p:nvSpPr>
+          <p:cNvPr id="58" name="Shape 56"/>
+          <p:cNvSpPr/>
+          <p:nvPr/>
+        </p:nvSpPr>
+        <p:spPr>
+          <a:xfrm>
+            <a:off x="6703799" y="4169664"/>
+            <a:ext cx="543652" cy="475488"/>
+          </a:xfrm>
+          <a:prstGeom prst="rect">
+            <a:avLst>
+              <a:gd name="adj" fmla="val 7692"/>
+            </a:avLst>
+          </a:prstGeom>
+          <a:solidFill>
+            <a:srgbClr val="FFFFFF"/>
+          </a:solidFill>
+          <a:ln w="12700">
+            <a:solidFill>
+              <a:srgbClr val="DB2777"/>
+            </a:solidFill>
+            <a:prstDash val="solid"/>
+          </a:ln>
+        </p:spPr>
+      </p:sp>
+      <p:sp>
+        <p:nvSpPr>
+          <p:cNvPr id="59" name="Text 57"/>
+          <p:cNvSpPr/>
+          <p:nvPr/>
+        </p:nvSpPr>
+        <p:spPr>
+          <a:xfrm>
+            <a:off x="6703799" y="4169664"/>
+            <a:ext cx="543652" cy="475488"/>
+          </a:xfrm>
+          <a:prstGeom prst="rect">
+            <a:avLst/>
+          </a:prstGeom>
+          <a:noFill/>
+          <a:ln/>
+        </p:spPr>
+        <p:txBody>
+          <a:bodyPr wrap="square" lIns="0" tIns="0" rIns="0" bIns="0" rtlCol="0" anchor="ctr"/>
+          <a:lstStyle/>
+          <a:p>
+            <a:pPr algn="ctr" indent="0" marL="0">
+              <a:buNone/>
+            </a:pPr>
+            <a:r>
+              <a:rPr lang="en-US" sz="900" b="1" dirty="0">
+                <a:solidFill>
+                  <a:srgbClr val="9D174D"/>
+                </a:solidFill>
+                <a:latin typeface="Trebuchet MS" pitchFamily="34" charset="0"/>
+                <a:ea typeface="Trebuchet MS" pitchFamily="34" charset="-122"/>
+                <a:cs typeface="Trebuchet MS" pitchFamily="34" charset="-120"/>
+              </a:rPr>
               <a:t>t</a:t>
+            </a:r>
+            <a:endParaRPr lang="en-US" sz="900" dirty="0"/>
+          </a:p>
+        </p:txBody>
+      </p:sp>
+      <p:sp>
+        <p:nvSpPr>
+          <p:cNvPr id="60" name="Shape 58"/>
+          <p:cNvSpPr/>
+          <p:nvPr/>
+        </p:nvSpPr>
+        <p:spPr>
+          <a:xfrm>
+            <a:off x="7297743" y="4169664"/>
+            <a:ext cx="543652" cy="475488"/>
+          </a:xfrm>
+          <a:prstGeom prst="rect">
+            <a:avLst>
+              <a:gd name="adj" fmla="val 7692"/>
+            </a:avLst>
+          </a:prstGeom>
+          <a:solidFill>
+            <a:srgbClr val="FFFFFF"/>
+          </a:solidFill>
+          <a:ln w="12700">
+            <a:solidFill>
+              <a:srgbClr val="DB2777"/>
+            </a:solidFill>
+            <a:prstDash val="solid"/>
+          </a:ln>
+        </p:spPr>
+      </p:sp>
+      <p:sp>
+        <p:nvSpPr>
+          <p:cNvPr id="61" name="Text 59"/>
+          <p:cNvSpPr/>
+          <p:nvPr/>
+        </p:nvSpPr>
+        <p:spPr>
+          <a:xfrm>
+            <a:off x="7297743" y="4169664"/>
+            <a:ext cx="543652" cy="475488"/>
+          </a:xfrm>
+          <a:prstGeom prst="rect">
+            <a:avLst/>
+          </a:prstGeom>
+          <a:noFill/>
+          <a:ln/>
+        </p:spPr>
+        <p:txBody>
+          <a:bodyPr wrap="square" lIns="0" tIns="0" rIns="0" bIns="0" rtlCol="0" anchor="ctr"/>
+          <a:lstStyle/>
+          <a:p>
+            <a:pPr algn="ctr" indent="0" marL="0">
+              <a:buNone/>
+            </a:pPr>
+            <a:r>
+              <a:rPr lang="en-US" sz="900" b="1" dirty="0">
+                <a:solidFill>
+                  <a:srgbClr val="9D174D"/>
+                </a:solidFill>
+                <a:latin typeface="Trebuchet MS" pitchFamily="34" charset="0"/>
+                <a:ea typeface="Trebuchet MS" pitchFamily="34" charset="-122"/>
+                <a:cs typeface="Trebuchet MS" pitchFamily="34" charset="-120"/>
+              </a:rPr>
+              <a:t>e</a:t>
+            </a:r>
+            <a:endParaRPr lang="en-US" sz="900" dirty="0"/>
+          </a:p>
+        </p:txBody>
+      </p:sp>
+      <p:sp>
+        <p:nvSpPr>
+          <p:cNvPr id="62" name="Shape 60"/>
+          <p:cNvSpPr/>
+          <p:nvPr/>
+        </p:nvSpPr>
+        <p:spPr>
+          <a:xfrm>
+            <a:off x="7891688" y="4169664"/>
+            <a:ext cx="543652" cy="475488"/>
+          </a:xfrm>
+          <a:prstGeom prst="rect">
+            <a:avLst>
+              <a:gd name="adj" fmla="val 7692"/>
+            </a:avLst>
+          </a:prstGeom>
+          <a:solidFill>
+            <a:srgbClr val="FFFFFF"/>
+          </a:solidFill>
+          <a:ln w="12700">
+            <a:solidFill>
+              <a:srgbClr val="DB2777"/>
+            </a:solidFill>
+            <a:prstDash val="solid"/>
+          </a:ln>
+        </p:spPr>
+      </p:sp>
+      <p:sp>
+        <p:nvSpPr>
+          <p:cNvPr id="63" name="Text 61"/>
+          <p:cNvSpPr/>
+          <p:nvPr/>
+        </p:nvSpPr>
+        <p:spPr>
+          <a:xfrm>
+            <a:off x="7891688" y="4169664"/>
+            <a:ext cx="543652" cy="475488"/>
+          </a:xfrm>
+          <a:prstGeom prst="rect">
+            <a:avLst/>
+          </a:prstGeom>
+          <a:noFill/>
+          <a:ln/>
+        </p:spPr>
+        <p:txBody>
+          <a:bodyPr wrap="square" lIns="0" tIns="0" rIns="0" bIns="0" rtlCol="0" anchor="ctr"/>
+          <a:lstStyle/>
+          <a:p>
+            <a:pPr algn="ctr" indent="0" marL="0">
+              <a:buNone/>
+            </a:pPr>
+            <a:r>
+              <a:rPr lang="en-US" sz="900" b="1" dirty="0">
+                <a:solidFill>
+                  <a:srgbClr val="9D174D"/>
+                </a:solidFill>
+                <a:latin typeface="Trebuchet MS" pitchFamily="34" charset="0"/>
+                <a:ea typeface="Trebuchet MS" pitchFamily="34" charset="-122"/>
+                <a:cs typeface="Trebuchet MS" pitchFamily="34" charset="-120"/>
+              </a:rPr>
+              <a:t>d</a:t>
             </a:r>
             <a:endParaRPr lang="en-US" sz="900" dirty="0"/>
           </a:p>
@@ -35501,7 +37979,7 @@
                 <a:ea typeface="Trebuchet MS" pitchFamily="34" charset="-122"/>
                 <a:cs typeface="Trebuchet MS" pitchFamily="34" charset="-120"/>
               </a:rPr>
-              <a:t>-s</a:t>
+              <a:t>-age</a:t>
             </a:r>
             <a:endParaRPr lang="en-US" sz="1300" dirty="0"/>
           </a:p>
@@ -35654,7 +38132,7 @@
                 <a:ea typeface="Trebuchet MS" pitchFamily="34" charset="-122"/>
                 <a:cs typeface="Trebuchet MS" pitchFamily="34" charset="-120"/>
               </a:rPr>
-              <a:t>-age</a:t>
+              <a:t>-able</a:t>
             </a:r>
             <a:endParaRPr lang="en-US" sz="1300" dirty="0"/>
           </a:p>
@@ -36023,7 +38501,7 @@
                 <a:ea typeface="Trebuchet MS" pitchFamily="34" charset="-122"/>
                 <a:cs typeface="Trebuchet MS" pitchFamily="34" charset="-120"/>
               </a:rPr>
-              <a:t>reports</a:t>
+              <a:t>unreported</a:t>
             </a:r>
             <a:endParaRPr lang="en-US" sz="1200" dirty="0"/>
           </a:p>
@@ -36089,7 +38567,7 @@
                 <a:ea typeface="Trebuchet MS" pitchFamily="34" charset="-122"/>
                 <a:cs typeface="Trebuchet MS" pitchFamily="34" charset="-120"/>
               </a:rPr>
-              <a:t>unreported</a:t>
+              <a:t>misreport</a:t>
             </a:r>
             <a:endParaRPr lang="en-US" sz="1200" dirty="0"/>
           </a:p>
@@ -36155,7 +38633,7 @@
                 <a:ea typeface="Trebuchet MS" pitchFamily="34" charset="-122"/>
                 <a:cs typeface="Trebuchet MS" pitchFamily="34" charset="-120"/>
               </a:rPr>
-              <a:t>misreported</a:t>
+              <a:t>reportage</a:t>
             </a:r>
             <a:endParaRPr lang="en-US" sz="1200" dirty="0"/>
           </a:p>
@@ -37409,7 +39887,7 @@
                 <a:ea typeface="Calibri" pitchFamily="34" charset="-122"/>
                 <a:cs typeface="Calibri" pitchFamily="34" charset="-120"/>
               </a:rPr>
-              <a:t>1.  The word 'reporter' contains the root 'report'.</a:t>
+              <a:t>1.  The root 'report' comes from the Greek language.</a:t>
             </a:r>
             <a:endParaRPr lang="en-US" sz="1300" dirty="0"/>
           </a:p>
@@ -37432,11 +39910,11 @@
             </a:avLst>
           </a:prstGeom>
           <a:solidFill>
-            <a:srgbClr val="DCFCE7"/>
-          </a:solidFill>
-          <a:ln w="12700">
-            <a:solidFill>
-              <a:srgbClr val="16A34A"/>
+            <a:srgbClr val="FEE2E2"/>
+          </a:solidFill>
+          <a:ln w="12700">
+            <a:solidFill>
+              <a:srgbClr val="DC2626"/>
             </a:solidFill>
             <a:prstDash val="solid"/>
           </a:ln>
@@ -37469,13 +39947,13 @@
             <a:r>
               <a:rPr lang="en-US" sz="1100" b="1" dirty="0">
                 <a:solidFill>
-                  <a:srgbClr val="16A34A"/>
+                  <a:srgbClr val="DC2626"/>
                 </a:solidFill>
                 <a:latin typeface="Trebuchet MS" pitchFamily="34" charset="0"/>
                 <a:ea typeface="Trebuchet MS" pitchFamily="34" charset="-122"/>
                 <a:cs typeface="Trebuchet MS" pitchFamily="34" charset="-120"/>
               </a:rPr>
-              <a:t>TRUE</a:t>
+              <a:t>FALSE</a:t>
             </a:r>
             <a:endParaRPr lang="en-US" sz="1100" dirty="0"/>
           </a:p>
@@ -37548,7 +40026,7 @@
                 <a:ea typeface="Calibri" pitchFamily="34" charset="-122"/>
                 <a:cs typeface="Calibri" pitchFamily="34" charset="-120"/>
               </a:rPr>
-              <a:t>2.  The root 'report' comes from the Greek language.</a:t>
+              <a:t>2.  The word 'unreported' means something that has been told to everyone.</a:t>
             </a:r>
             <a:endParaRPr lang="en-US" sz="1300" dirty="0"/>
           </a:p>
@@ -37687,7 +40165,7 @@
                 <a:ea typeface="Calibri" pitchFamily="34" charset="-122"/>
                 <a:cs typeface="Calibri" pitchFamily="34" charset="-120"/>
               </a:rPr>
-              <a:t>3.  A reporter is someone who shares news and information with others.</a:t>
+              <a:t>3.  The word 'misreport' means to share incorrect information about something.</a:t>
             </a:r>
             <a:endParaRPr lang="en-US" sz="1300" dirty="0"/>
           </a:p>
@@ -37826,7 +40304,7 @@
                 <a:ea typeface="Calibri" pitchFamily="34" charset="-122"/>
                 <a:cs typeface="Calibri" pitchFamily="34" charset="-120"/>
               </a:rPr>
-              <a:t>4.  The word 'unreported' means something was told to everyone.</a:t>
+              <a:t>4.  A reporter is a person who shares news and information with others.</a:t>
             </a:r>
             <a:endParaRPr lang="en-US" sz="1300" dirty="0"/>
           </a:p>
@@ -37849,11 +40327,11 @@
             </a:avLst>
           </a:prstGeom>
           <a:solidFill>
-            <a:srgbClr val="FEE2E2"/>
-          </a:solidFill>
-          <a:ln w="12700">
-            <a:solidFill>
-              <a:srgbClr val="DC2626"/>
+            <a:srgbClr val="DCFCE7"/>
+          </a:solidFill>
+          <a:ln w="12700">
+            <a:solidFill>
+              <a:srgbClr val="16A34A"/>
             </a:solidFill>
             <a:prstDash val="solid"/>
           </a:ln>
@@ -37886,13 +40364,13 @@
             <a:r>
               <a:rPr lang="en-US" sz="1100" b="1" dirty="0">
                 <a:solidFill>
-                  <a:srgbClr val="DC2626"/>
+                  <a:srgbClr val="16A34A"/>
                 </a:solidFill>
                 <a:latin typeface="Trebuchet MS" pitchFamily="34" charset="0"/>
                 <a:ea typeface="Trebuchet MS" pitchFamily="34" charset="-122"/>
                 <a:cs typeface="Trebuchet MS" pitchFamily="34" charset="-120"/>
               </a:rPr>
-              <a:t>FALSE</a:t>
+              <a:t>TRUE</a:t>
             </a:r>
             <a:endParaRPr lang="en-US" sz="1100" dirty="0"/>
           </a:p>
@@ -38868,7 +41346,7 @@
                 <a:ea typeface="Trebuchet MS" pitchFamily="34" charset="-122"/>
                 <a:cs typeface="Trebuchet MS" pitchFamily="34" charset="-120"/>
               </a:rPr>
-              <a:t>reports</a:t>
+              <a:t>unreported</a:t>
             </a:r>
             <a:endParaRPr lang="en-US" sz="1300" dirty="0"/>
           </a:p>
@@ -38934,7 +41412,7 @@
                 <a:ea typeface="Trebuchet MS" pitchFamily="34" charset="-122"/>
                 <a:cs typeface="Trebuchet MS" pitchFamily="34" charset="-120"/>
               </a:rPr>
-              <a:t>unreported</a:t>
+              <a:t>misreport</a:t>
             </a:r>
             <a:endParaRPr lang="en-US" sz="1300" dirty="0"/>
           </a:p>
@@ -39000,7 +41478,7 @@
                 <a:ea typeface="Trebuchet MS" pitchFamily="34" charset="-122"/>
                 <a:cs typeface="Trebuchet MS" pitchFamily="34" charset="-120"/>
               </a:rPr>
-              <a:t>misreported</a:t>
+              <a:t>reportage</a:t>
             </a:r>
             <a:endParaRPr lang="en-US" sz="1300" dirty="0"/>
           </a:p>
@@ -40180,7 +42658,7 @@
                 <a:ea typeface="Trebuchet MS" pitchFamily="34" charset="-122"/>
                 <a:cs typeface="Trebuchet MS" pitchFamily="34" charset="-120"/>
               </a:rPr>
-              <a:t>-s</a:t>
+              <a:t>-age</a:t>
             </a:r>
             <a:endParaRPr lang="en-US" sz="1300" dirty="0"/>
           </a:p>
@@ -40333,7 +42811,7 @@
                 <a:ea typeface="Trebuchet MS" pitchFamily="34" charset="-122"/>
                 <a:cs typeface="Trebuchet MS" pitchFamily="34" charset="-120"/>
               </a:rPr>
-              <a:t>-age</a:t>
+              <a:t>-able</a:t>
             </a:r>
             <a:endParaRPr lang="en-US" sz="1300" dirty="0"/>
           </a:p>
@@ -41244,7 +43722,7 @@
                 <a:ea typeface="Calibri" pitchFamily="34" charset="-122"/>
                 <a:cs typeface="Calibri" pitchFamily="34" charset="-120"/>
               </a:rPr>
-              <a:t>More than one report, or when someone tells about different things.</a:t>
+              <a:t>Something that happened but was never told to others or written about.</a:t>
             </a:r>
             <a:endParaRPr lang="en-US" sz="1200" dirty="0"/>
           </a:p>
@@ -41383,7 +43861,7 @@
                 <a:ea typeface="Calibri" pitchFamily="34" charset="-122"/>
                 <a:cs typeface="Calibri" pitchFamily="34" charset="-120"/>
               </a:rPr>
-              <a:t>The act of finding out information and sharing it with others.</a:t>
+              <a:t>The action of telling or writing about something that is happening right now.</a:t>
             </a:r>
             <a:endParaRPr lang="en-US" sz="1200" dirty="0"/>
           </a:p>
@@ -41522,7 +44000,7 @@
                 <a:ea typeface="Calibri" pitchFamily="34" charset="-122"/>
                 <a:cs typeface="Calibri" pitchFamily="34" charset="-120"/>
               </a:rPr>
-              <a:t>A person whose job is to find out news and tell other people about it.</a:t>
+              <a:t>A person whose job is to find out information and share it with others, like on the news.</a:t>
             </a:r>
             <a:endParaRPr lang="en-US" sz="1200" dirty="0"/>
           </a:p>
@@ -41661,7 +44139,7 @@
                 <a:ea typeface="Calibri" pitchFamily="34" charset="-122"/>
                 <a:cs typeface="Calibri" pitchFamily="34" charset="-120"/>
               </a:rPr>
-              <a:t>When information was shared incorrectly or in the wrong way.</a:t>
+              <a:t>A style of writing or news reporting that gives detailed information about real events.</a:t>
             </a:r>
             <a:endParaRPr lang="en-US" sz="1200" dirty="0"/>
           </a:p>
@@ -41734,7 +44212,7 @@
                 <a:ea typeface="Trebuchet MS" pitchFamily="34" charset="-122"/>
                 <a:cs typeface="Trebuchet MS" pitchFamily="34" charset="-120"/>
               </a:rPr>
-              <a:t>reports</a:t>
+              <a:t>unreported</a:t>
             </a:r>
             <a:endParaRPr lang="en-US" sz="1200" dirty="0"/>
           </a:p>
@@ -41800,7 +44278,7 @@
                 <a:ea typeface="Calibri" pitchFamily="34" charset="-122"/>
                 <a:cs typeface="Calibri" pitchFamily="34" charset="-120"/>
               </a:rPr>
-              <a:t>A piece of writing or spoken information that tells about something that happened.</a:t>
+              <a:t>A piece of writing or speaking that shares information about something that happened.</a:t>
             </a:r>
             <a:endParaRPr lang="en-US" sz="1200" dirty="0"/>
           </a:p>
@@ -41873,7 +44351,7 @@
                 <a:ea typeface="Trebuchet MS" pitchFamily="34" charset="-122"/>
                 <a:cs typeface="Trebuchet MS" pitchFamily="34" charset="-120"/>
               </a:rPr>
-              <a:t>unreported</a:t>
+              <a:t>misreport</a:t>
             </a:r>
             <a:endParaRPr lang="en-US" sz="1200" dirty="0"/>
           </a:p>
@@ -41939,7 +44417,7 @@
                 <a:ea typeface="Calibri" pitchFamily="34" charset="-122"/>
                 <a:cs typeface="Calibri" pitchFamily="34" charset="-120"/>
               </a:rPr>
-              <a:t>Something that happened but was never told to others or written down.</a:t>
+              <a:t>To give wrong or incorrect information about something that happened.</a:t>
             </a:r>
             <a:endParaRPr lang="en-US" sz="1200" dirty="0"/>
           </a:p>
@@ -42012,7 +44490,7 @@
                 <a:ea typeface="Trebuchet MS" pitchFamily="34" charset="-122"/>
                 <a:cs typeface="Trebuchet MS" pitchFamily="34" charset="-120"/>
               </a:rPr>
-              <a:t>misreported</a:t>
+              <a:t>reportage</a:t>
             </a:r>
             <a:endParaRPr lang="en-US" sz="1200" dirty="0"/>
           </a:p>
@@ -42078,7 +44556,7 @@
                 <a:ea typeface="Calibri" pitchFamily="34" charset="-122"/>
                 <a:cs typeface="Calibri" pitchFamily="34" charset="-120"/>
               </a:rPr>
-              <a:t>Told people about something that happened in the past.</a:t>
+              <a:t>When someone has already shared information or told others about something.</a:t>
             </a:r>
             <a:endParaRPr lang="en-US" sz="1200" dirty="0"/>
           </a:p>
@@ -42573,7 +45051,7 @@
                 <a:ea typeface="Calibri" pitchFamily="34" charset="-122"/>
                 <a:cs typeface="Calibri" pitchFamily="34" charset="-120"/>
               </a:rPr>
-              <a:t>The reporter stood outside the school and spoke into the camera to share the news story.</a:t>
+              <a:t>The reporter stood outside the school and told viewers about the science fair on the evening news.</a:t>
             </a:r>
             <a:endParaRPr lang="en-US" sz="1500" dirty="0"/>
           </a:p>
@@ -42737,7 +45215,7 @@
                 <a:ea typeface="Calibri" pitchFamily="34" charset="-122"/>
                 <a:cs typeface="Calibri" pitchFamily="34" charset="-120"/>
               </a:rPr>
-              <a:t>Our teacher asked us to write a report about an animal we had been studying in science.</a:t>
+              <a:t>Our teacher asked us to write a report about an Australian animal of our choice.</a:t>
             </a:r>
             <a:endParaRPr lang="en-US" sz="1500" dirty="0"/>
           </a:p>
@@ -42901,7 +45379,7 @@
                 <a:ea typeface="Calibri" pitchFamily="34" charset="-122"/>
                 <a:cs typeface="Calibri" pitchFamily="34" charset="-120"/>
               </a:rPr>
-              <a:t>The witness reported what she had seen to the police officer straight away.</a:t>
+              <a:t>The journalist was misreporting the facts, so the editor asked her to check her notes again.</a:t>
             </a:r>
             <a:endParaRPr lang="en-US" sz="1500" dirty="0"/>
           </a:p>

--- a/output/wordlabs-report-3day.pptx
+++ b/output/wordlabs-report-3day.pptx
@@ -34918,8 +34918,8 @@
         </p:nvSpPr>
         <p:spPr>
           <a:xfrm>
-            <a:off x="1952244" y="4169664"/>
-            <a:ext cx="543652" cy="475488"/>
+            <a:off x="1952596" y="4169664"/>
+            <a:ext cx="493776" cy="475488"/>
           </a:xfrm>
           <a:prstGeom prst="rect">
             <a:avLst>
@@ -34945,8 +34945,8 @@
         </p:nvSpPr>
         <p:spPr>
           <a:xfrm>
-            <a:off x="1952244" y="4169664"/>
-            <a:ext cx="543652" cy="475488"/>
+            <a:off x="1952596" y="4169664"/>
+            <a:ext cx="493776" cy="475488"/>
           </a:xfrm>
           <a:prstGeom prst="rect">
             <a:avLst/>
@@ -34984,8 +34984,8 @@
         </p:nvSpPr>
         <p:spPr>
           <a:xfrm>
-            <a:off x="2546188" y="4169664"/>
-            <a:ext cx="543652" cy="475488"/>
+            <a:off x="2497015" y="4169664"/>
+            <a:ext cx="493776" cy="475488"/>
           </a:xfrm>
           <a:prstGeom prst="rect">
             <a:avLst>
@@ -35011,8 +35011,8 @@
         </p:nvSpPr>
         <p:spPr>
           <a:xfrm>
-            <a:off x="2546188" y="4169664"/>
-            <a:ext cx="543652" cy="475488"/>
+            <a:off x="2497015" y="4169664"/>
+            <a:ext cx="493776" cy="475488"/>
           </a:xfrm>
           <a:prstGeom prst="rect">
             <a:avLst/>
@@ -35050,8 +35050,8 @@
         </p:nvSpPr>
         <p:spPr>
           <a:xfrm>
-            <a:off x="3140133" y="4169664"/>
-            <a:ext cx="543652" cy="475488"/>
+            <a:off x="3041435" y="4169664"/>
+            <a:ext cx="493776" cy="475488"/>
           </a:xfrm>
           <a:prstGeom prst="rect">
             <a:avLst>
@@ -35077,8 +35077,8 @@
         </p:nvSpPr>
         <p:spPr>
           <a:xfrm>
-            <a:off x="3140133" y="4169664"/>
-            <a:ext cx="543652" cy="475488"/>
+            <a:off x="3041435" y="4169664"/>
+            <a:ext cx="493776" cy="475488"/>
           </a:xfrm>
           <a:prstGeom prst="rect">
             <a:avLst/>
@@ -35116,8 +35116,8 @@
         </p:nvSpPr>
         <p:spPr>
           <a:xfrm>
-            <a:off x="3734077" y="4169664"/>
-            <a:ext cx="543652" cy="475488"/>
+            <a:off x="3585855" y="4169664"/>
+            <a:ext cx="493776" cy="475488"/>
           </a:xfrm>
           <a:prstGeom prst="rect">
             <a:avLst>
@@ -35143,8 +35143,8 @@
         </p:nvSpPr>
         <p:spPr>
           <a:xfrm>
-            <a:off x="3734077" y="4169664"/>
-            <a:ext cx="543652" cy="475488"/>
+            <a:off x="3585855" y="4169664"/>
+            <a:ext cx="493776" cy="475488"/>
           </a:xfrm>
           <a:prstGeom prst="rect">
             <a:avLst/>
@@ -35182,8 +35182,8 @@
         </p:nvSpPr>
         <p:spPr>
           <a:xfrm>
-            <a:off x="4328021" y="4169664"/>
-            <a:ext cx="543652" cy="475488"/>
+            <a:off x="4130274" y="4169664"/>
+            <a:ext cx="493776" cy="475488"/>
           </a:xfrm>
           <a:prstGeom prst="rect">
             <a:avLst>
@@ -35209,8 +35209,8 @@
         </p:nvSpPr>
         <p:spPr>
           <a:xfrm>
-            <a:off x="4328021" y="4169664"/>
-            <a:ext cx="543652" cy="475488"/>
+            <a:off x="4130274" y="4169664"/>
+            <a:ext cx="493776" cy="475488"/>
           </a:xfrm>
           <a:prstGeom prst="rect">
             <a:avLst/>
@@ -35234,7 +35234,7 @@
                 <a:ea typeface="Trebuchet MS" pitchFamily="34" charset="-122"/>
                 <a:cs typeface="Trebuchet MS" pitchFamily="34" charset="-120"/>
               </a:rPr>
-              <a:t>r</a:t>
+              <a:t>-</a:t>
             </a:r>
             <a:endParaRPr lang="en-US" sz="900" dirty="0"/>
           </a:p>
@@ -35248,8 +35248,8 @@
         </p:nvSpPr>
         <p:spPr>
           <a:xfrm>
-            <a:off x="4921966" y="4169664"/>
-            <a:ext cx="543652" cy="475488"/>
+            <a:off x="4674694" y="4169664"/>
+            <a:ext cx="493776" cy="475488"/>
           </a:xfrm>
           <a:prstGeom prst="rect">
             <a:avLst>
@@ -35275,8 +35275,8 @@
         </p:nvSpPr>
         <p:spPr>
           <a:xfrm>
-            <a:off x="4921966" y="4169664"/>
-            <a:ext cx="543652" cy="475488"/>
+            <a:off x="4674694" y="4169664"/>
+            <a:ext cx="493776" cy="475488"/>
           </a:xfrm>
           <a:prstGeom prst="rect">
             <a:avLst/>
@@ -35300,7 +35300,7 @@
                 <a:ea typeface="Trebuchet MS" pitchFamily="34" charset="-122"/>
                 <a:cs typeface="Trebuchet MS" pitchFamily="34" charset="-120"/>
               </a:rPr>
-              <a:t>e</a:t>
+              <a:t>r</a:t>
             </a:r>
             <a:endParaRPr lang="en-US" sz="900" dirty="0"/>
           </a:p>
@@ -35314,8 +35314,8 @@
         </p:nvSpPr>
         <p:spPr>
           <a:xfrm>
-            <a:off x="5515910" y="4169664"/>
-            <a:ext cx="543652" cy="475488"/>
+            <a:off x="5219114" y="4169664"/>
+            <a:ext cx="493776" cy="475488"/>
           </a:xfrm>
           <a:prstGeom prst="rect">
             <a:avLst>
@@ -35341,8 +35341,8 @@
         </p:nvSpPr>
         <p:spPr>
           <a:xfrm>
-            <a:off x="5515910" y="4169664"/>
-            <a:ext cx="543652" cy="475488"/>
+            <a:off x="5219114" y="4169664"/>
+            <a:ext cx="493776" cy="475488"/>
           </a:xfrm>
           <a:prstGeom prst="rect">
             <a:avLst/>
@@ -35366,7 +35366,7 @@
                 <a:ea typeface="Trebuchet MS" pitchFamily="34" charset="-122"/>
                 <a:cs typeface="Trebuchet MS" pitchFamily="34" charset="-120"/>
               </a:rPr>
-              <a:t>p</a:t>
+              <a:t>e</a:t>
             </a:r>
             <a:endParaRPr lang="en-US" sz="900" dirty="0"/>
           </a:p>
@@ -35380,8 +35380,8 @@
         </p:nvSpPr>
         <p:spPr>
           <a:xfrm>
-            <a:off x="6109855" y="4169664"/>
-            <a:ext cx="543652" cy="475488"/>
+            <a:off x="5763534" y="4169664"/>
+            <a:ext cx="493776" cy="475488"/>
           </a:xfrm>
           <a:prstGeom prst="rect">
             <a:avLst>
@@ -35407,8 +35407,8 @@
         </p:nvSpPr>
         <p:spPr>
           <a:xfrm>
-            <a:off x="6109855" y="4169664"/>
-            <a:ext cx="543652" cy="475488"/>
+            <a:off x="5763534" y="4169664"/>
+            <a:ext cx="493776" cy="475488"/>
           </a:xfrm>
           <a:prstGeom prst="rect">
             <a:avLst/>
@@ -35432,7 +35432,7 @@
                 <a:ea typeface="Trebuchet MS" pitchFamily="34" charset="-122"/>
                 <a:cs typeface="Trebuchet MS" pitchFamily="34" charset="-120"/>
               </a:rPr>
-              <a:t>or</a:t>
+              <a:t>p</a:t>
             </a:r>
             <a:endParaRPr lang="en-US" sz="900" dirty="0"/>
           </a:p>
@@ -35446,8 +35446,8 @@
         </p:nvSpPr>
         <p:spPr>
           <a:xfrm>
-            <a:off x="6703799" y="4169664"/>
-            <a:ext cx="543652" cy="475488"/>
+            <a:off x="6307953" y="4169664"/>
+            <a:ext cx="493776" cy="475488"/>
           </a:xfrm>
           <a:prstGeom prst="rect">
             <a:avLst>
@@ -35473,8 +35473,8 @@
         </p:nvSpPr>
         <p:spPr>
           <a:xfrm>
-            <a:off x="6703799" y="4169664"/>
-            <a:ext cx="543652" cy="475488"/>
+            <a:off x="6307953" y="4169664"/>
+            <a:ext cx="493776" cy="475488"/>
           </a:xfrm>
           <a:prstGeom prst="rect">
             <a:avLst/>
@@ -35498,7 +35498,7 @@
                 <a:ea typeface="Trebuchet MS" pitchFamily="34" charset="-122"/>
                 <a:cs typeface="Trebuchet MS" pitchFamily="34" charset="-120"/>
               </a:rPr>
-              <a:t>t</a:t>
+              <a:t>or</a:t>
             </a:r>
             <a:endParaRPr lang="en-US" sz="900" dirty="0"/>
           </a:p>
@@ -35512,8 +35512,8 @@
         </p:nvSpPr>
         <p:spPr>
           <a:xfrm>
-            <a:off x="7297743" y="4169664"/>
-            <a:ext cx="543652" cy="475488"/>
+            <a:off x="6852373" y="4169664"/>
+            <a:ext cx="493776" cy="475488"/>
           </a:xfrm>
           <a:prstGeom prst="rect">
             <a:avLst>
@@ -35539,8 +35539,8 @@
         </p:nvSpPr>
         <p:spPr>
           <a:xfrm>
-            <a:off x="7297743" y="4169664"/>
-            <a:ext cx="543652" cy="475488"/>
+            <a:off x="6852373" y="4169664"/>
+            <a:ext cx="493776" cy="475488"/>
           </a:xfrm>
           <a:prstGeom prst="rect">
             <a:avLst/>
@@ -35564,7 +35564,7 @@
                 <a:ea typeface="Trebuchet MS" pitchFamily="34" charset="-122"/>
                 <a:cs typeface="Trebuchet MS" pitchFamily="34" charset="-120"/>
               </a:rPr>
-              <a:t>e</a:t>
+              <a:t>t</a:t>
             </a:r>
             <a:endParaRPr lang="en-US" sz="900" dirty="0"/>
           </a:p>
@@ -35578,8 +35578,8 @@
         </p:nvSpPr>
         <p:spPr>
           <a:xfrm>
-            <a:off x="7891688" y="4169664"/>
-            <a:ext cx="543652" cy="475488"/>
+            <a:off x="7396793" y="4169664"/>
+            <a:ext cx="493776" cy="475488"/>
           </a:xfrm>
           <a:prstGeom prst="rect">
             <a:avLst>
@@ -35605,8 +35605,74 @@
         </p:nvSpPr>
         <p:spPr>
           <a:xfrm>
-            <a:off x="7891688" y="4169664"/>
-            <a:ext cx="543652" cy="475488"/>
+            <a:off x="7396793" y="4169664"/>
+            <a:ext cx="493776" cy="475488"/>
+          </a:xfrm>
+          <a:prstGeom prst="rect">
+            <a:avLst/>
+          </a:prstGeom>
+          <a:noFill/>
+          <a:ln/>
+        </p:spPr>
+        <p:txBody>
+          <a:bodyPr wrap="square" lIns="0" tIns="0" rIns="0" bIns="0" rtlCol="0" anchor="ctr"/>
+          <a:lstStyle/>
+          <a:p>
+            <a:pPr algn="ctr" indent="0" marL="0">
+              <a:buNone/>
+            </a:pPr>
+            <a:r>
+              <a:rPr lang="en-US" sz="900" b="1" dirty="0">
+                <a:solidFill>
+                  <a:srgbClr val="9D174D"/>
+                </a:solidFill>
+                <a:latin typeface="Trebuchet MS" pitchFamily="34" charset="0"/>
+                <a:ea typeface="Trebuchet MS" pitchFamily="34" charset="-122"/>
+                <a:cs typeface="Trebuchet MS" pitchFamily="34" charset="-120"/>
+              </a:rPr>
+              <a:t>e</a:t>
+            </a:r>
+            <a:endParaRPr lang="en-US" sz="900" dirty="0"/>
+          </a:p>
+        </p:txBody>
+      </p:sp>
+      <p:sp>
+        <p:nvSpPr>
+          <p:cNvPr id="64" name="Shape 62"/>
+          <p:cNvSpPr/>
+          <p:nvPr/>
+        </p:nvSpPr>
+        <p:spPr>
+          <a:xfrm>
+            <a:off x="7941212" y="4169664"/>
+            <a:ext cx="493776" cy="475488"/>
+          </a:xfrm>
+          <a:prstGeom prst="rect">
+            <a:avLst>
+              <a:gd name="adj" fmla="val 7692"/>
+            </a:avLst>
+          </a:prstGeom>
+          <a:solidFill>
+            <a:srgbClr val="FFFFFF"/>
+          </a:solidFill>
+          <a:ln w="12700">
+            <a:solidFill>
+              <a:srgbClr val="DB2777"/>
+            </a:solidFill>
+            <a:prstDash val="solid"/>
+          </a:ln>
+        </p:spPr>
+      </p:sp>
+      <p:sp>
+        <p:nvSpPr>
+          <p:cNvPr id="65" name="Text 63"/>
+          <p:cNvSpPr/>
+          <p:nvPr/>
+        </p:nvSpPr>
+        <p:spPr>
+          <a:xfrm>
+            <a:off x="7941212" y="4169664"/>
+            <a:ext cx="493776" cy="475488"/>
           </a:xfrm>
           <a:prstGeom prst="rect">
             <a:avLst/>
@@ -39887,7 +39953,7 @@
                 <a:ea typeface="Calibri" pitchFamily="34" charset="-122"/>
                 <a:cs typeface="Calibri" pitchFamily="34" charset="-120"/>
               </a:rPr>
-              <a:t>1.  The root 'report' comes from the Greek language.</a:t>
+              <a:t>1.  The suffix '-er' in 'reporter' means a person who does something.</a:t>
             </a:r>
             <a:endParaRPr lang="en-US" sz="1300" dirty="0"/>
           </a:p>
@@ -39910,11 +39976,11 @@
             </a:avLst>
           </a:prstGeom>
           <a:solidFill>
-            <a:srgbClr val="FEE2E2"/>
-          </a:solidFill>
-          <a:ln w="12700">
-            <a:solidFill>
-              <a:srgbClr val="DC2626"/>
+            <a:srgbClr val="DCFCE7"/>
+          </a:solidFill>
+          <a:ln w="12700">
+            <a:solidFill>
+              <a:srgbClr val="16A34A"/>
             </a:solidFill>
             <a:prstDash val="solid"/>
           </a:ln>
@@ -39947,13 +40013,13 @@
             <a:r>
               <a:rPr lang="en-US" sz="1100" b="1" dirty="0">
                 <a:solidFill>
-                  <a:srgbClr val="DC2626"/>
+                  <a:srgbClr val="16A34A"/>
                 </a:solidFill>
                 <a:latin typeface="Trebuchet MS" pitchFamily="34" charset="0"/>
                 <a:ea typeface="Trebuchet MS" pitchFamily="34" charset="-122"/>
                 <a:cs typeface="Trebuchet MS" pitchFamily="34" charset="-120"/>
               </a:rPr>
-              <a:t>FALSE</a:t>
+              <a:t>TRUE</a:t>
             </a:r>
             <a:endParaRPr lang="en-US" sz="1100" dirty="0"/>
           </a:p>
@@ -40026,7 +40092,7 @@
                 <a:ea typeface="Calibri" pitchFamily="34" charset="-122"/>
                 <a:cs typeface="Calibri" pitchFamily="34" charset="-120"/>
               </a:rPr>
-              <a:t>2.  The word 'unreported' means something that has been told to everyone.</a:t>
+              <a:t>2.  The root 'report' comes from the Greek language.</a:t>
             </a:r>
             <a:endParaRPr lang="en-US" sz="1300" dirty="0"/>
           </a:p>
@@ -40165,7 +40231,7 @@
                 <a:ea typeface="Calibri" pitchFamily="34" charset="-122"/>
                 <a:cs typeface="Calibri" pitchFamily="34" charset="-120"/>
               </a:rPr>
-              <a:t>3.  The word 'misreport' means to share incorrect information about something.</a:t>
+              <a:t>3.  A reporter is a person who shares news and information with others.</a:t>
             </a:r>
             <a:endParaRPr lang="en-US" sz="1300" dirty="0"/>
           </a:p>
@@ -40304,7 +40370,7 @@
                 <a:ea typeface="Calibri" pitchFamily="34" charset="-122"/>
                 <a:cs typeface="Calibri" pitchFamily="34" charset="-120"/>
               </a:rPr>
-              <a:t>4.  A reporter is a person who shares news and information with others.</a:t>
+              <a:t>4.  The word 'unreported' means something that has been told to everyone.</a:t>
             </a:r>
             <a:endParaRPr lang="en-US" sz="1300" dirty="0"/>
           </a:p>
@@ -40327,11 +40393,11 @@
             </a:avLst>
           </a:prstGeom>
           <a:solidFill>
-            <a:srgbClr val="DCFCE7"/>
-          </a:solidFill>
-          <a:ln w="12700">
-            <a:solidFill>
-              <a:srgbClr val="16A34A"/>
+            <a:srgbClr val="FEE2E2"/>
+          </a:solidFill>
+          <a:ln w="12700">
+            <a:solidFill>
+              <a:srgbClr val="DC2626"/>
             </a:solidFill>
             <a:prstDash val="solid"/>
           </a:ln>
@@ -40364,13 +40430,13 @@
             <a:r>
               <a:rPr lang="en-US" sz="1100" b="1" dirty="0">
                 <a:solidFill>
-                  <a:srgbClr val="16A34A"/>
+                  <a:srgbClr val="DC2626"/>
                 </a:solidFill>
                 <a:latin typeface="Trebuchet MS" pitchFamily="34" charset="0"/>
                 <a:ea typeface="Trebuchet MS" pitchFamily="34" charset="-122"/>
                 <a:cs typeface="Trebuchet MS" pitchFamily="34" charset="-120"/>
               </a:rPr>
-              <a:t>TRUE</a:t>
+              <a:t>FALSE</a:t>
             </a:r>
             <a:endParaRPr lang="en-US" sz="1100" dirty="0"/>
           </a:p>
@@ -40443,7 +40509,7 @@
                 <a:ea typeface="Calibri" pitchFamily="34" charset="-122"/>
                 <a:cs typeface="Calibri" pitchFamily="34" charset="-120"/>
               </a:rPr>
-              <a:t>5.  The suffix '-er' in 'reporter' means a person who does something.</a:t>
+              <a:t>5.  The word 'misreport' means to share incorrect information about something.</a:t>
             </a:r>
             <a:endParaRPr lang="en-US" sz="1300" dirty="0"/>
           </a:p>
